--- a/林子瑜-LLM_ETF.pptx
+++ b/林子瑜-LLM_ETF.pptx
@@ -5,7 +5,7 @@
     <p:sldMasterId id="2147483659" r:id="rId1"/>
   </p:sldMasterIdLst>
   <p:notesMasterIdLst>
-    <p:notesMasterId r:id="rId23"/>
+    <p:notesMasterId r:id="rId26"/>
   </p:notesMasterIdLst>
   <p:sldIdLst>
     <p:sldId id="256" r:id="rId2"/>
@@ -15,41 +15,44 @@
     <p:sldId id="260" r:id="rId6"/>
     <p:sldId id="261" r:id="rId7"/>
     <p:sldId id="262" r:id="rId8"/>
-    <p:sldId id="263" r:id="rId9"/>
-    <p:sldId id="264" r:id="rId10"/>
-    <p:sldId id="265" r:id="rId11"/>
-    <p:sldId id="266" r:id="rId12"/>
-    <p:sldId id="267" r:id="rId13"/>
-    <p:sldId id="268" r:id="rId14"/>
-    <p:sldId id="269" r:id="rId15"/>
-    <p:sldId id="270" r:id="rId16"/>
-    <p:sldId id="278" r:id="rId17"/>
-    <p:sldId id="272" r:id="rId18"/>
-    <p:sldId id="273" r:id="rId19"/>
-    <p:sldId id="274" r:id="rId20"/>
-    <p:sldId id="275" r:id="rId21"/>
-    <p:sldId id="276" r:id="rId22"/>
+    <p:sldId id="280" r:id="rId9"/>
+    <p:sldId id="263" r:id="rId10"/>
+    <p:sldId id="279" r:id="rId11"/>
+    <p:sldId id="264" r:id="rId12"/>
+    <p:sldId id="281" r:id="rId13"/>
+    <p:sldId id="265" r:id="rId14"/>
+    <p:sldId id="266" r:id="rId15"/>
+    <p:sldId id="267" r:id="rId16"/>
+    <p:sldId id="268" r:id="rId17"/>
+    <p:sldId id="269" r:id="rId18"/>
+    <p:sldId id="270" r:id="rId19"/>
+    <p:sldId id="278" r:id="rId20"/>
+    <p:sldId id="272" r:id="rId21"/>
+    <p:sldId id="273" r:id="rId22"/>
+    <p:sldId id="274" r:id="rId23"/>
+    <p:sldId id="275" r:id="rId24"/>
+    <p:sldId id="276" r:id="rId25"/>
   </p:sldIdLst>
   <p:sldSz cx="12192000" cy="6858000"/>
   <p:notesSz cx="6858000" cy="9144000"/>
   <p:embeddedFontLst>
     <p:embeddedFont>
       <p:font typeface="Cambria Math" panose="02040503050406030204" pitchFamily="18" charset="0"/>
-      <p:regular r:id="rId24"/>
+      <p:regular r:id="rId27"/>
     </p:embeddedFont>
     <p:embeddedFont>
       <p:font typeface="DM Sans" pitchFamily="2" charset="0"/>
-      <p:regular r:id="rId25"/>
-      <p:bold r:id="rId26"/>
-      <p:italic r:id="rId27"/>
-      <p:boldItalic r:id="rId28"/>
+      <p:regular r:id="rId28"/>
+      <p:bold r:id="rId29"/>
+      <p:italic r:id="rId30"/>
+      <p:boldItalic r:id="rId31"/>
     </p:embeddedFont>
     <p:embeddedFont>
       <p:font typeface="Merriweather" panose="00000500000000000000" pitchFamily="2" charset="0"/>
-      <p:regular r:id="rId29"/>
-      <p:bold r:id="rId30"/>
-      <p:italic r:id="rId31"/>
-      <p:boldItalic r:id="rId32"/>
+      <p:regular r:id="rId32"/>
+      <p:bold r:id="rId33"/>
+      <p:italic r:id="rId34"/>
+      <p:boldItalic r:id="rId35"/>
     </p:embeddedFont>
   </p:embeddedFontLst>
   <p:defaultTextStyle>
@@ -864,6 +867,117 @@
   <p:cSld>
     <p:spTree>
       <p:nvGrpSpPr>
+        <p:cNvPr id="1" name="Shape 220"/>
+        <p:cNvGrpSpPr/>
+        <p:nvPr/>
+      </p:nvGrpSpPr>
+      <p:grpSpPr>
+        <a:xfrm>
+          <a:off x="0" y="0"/>
+          <a:ext cx="0" cy="0"/>
+          <a:chOff x="0" y="0"/>
+          <a:chExt cx="0" cy="0"/>
+        </a:xfrm>
+      </p:grpSpPr>
+      <p:sp>
+        <p:nvSpPr>
+          <p:cNvPr id="221" name="Google Shape;221;p9:notes"/>
+          <p:cNvSpPr txBox="1">
+            <a:spLocks noGrp="1"/>
+          </p:cNvSpPr>
+          <p:nvPr>
+            <p:ph type="body" idx="1"/>
+          </p:nvPr>
+        </p:nvSpPr>
+        <p:spPr>
+          <a:xfrm>
+            <a:off x="685800" y="4343400"/>
+            <a:ext cx="5486400" cy="4114800"/>
+          </a:xfrm>
+          <a:prstGeom prst="rect">
+            <a:avLst/>
+          </a:prstGeom>
+        </p:spPr>
+        <p:txBody>
+          <a:bodyPr spcFirstLastPara="1" wrap="square" lIns="91425" tIns="91425" rIns="91425" bIns="91425" anchor="t" anchorCtr="0">
+            <a:noAutofit/>
+          </a:bodyPr>
+          <a:lstStyle/>
+          <a:p>
+            <a:pPr marL="0" lvl="0" indent="0" algn="l" rtl="0">
+              <a:spcBef>
+                <a:spcPts val="0"/>
+              </a:spcBef>
+              <a:spcAft>
+                <a:spcPts val="0"/>
+              </a:spcAft>
+              <a:buNone/>
+            </a:pPr>
+            <a:endParaRPr/>
+          </a:p>
+        </p:txBody>
+      </p:sp>
+      <p:sp>
+        <p:nvSpPr>
+          <p:cNvPr id="222" name="Google Shape;222;p9:notes"/>
+          <p:cNvSpPr>
+            <a:spLocks noGrp="1" noRot="1" noChangeAspect="1"/>
+          </p:cNvSpPr>
+          <p:nvPr>
+            <p:ph type="sldImg" idx="2"/>
+          </p:nvPr>
+        </p:nvSpPr>
+        <p:spPr>
+          <a:xfrm>
+            <a:off x="381000" y="685800"/>
+            <a:ext cx="6096000" cy="3429000"/>
+          </a:xfrm>
+          <a:custGeom>
+            <a:avLst/>
+            <a:gdLst/>
+            <a:ahLst/>
+            <a:cxnLst/>
+            <a:rect l="l" t="t" r="r" b="b"/>
+            <a:pathLst>
+              <a:path w="120000" h="120000" extrusionOk="0">
+                <a:moveTo>
+                  <a:pt x="0" y="0"/>
+                </a:moveTo>
+                <a:lnTo>
+                  <a:pt x="120000" y="0"/>
+                </a:lnTo>
+                <a:lnTo>
+                  <a:pt x="120000" y="120000"/>
+                </a:lnTo>
+                <a:lnTo>
+                  <a:pt x="0" y="120000"/>
+                </a:lnTo>
+                <a:close/>
+              </a:path>
+            </a:pathLst>
+          </a:custGeom>
+        </p:spPr>
+        <p:txBody>
+          <a:bodyPr/>
+          <a:lstStyle/>
+          <a:p>
+            <a:endParaRPr lang="zh-TW" altLang="en-US"/>
+          </a:p>
+        </p:txBody>
+      </p:sp>
+    </p:spTree>
+  </p:cSld>
+  <p:clrMapOvr>
+    <a:masterClrMapping/>
+  </p:clrMapOvr>
+</p:notes>
+</file>
+
+<file path=ppt/notesSlides/notesSlide11.xml><?xml version="1.0" encoding="utf-8"?>
+<p:notes xmlns:a="http://schemas.openxmlformats.org/drawingml/2006/main" xmlns:r="http://schemas.openxmlformats.org/officeDocument/2006/relationships" xmlns:p="http://schemas.openxmlformats.org/presentationml/2006/main" showMasterSp="0" showMasterPhAnim="0">
+  <p:cSld>
+    <p:spTree>
+      <p:nvGrpSpPr>
         <p:cNvPr id="1" name="Shape 236"/>
         <p:cNvGrpSpPr/>
         <p:nvPr/>
@@ -974,7 +1088,7 @@
 </p:notes>
 </file>
 
-<file path=ppt/notesSlides/notesSlide11.xml><?xml version="1.0" encoding="utf-8"?>
+<file path=ppt/notesSlides/notesSlide12.xml><?xml version="1.0" encoding="utf-8"?>
 <p:notes xmlns:a="http://schemas.openxmlformats.org/drawingml/2006/main" xmlns:r="http://schemas.openxmlformats.org/officeDocument/2006/relationships" xmlns:p="http://schemas.openxmlformats.org/presentationml/2006/main" showMasterSp="0" showMasterPhAnim="0">
   <p:cSld>
     <p:spTree>
@@ -1089,7 +1203,7 @@
 </p:notes>
 </file>
 
-<file path=ppt/notesSlides/notesSlide12.xml><?xml version="1.0" encoding="utf-8"?>
+<file path=ppt/notesSlides/notesSlide13.xml><?xml version="1.0" encoding="utf-8"?>
 <p:notes xmlns:a="http://schemas.openxmlformats.org/drawingml/2006/main" xmlns:r="http://schemas.openxmlformats.org/officeDocument/2006/relationships" xmlns:p="http://schemas.openxmlformats.org/presentationml/2006/main" showMasterSp="0" showMasterPhAnim="0">
   <p:cSld>
     <p:spTree>
@@ -1204,7 +1318,7 @@
 </p:notes>
 </file>
 
-<file path=ppt/notesSlides/notesSlide13.xml><?xml version="1.0" encoding="utf-8"?>
+<file path=ppt/notesSlides/notesSlide14.xml><?xml version="1.0" encoding="utf-8"?>
 <p:notes xmlns:a="http://schemas.openxmlformats.org/drawingml/2006/main" xmlns:r="http://schemas.openxmlformats.org/officeDocument/2006/relationships" xmlns:p="http://schemas.openxmlformats.org/presentationml/2006/main" showMasterSp="0" showMasterPhAnim="0">
   <p:cSld>
     <p:spTree>
@@ -1319,7 +1433,7 @@
 </p:notes>
 </file>
 
-<file path=ppt/notesSlides/notesSlide14.xml><?xml version="1.0" encoding="utf-8"?>
+<file path=ppt/notesSlides/notesSlide15.xml><?xml version="1.0" encoding="utf-8"?>
 <p:notes xmlns:a="http://schemas.openxmlformats.org/drawingml/2006/main" xmlns:r="http://schemas.openxmlformats.org/officeDocument/2006/relationships" xmlns:p="http://schemas.openxmlformats.org/presentationml/2006/main" showMasterSp="0" showMasterPhAnim="0">
   <p:cSld>
     <p:spTree>
@@ -1430,7 +1544,7 @@
 </p:notes>
 </file>
 
-<file path=ppt/notesSlides/notesSlide15.xml><?xml version="1.0" encoding="utf-8"?>
+<file path=ppt/notesSlides/notesSlide16.xml><?xml version="1.0" encoding="utf-8"?>
 <p:notes xmlns:a="http://schemas.openxmlformats.org/drawingml/2006/main" xmlns:r="http://schemas.openxmlformats.org/officeDocument/2006/relationships" xmlns:p="http://schemas.openxmlformats.org/presentationml/2006/main" showMasterSp="0" showMasterPhAnim="0">
   <p:cSld>
     <p:spTree>
@@ -1541,7 +1655,7 @@
 </p:notes>
 </file>
 
-<file path=ppt/notesSlides/notesSlide16.xml><?xml version="1.0" encoding="utf-8"?>
+<file path=ppt/notesSlides/notesSlide17.xml><?xml version="1.0" encoding="utf-8"?>
 <p:notes xmlns:a="http://schemas.openxmlformats.org/drawingml/2006/main" xmlns:r="http://schemas.openxmlformats.org/officeDocument/2006/relationships" xmlns:p="http://schemas.openxmlformats.org/presentationml/2006/main" showMasterSp="0" showMasterPhAnim="0">
   <p:cSld>
     <p:spTree>
@@ -1679,7 +1793,7 @@
 </p:notes>
 </file>
 
-<file path=ppt/notesSlides/notesSlide17.xml><?xml version="1.0" encoding="utf-8"?>
+<file path=ppt/notesSlides/notesSlide18.xml><?xml version="1.0" encoding="utf-8"?>
 <p:notes xmlns:a="http://schemas.openxmlformats.org/drawingml/2006/main" xmlns:r="http://schemas.openxmlformats.org/officeDocument/2006/relationships" xmlns:p="http://schemas.openxmlformats.org/presentationml/2006/main" showMasterSp="0" showMasterPhAnim="0">
   <p:cSld>
     <p:spTree>
@@ -1815,7 +1929,7 @@
 </p:notes>
 </file>
 
-<file path=ppt/notesSlides/notesSlide18.xml><?xml version="1.0" encoding="utf-8"?>
+<file path=ppt/notesSlides/notesSlide19.xml><?xml version="1.0" encoding="utf-8"?>
 <p:notes xmlns:a="http://schemas.openxmlformats.org/drawingml/2006/main" xmlns:r="http://schemas.openxmlformats.org/officeDocument/2006/relationships" xmlns:p="http://schemas.openxmlformats.org/presentationml/2006/main" showMasterSp="0" showMasterPhAnim="0">
   <p:cSld>
     <p:spTree>
@@ -1873,121 +1987,6 @@
       <p:sp>
         <p:nvSpPr>
           <p:cNvPr id="374" name="Google Shape;374;p18:notes"/>
-          <p:cNvSpPr>
-            <a:spLocks noGrp="1" noRot="1" noChangeAspect="1"/>
-          </p:cNvSpPr>
-          <p:nvPr>
-            <p:ph type="sldImg" idx="2"/>
-          </p:nvPr>
-        </p:nvSpPr>
-        <p:spPr>
-          <a:xfrm>
-            <a:off x="381000" y="685800"/>
-            <a:ext cx="6096000" cy="3429000"/>
-          </a:xfrm>
-          <a:custGeom>
-            <a:avLst/>
-            <a:gdLst/>
-            <a:ahLst/>
-            <a:cxnLst/>
-            <a:rect l="l" t="t" r="r" b="b"/>
-            <a:pathLst>
-              <a:path w="120000" h="120000" extrusionOk="0">
-                <a:moveTo>
-                  <a:pt x="0" y="0"/>
-                </a:moveTo>
-                <a:lnTo>
-                  <a:pt x="120000" y="0"/>
-                </a:lnTo>
-                <a:lnTo>
-                  <a:pt x="120000" y="120000"/>
-                </a:lnTo>
-                <a:lnTo>
-                  <a:pt x="0" y="120000"/>
-                </a:lnTo>
-                <a:close/>
-              </a:path>
-            </a:pathLst>
-          </a:custGeom>
-        </p:spPr>
-        <p:txBody>
-          <a:bodyPr/>
-          <a:lstStyle/>
-          <a:p>
-            <a:endParaRPr lang="zh-TW" altLang="en-US"/>
-          </a:p>
-        </p:txBody>
-      </p:sp>
-    </p:spTree>
-  </p:cSld>
-  <p:clrMapOvr>
-    <a:masterClrMapping/>
-  </p:clrMapOvr>
-</p:notes>
-</file>
-
-<file path=ppt/notesSlides/notesSlide19.xml><?xml version="1.0" encoding="utf-8"?>
-<p:notes xmlns:a="http://schemas.openxmlformats.org/drawingml/2006/main" xmlns:r="http://schemas.openxmlformats.org/officeDocument/2006/relationships" xmlns:p="http://schemas.openxmlformats.org/presentationml/2006/main" showMasterSp="0" showMasterPhAnim="0">
-  <p:cSld>
-    <p:spTree>
-      <p:nvGrpSpPr>
-        <p:cNvPr id="1" name="Shape 385"/>
-        <p:cNvGrpSpPr/>
-        <p:nvPr/>
-      </p:nvGrpSpPr>
-      <p:grpSpPr>
-        <a:xfrm>
-          <a:off x="0" y="0"/>
-          <a:ext cx="0" cy="0"/>
-          <a:chOff x="0" y="0"/>
-          <a:chExt cx="0" cy="0"/>
-        </a:xfrm>
-      </p:grpSpPr>
-      <p:sp>
-        <p:nvSpPr>
-          <p:cNvPr id="386" name="Google Shape;386;p19:notes"/>
-          <p:cNvSpPr txBox="1">
-            <a:spLocks noGrp="1"/>
-          </p:cNvSpPr>
-          <p:nvPr>
-            <p:ph type="body" idx="1"/>
-          </p:nvPr>
-        </p:nvSpPr>
-        <p:spPr>
-          <a:xfrm>
-            <a:off x="685800" y="4343400"/>
-            <a:ext cx="5486400" cy="4114800"/>
-          </a:xfrm>
-          <a:prstGeom prst="rect">
-            <a:avLst/>
-          </a:prstGeom>
-        </p:spPr>
-        <p:txBody>
-          <a:bodyPr spcFirstLastPara="1" wrap="square" lIns="91425" tIns="91425" rIns="91425" bIns="91425" anchor="t" anchorCtr="0">
-            <a:noAutofit/>
-          </a:bodyPr>
-          <a:lstStyle/>
-          <a:p>
-            <a:pPr marL="0" lvl="0" indent="0" algn="l" rtl="0">
-              <a:spcBef>
-                <a:spcPts val="0"/>
-              </a:spcBef>
-              <a:spcAft>
-                <a:spcPts val="0"/>
-              </a:spcAft>
-              <a:buNone/>
-            </a:pPr>
-            <a:r>
-              <a:rPr lang="zh-TW" altLang="zh-TW" dirty="0"/>
-              <a:t>綜合發現有三點：沒有單一冠軍模型，不同市場最佳模型不同；迴歸顯示次日走勢本質難預測；所以 LLM 定位在解釋型輔助，而不是當主要算力引擎。</a:t>
-            </a:r>
-            <a:endParaRPr dirty="0"/>
-          </a:p>
-        </p:txBody>
-      </p:sp>
-      <p:sp>
-        <p:nvSpPr>
-          <p:cNvPr id="387" name="Google Shape;387;p19:notes"/>
           <p:cNvSpPr>
             <a:spLocks noGrp="1" noRot="1" noChangeAspect="1"/>
           </p:cNvSpPr>
@@ -2157,6 +2156,121 @@
   <p:cSld>
     <p:spTree>
       <p:nvGrpSpPr>
+        <p:cNvPr id="1" name="Shape 385"/>
+        <p:cNvGrpSpPr/>
+        <p:nvPr/>
+      </p:nvGrpSpPr>
+      <p:grpSpPr>
+        <a:xfrm>
+          <a:off x="0" y="0"/>
+          <a:ext cx="0" cy="0"/>
+          <a:chOff x="0" y="0"/>
+          <a:chExt cx="0" cy="0"/>
+        </a:xfrm>
+      </p:grpSpPr>
+      <p:sp>
+        <p:nvSpPr>
+          <p:cNvPr id="386" name="Google Shape;386;p19:notes"/>
+          <p:cNvSpPr txBox="1">
+            <a:spLocks noGrp="1"/>
+          </p:cNvSpPr>
+          <p:nvPr>
+            <p:ph type="body" idx="1"/>
+          </p:nvPr>
+        </p:nvSpPr>
+        <p:spPr>
+          <a:xfrm>
+            <a:off x="685800" y="4343400"/>
+            <a:ext cx="5486400" cy="4114800"/>
+          </a:xfrm>
+          <a:prstGeom prst="rect">
+            <a:avLst/>
+          </a:prstGeom>
+        </p:spPr>
+        <p:txBody>
+          <a:bodyPr spcFirstLastPara="1" wrap="square" lIns="91425" tIns="91425" rIns="91425" bIns="91425" anchor="t" anchorCtr="0">
+            <a:noAutofit/>
+          </a:bodyPr>
+          <a:lstStyle/>
+          <a:p>
+            <a:pPr marL="0" lvl="0" indent="0" algn="l" rtl="0">
+              <a:spcBef>
+                <a:spcPts val="0"/>
+              </a:spcBef>
+              <a:spcAft>
+                <a:spcPts val="0"/>
+              </a:spcAft>
+              <a:buNone/>
+            </a:pPr>
+            <a:r>
+              <a:rPr lang="zh-TW" altLang="zh-TW" dirty="0"/>
+              <a:t>綜合發現有三點：沒有單一冠軍模型，不同市場最佳模型不同；迴歸顯示次日走勢本質難預測；所以 LLM 定位在解釋型輔助，而不是當主要算力引擎。</a:t>
+            </a:r>
+            <a:endParaRPr dirty="0"/>
+          </a:p>
+        </p:txBody>
+      </p:sp>
+      <p:sp>
+        <p:nvSpPr>
+          <p:cNvPr id="387" name="Google Shape;387;p19:notes"/>
+          <p:cNvSpPr>
+            <a:spLocks noGrp="1" noRot="1" noChangeAspect="1"/>
+          </p:cNvSpPr>
+          <p:nvPr>
+            <p:ph type="sldImg" idx="2"/>
+          </p:nvPr>
+        </p:nvSpPr>
+        <p:spPr>
+          <a:xfrm>
+            <a:off x="381000" y="685800"/>
+            <a:ext cx="6096000" cy="3429000"/>
+          </a:xfrm>
+          <a:custGeom>
+            <a:avLst/>
+            <a:gdLst/>
+            <a:ahLst/>
+            <a:cxnLst/>
+            <a:rect l="l" t="t" r="r" b="b"/>
+            <a:pathLst>
+              <a:path w="120000" h="120000" extrusionOk="0">
+                <a:moveTo>
+                  <a:pt x="0" y="0"/>
+                </a:moveTo>
+                <a:lnTo>
+                  <a:pt x="120000" y="0"/>
+                </a:lnTo>
+                <a:lnTo>
+                  <a:pt x="120000" y="120000"/>
+                </a:lnTo>
+                <a:lnTo>
+                  <a:pt x="0" y="120000"/>
+                </a:lnTo>
+                <a:close/>
+              </a:path>
+            </a:pathLst>
+          </a:custGeom>
+        </p:spPr>
+        <p:txBody>
+          <a:bodyPr/>
+          <a:lstStyle/>
+          <a:p>
+            <a:endParaRPr lang="zh-TW" altLang="en-US"/>
+          </a:p>
+        </p:txBody>
+      </p:sp>
+    </p:spTree>
+  </p:cSld>
+  <p:clrMapOvr>
+    <a:masterClrMapping/>
+  </p:clrMapOvr>
+</p:notes>
+</file>
+
+<file path=ppt/notesSlides/notesSlide21.xml><?xml version="1.0" encoding="utf-8"?>
+<p:notes xmlns:a="http://schemas.openxmlformats.org/drawingml/2006/main" xmlns:r="http://schemas.openxmlformats.org/officeDocument/2006/relationships" xmlns:p="http://schemas.openxmlformats.org/presentationml/2006/main" showMasterSp="0" showMasterPhAnim="0">
+  <p:cSld>
+    <p:spTree>
+      <p:nvGrpSpPr>
         <p:cNvPr id="1" name="Shape 404"/>
         <p:cNvGrpSpPr/>
         <p:nvPr/>
@@ -2263,7 +2377,7 @@
 </p:notes>
 </file>
 
-<file path=ppt/notesSlides/notesSlide21.xml><?xml version="1.0" encoding="utf-8"?>
+<file path=ppt/notesSlides/notesSlide22.xml><?xml version="1.0" encoding="utf-8"?>
 <p:notes xmlns:a="http://schemas.openxmlformats.org/drawingml/2006/main" xmlns:r="http://schemas.openxmlformats.org/officeDocument/2006/relationships" xmlns:p="http://schemas.openxmlformats.org/presentationml/2006/main" showMasterSp="0" showMasterPhAnim="0">
   <p:cSld>
     <p:spTree>
@@ -2471,6 +2585,24 @@
               </a:rPr>
               <a:t>跨市場數據處理複雜度高，一般投資者難以負擔</a:t>
             </a:r>
+            <a:endParaRPr lang="en-US" altLang="zh-TW" dirty="0">
+              <a:solidFill>
+                <a:srgbClr val="1E293B"/>
+              </a:solidFill>
+              <a:latin typeface="DM Sans"/>
+              <a:ea typeface="DM Sans"/>
+              <a:cs typeface="DM Sans"/>
+              <a:sym typeface="DM Sans"/>
+            </a:endParaRPr>
+          </a:p>
+          <a:p>
+            <a:pPr marL="285750" indent="-285750">
+              <a:lnSpc>
+                <a:spcPct val="160000"/>
+              </a:lnSpc>
+              <a:buFont typeface="Arial" panose="020B0604020202020204" pitchFamily="34" charset="0"/>
+              <a:buChar char="•"/>
+            </a:pPr>
             <a:endParaRPr lang="zh-TW" altLang="en-US" dirty="0"/>
           </a:p>
           <a:p>
@@ -2486,6 +2618,18 @@
               </a:spcAft>
               <a:buNone/>
             </a:pPr>
+            <a:r>
+              <a:rPr lang="zh-TW" altLang="en-US" sz="1100" b="1" i="0" u="none" strike="noStrike" cap="none" dirty="0">
+                <a:solidFill>
+                  <a:srgbClr val="002147"/>
+                </a:solidFill>
+                <a:latin typeface="Merriweather"/>
+                <a:ea typeface="Merriweather"/>
+                <a:cs typeface="Merriweather"/>
+                <a:sym typeface="Merriweather"/>
+              </a:rPr>
+              <a:t>研究不同的模型技術用在股票分析</a:t>
+            </a:r>
             <a:endParaRPr lang="zh-TW" altLang="en-US" dirty="0"/>
           </a:p>
           <a:p>
@@ -3007,6 +3151,72 @@
 </file>
 
 <file path=ppt/notesSlides/notesSlide8.xml><?xml version="1.0" encoding="utf-8"?>
+<p:notes xmlns:a="http://schemas.openxmlformats.org/drawingml/2006/main" xmlns:r="http://schemas.openxmlformats.org/officeDocument/2006/relationships" xmlns:p="http://schemas.openxmlformats.org/presentationml/2006/main">
+  <p:cSld>
+    <p:spTree>
+      <p:nvGrpSpPr>
+        <p:cNvPr id="1" name=""/>
+        <p:cNvGrpSpPr/>
+        <p:nvPr/>
+      </p:nvGrpSpPr>
+      <p:grpSpPr>
+        <a:xfrm>
+          <a:off x="0" y="0"/>
+          <a:ext cx="0" cy="0"/>
+          <a:chOff x="0" y="0"/>
+          <a:chExt cx="0" cy="0"/>
+        </a:xfrm>
+      </p:grpSpPr>
+      <p:sp>
+        <p:nvSpPr>
+          <p:cNvPr id="2" name="投影片影像版面配置區 1"/>
+          <p:cNvSpPr>
+            <a:spLocks noGrp="1" noRot="1" noChangeAspect="1"/>
+          </p:cNvSpPr>
+          <p:nvPr>
+            <p:ph type="sldImg"/>
+          </p:nvPr>
+        </p:nvSpPr>
+        <p:spPr>
+          <a:xfrm>
+            <a:off x="381000" y="685800"/>
+            <a:ext cx="6096000" cy="3429000"/>
+          </a:xfrm>
+        </p:spPr>
+      </p:sp>
+      <p:sp>
+        <p:nvSpPr>
+          <p:cNvPr id="3" name="備忘稿版面配置區 2"/>
+          <p:cNvSpPr>
+            <a:spLocks noGrp="1"/>
+          </p:cNvSpPr>
+          <p:nvPr>
+            <p:ph type="body" idx="1"/>
+          </p:nvPr>
+        </p:nvSpPr>
+        <p:spPr/>
+        <p:txBody>
+          <a:bodyPr/>
+          <a:lstStyle/>
+          <a:p>
+            <a:endParaRPr lang="zh-TW" altLang="en-US" dirty="0"/>
+          </a:p>
+        </p:txBody>
+      </p:sp>
+    </p:spTree>
+    <p:extLst>
+      <p:ext uri="{BB962C8B-B14F-4D97-AF65-F5344CB8AC3E}">
+        <p14:creationId xmlns:p14="http://schemas.microsoft.com/office/powerpoint/2010/main" val="4119316058"/>
+      </p:ext>
+    </p:extLst>
+  </p:cSld>
+  <p:clrMapOvr>
+    <a:masterClrMapping/>
+  </p:clrMapOvr>
+</p:notes>
+</file>
+
+<file path=ppt/notesSlides/notesSlide9.xml><?xml version="1.0" encoding="utf-8"?>
 <p:notes xmlns:a="http://schemas.openxmlformats.org/drawingml/2006/main" xmlns:r="http://schemas.openxmlformats.org/officeDocument/2006/relationships" xmlns:p="http://schemas.openxmlformats.org/presentationml/2006/main" showMasterSp="0" showMasterPhAnim="0">
   <p:cSld>
     <p:spTree>
@@ -3091,117 +3301,6 @@
       <p:sp>
         <p:nvSpPr>
           <p:cNvPr id="203" name="Google Shape;203;p8:notes"/>
-          <p:cNvSpPr>
-            <a:spLocks noGrp="1" noRot="1" noChangeAspect="1"/>
-          </p:cNvSpPr>
-          <p:nvPr>
-            <p:ph type="sldImg" idx="2"/>
-          </p:nvPr>
-        </p:nvSpPr>
-        <p:spPr>
-          <a:xfrm>
-            <a:off x="381000" y="685800"/>
-            <a:ext cx="6096000" cy="3429000"/>
-          </a:xfrm>
-          <a:custGeom>
-            <a:avLst/>
-            <a:gdLst/>
-            <a:ahLst/>
-            <a:cxnLst/>
-            <a:rect l="l" t="t" r="r" b="b"/>
-            <a:pathLst>
-              <a:path w="120000" h="120000" extrusionOk="0">
-                <a:moveTo>
-                  <a:pt x="0" y="0"/>
-                </a:moveTo>
-                <a:lnTo>
-                  <a:pt x="120000" y="0"/>
-                </a:lnTo>
-                <a:lnTo>
-                  <a:pt x="120000" y="120000"/>
-                </a:lnTo>
-                <a:lnTo>
-                  <a:pt x="0" y="120000"/>
-                </a:lnTo>
-                <a:close/>
-              </a:path>
-            </a:pathLst>
-          </a:custGeom>
-        </p:spPr>
-        <p:txBody>
-          <a:bodyPr/>
-          <a:lstStyle/>
-          <a:p>
-            <a:endParaRPr lang="zh-TW" altLang="en-US"/>
-          </a:p>
-        </p:txBody>
-      </p:sp>
-    </p:spTree>
-  </p:cSld>
-  <p:clrMapOvr>
-    <a:masterClrMapping/>
-  </p:clrMapOvr>
-</p:notes>
-</file>
-
-<file path=ppt/notesSlides/notesSlide9.xml><?xml version="1.0" encoding="utf-8"?>
-<p:notes xmlns:a="http://schemas.openxmlformats.org/drawingml/2006/main" xmlns:r="http://schemas.openxmlformats.org/officeDocument/2006/relationships" xmlns:p="http://schemas.openxmlformats.org/presentationml/2006/main" showMasterSp="0" showMasterPhAnim="0">
-  <p:cSld>
-    <p:spTree>
-      <p:nvGrpSpPr>
-        <p:cNvPr id="1" name="Shape 220"/>
-        <p:cNvGrpSpPr/>
-        <p:nvPr/>
-      </p:nvGrpSpPr>
-      <p:grpSpPr>
-        <a:xfrm>
-          <a:off x="0" y="0"/>
-          <a:ext cx="0" cy="0"/>
-          <a:chOff x="0" y="0"/>
-          <a:chExt cx="0" cy="0"/>
-        </a:xfrm>
-      </p:grpSpPr>
-      <p:sp>
-        <p:nvSpPr>
-          <p:cNvPr id="221" name="Google Shape;221;p9:notes"/>
-          <p:cNvSpPr txBox="1">
-            <a:spLocks noGrp="1"/>
-          </p:cNvSpPr>
-          <p:nvPr>
-            <p:ph type="body" idx="1"/>
-          </p:nvPr>
-        </p:nvSpPr>
-        <p:spPr>
-          <a:xfrm>
-            <a:off x="685800" y="4343400"/>
-            <a:ext cx="5486400" cy="4114800"/>
-          </a:xfrm>
-          <a:prstGeom prst="rect">
-            <a:avLst/>
-          </a:prstGeom>
-        </p:spPr>
-        <p:txBody>
-          <a:bodyPr spcFirstLastPara="1" wrap="square" lIns="91425" tIns="91425" rIns="91425" bIns="91425" anchor="t" anchorCtr="0">
-            <a:noAutofit/>
-          </a:bodyPr>
-          <a:lstStyle/>
-          <a:p>
-            <a:pPr marL="0" lvl="0" indent="0" algn="l" rtl="0">
-              <a:spcBef>
-                <a:spcPts val="0"/>
-              </a:spcBef>
-              <a:spcAft>
-                <a:spcPts val="0"/>
-              </a:spcAft>
-              <a:buNone/>
-            </a:pPr>
-            <a:endParaRPr/>
-          </a:p>
-        </p:txBody>
-      </p:sp>
-      <p:sp>
-        <p:nvSpPr>
-          <p:cNvPr id="222" name="Google Shape;222;p9:notes"/>
           <p:cNvSpPr>
             <a:spLocks noGrp="1" noRot="1" noChangeAspect="1"/>
           </p:cNvSpPr>
@@ -12729,6 +12828,579 @@
 <file path=ppt/slides/slide10.xml><?xml version="1.0" encoding="utf-8"?>
 <p:sld xmlns:a="http://schemas.openxmlformats.org/drawingml/2006/main" xmlns:r="http://schemas.openxmlformats.org/officeDocument/2006/relationships" xmlns:p="http://schemas.openxmlformats.org/presentationml/2006/main">
   <p:cSld>
+    <p:spTree>
+      <p:nvGrpSpPr>
+        <p:cNvPr id="1" name=""/>
+        <p:cNvGrpSpPr/>
+        <p:nvPr/>
+      </p:nvGrpSpPr>
+      <p:grpSpPr>
+        <a:xfrm>
+          <a:off x="0" y="0"/>
+          <a:ext cx="0" cy="0"/>
+          <a:chOff x="0" y="0"/>
+          <a:chExt cx="0" cy="0"/>
+        </a:xfrm>
+      </p:grpSpPr>
+      <p:sp>
+        <p:nvSpPr>
+          <p:cNvPr id="3" name="文字版面配置區 2">
+            <a:extLst>
+              <a:ext uri="{FF2B5EF4-FFF2-40B4-BE49-F238E27FC236}">
+                <a16:creationId xmlns:a16="http://schemas.microsoft.com/office/drawing/2014/main" id="{CA15F2C0-8BBA-AE9F-E756-76E53319CECF}"/>
+              </a:ext>
+            </a:extLst>
+          </p:cNvPr>
+          <p:cNvSpPr>
+            <a:spLocks noGrp="1"/>
+          </p:cNvSpPr>
+          <p:nvPr>
+            <p:ph type="body" idx="1"/>
+          </p:nvPr>
+        </p:nvSpPr>
+        <p:spPr/>
+        <p:txBody>
+          <a:bodyPr/>
+          <a:lstStyle/>
+          <a:p>
+            <a:r>
+              <a:rPr lang="zh-TW" altLang="en-US" dirty="0"/>
+              <a:t>抽樣 抽出子集 </a:t>
+            </a:r>
+            <a:endParaRPr lang="en-US" altLang="zh-TW" dirty="0"/>
+          </a:p>
+          <a:p>
+            <a:r>
+              <a:rPr lang="zh-TW" altLang="en-US" dirty="0"/>
+              <a:t>很多樹 都是森林</a:t>
+            </a:r>
+            <a:endParaRPr lang="en-US" altLang="zh-TW" dirty="0"/>
+          </a:p>
+          <a:p>
+            <a:r>
+              <a:rPr lang="zh-TW" altLang="en-US" dirty="0"/>
+              <a:t>多數決</a:t>
+            </a:r>
+            <a:endParaRPr lang="en-US" altLang="zh-TW" dirty="0"/>
+          </a:p>
+          <a:p>
+            <a:r>
+              <a:rPr lang="en-US" altLang="zh-TW" dirty="0"/>
+              <a:t>(</a:t>
+            </a:r>
+            <a:r>
+              <a:rPr lang="zh-TW" altLang="en-US" dirty="0"/>
+              <a:t>畫圖 旁邊有解釋</a:t>
+            </a:r>
+            <a:r>
+              <a:rPr lang="en-US" altLang="zh-TW" dirty="0"/>
+              <a:t>)</a:t>
+            </a:r>
+            <a:endParaRPr lang="zh-TW" altLang="en-US" dirty="0"/>
+          </a:p>
+        </p:txBody>
+      </p:sp>
+      <p:sp>
+        <p:nvSpPr>
+          <p:cNvPr id="4" name="Google Shape;210;p20">
+            <a:extLst>
+              <a:ext uri="{FF2B5EF4-FFF2-40B4-BE49-F238E27FC236}">
+                <a16:creationId xmlns:a16="http://schemas.microsoft.com/office/drawing/2014/main" id="{2A31CD39-6461-CC8A-B59C-A2548AEBABFE}"/>
+              </a:ext>
+            </a:extLst>
+          </p:cNvPr>
+          <p:cNvSpPr txBox="1">
+            <a:spLocks noGrp="1"/>
+          </p:cNvSpPr>
+          <p:nvPr>
+            <p:ph type="title"/>
+          </p:nvPr>
+        </p:nvSpPr>
+        <p:spPr>
+          <a:xfrm>
+            <a:off x="457200" y="274638"/>
+            <a:ext cx="8229600" cy="1143000"/>
+          </a:xfrm>
+          <a:prstGeom prst="rect">
+            <a:avLst/>
+          </a:prstGeom>
+          <a:noFill/>
+          <a:ln>
+            <a:noFill/>
+          </a:ln>
+        </p:spPr>
+        <p:txBody>
+          <a:bodyPr spcFirstLastPara="1" wrap="square" lIns="0" tIns="0" rIns="0" bIns="0" anchor="t" anchorCtr="0">
+            <a:spAutoFit/>
+          </a:bodyPr>
+          <a:lstStyle>
+            <a:defPPr marR="0" lvl="0" algn="l" rtl="0">
+              <a:lnSpc>
+                <a:spcPct val="100000"/>
+              </a:lnSpc>
+              <a:spcBef>
+                <a:spcPts val="0"/>
+              </a:spcBef>
+              <a:spcAft>
+                <a:spcPts val="0"/>
+              </a:spcAft>
+            </a:defPPr>
+            <a:lvl1pPr marL="0" indent="0" algn="ctr">
+              <a:buNone/>
+              <a:defRPr sz="2400" b="1">
+                <a:solidFill>
+                  <a:srgbClr val="002147"/>
+                </a:solidFill>
+                <a:latin typeface="+mj-lt"/>
+                <a:ea typeface="DM Sans"/>
+                <a:cs typeface="DM Sans"/>
+              </a:defRPr>
+            </a:lvl1pPr>
+          </a:lstStyle>
+          <a:p>
+            <a:r>
+              <a:rPr lang="en-US" dirty="0">
+                <a:sym typeface="DM Sans"/>
+              </a:rPr>
+              <a:t>Random Forest</a:t>
+            </a:r>
+            <a:endParaRPr dirty="0"/>
+          </a:p>
+        </p:txBody>
+      </p:sp>
+    </p:spTree>
+    <p:extLst>
+      <p:ext uri="{BB962C8B-B14F-4D97-AF65-F5344CB8AC3E}">
+        <p14:creationId xmlns:p14="http://schemas.microsoft.com/office/powerpoint/2010/main" val="369013604"/>
+      </p:ext>
+    </p:extLst>
+  </p:cSld>
+  <p:clrMapOvr>
+    <a:masterClrMapping/>
+  </p:clrMapOvr>
+</p:sld>
+</file>
+
+<file path=ppt/slides/slide11.xml><?xml version="1.0" encoding="utf-8"?>
+<p:sld xmlns:a="http://schemas.openxmlformats.org/drawingml/2006/main" xmlns:r="http://schemas.openxmlformats.org/officeDocument/2006/relationships" xmlns:p="http://schemas.openxmlformats.org/presentationml/2006/main">
+  <p:cSld>
+    <p:bg>
+      <p:bgPr>
+        <a:solidFill>
+          <a:srgbClr val="FFFFFF"/>
+        </a:solidFill>
+        <a:effectLst/>
+      </p:bgPr>
+    </p:bg>
+    <p:spTree>
+      <p:nvGrpSpPr>
+        <p:cNvPr id="1" name="Shape 223"/>
+        <p:cNvGrpSpPr/>
+        <p:nvPr/>
+      </p:nvGrpSpPr>
+      <p:grpSpPr>
+        <a:xfrm>
+          <a:off x="0" y="0"/>
+          <a:ext cx="0" cy="0"/>
+          <a:chOff x="0" y="0"/>
+          <a:chExt cx="0" cy="0"/>
+        </a:xfrm>
+      </p:grpSpPr>
+      <p:pic>
+        <p:nvPicPr>
+          <p:cNvPr id="225" name="Google Shape;225;p21" descr="image.png"/>
+          <p:cNvPicPr preferRelativeResize="0"/>
+          <p:nvPr/>
+        </p:nvPicPr>
+        <p:blipFill rotWithShape="1">
+          <a:blip r:embed="rId3">
+            <a:alphaModFix/>
+          </a:blip>
+          <a:srcRect/>
+          <a:stretch/>
+        </p:blipFill>
+        <p:spPr>
+          <a:xfrm>
+            <a:off x="5727209" y="2006219"/>
+            <a:ext cx="6183261" cy="4338225"/>
+          </a:xfrm>
+          <a:prstGeom prst="rect">
+            <a:avLst/>
+          </a:prstGeom>
+          <a:noFill/>
+          <a:ln>
+            <a:noFill/>
+          </a:ln>
+        </p:spPr>
+      </p:pic>
+      <p:sp>
+        <p:nvSpPr>
+          <p:cNvPr id="226" name="Google Shape;226;p21"/>
+          <p:cNvSpPr txBox="1"/>
+          <p:nvPr/>
+        </p:nvSpPr>
+        <p:spPr>
+          <a:xfrm>
+            <a:off x="386305" y="2566580"/>
+            <a:ext cx="5747795" cy="2462854"/>
+          </a:xfrm>
+          <a:prstGeom prst="rect">
+            <a:avLst/>
+          </a:prstGeom>
+          <a:noFill/>
+          <a:ln>
+            <a:noFill/>
+          </a:ln>
+        </p:spPr>
+        <p:txBody>
+          <a:bodyPr spcFirstLastPara="1" wrap="square" lIns="0" tIns="0" rIns="0" bIns="0" anchor="t" anchorCtr="0">
+            <a:spAutoFit/>
+          </a:bodyPr>
+          <a:lstStyle/>
+          <a:p>
+            <a:pPr marL="0" marR="0" lvl="0" indent="0" algn="l" rtl="0">
+              <a:spcBef>
+                <a:spcPts val="0"/>
+              </a:spcBef>
+              <a:spcAft>
+                <a:spcPts val="0"/>
+              </a:spcAft>
+              <a:buNone/>
+            </a:pPr>
+            <a:r>
+              <a:rPr lang="en-US" sz="2400" b="1" i="0" u="none" strike="noStrike" cap="none" dirty="0">
+                <a:solidFill>
+                  <a:srgbClr val="000000"/>
+                </a:solidFill>
+                <a:latin typeface="DM Sans"/>
+                <a:ea typeface="DM Sans"/>
+                <a:cs typeface="DM Sans"/>
+                <a:sym typeface="DM Sans"/>
+              </a:rPr>
+              <a:t>LSTM </a:t>
+            </a:r>
+            <a:r>
+              <a:rPr lang="en-US" sz="2400" b="1" i="0" u="none" strike="noStrike" cap="none" dirty="0" err="1">
+                <a:solidFill>
+                  <a:srgbClr val="000000"/>
+                </a:solidFill>
+                <a:latin typeface="DM Sans"/>
+                <a:ea typeface="DM Sans"/>
+                <a:cs typeface="DM Sans"/>
+                <a:sym typeface="DM Sans"/>
+              </a:rPr>
+              <a:t>架構特性</a:t>
+            </a:r>
+            <a:endParaRPr lang="en-US" sz="2400" b="1" i="0" u="none" strike="noStrike" cap="none" dirty="0">
+              <a:solidFill>
+                <a:srgbClr val="000000"/>
+              </a:solidFill>
+              <a:latin typeface="DM Sans"/>
+              <a:ea typeface="DM Sans"/>
+              <a:cs typeface="DM Sans"/>
+              <a:sym typeface="DM Sans"/>
+            </a:endParaRPr>
+          </a:p>
+          <a:p>
+            <a:pPr marL="0" marR="0" lvl="0" indent="0" algn="l" rtl="0">
+              <a:spcBef>
+                <a:spcPts val="0"/>
+              </a:spcBef>
+              <a:spcAft>
+                <a:spcPts val="0"/>
+              </a:spcAft>
+              <a:buNone/>
+            </a:pPr>
+            <a:endParaRPr lang="en-US" sz="1404" b="1" dirty="0">
+              <a:latin typeface="DM Sans"/>
+              <a:sym typeface="DM Sans"/>
+            </a:endParaRPr>
+          </a:p>
+          <a:p>
+            <a:pPr marL="285750" indent="-285750">
+              <a:lnSpc>
+                <a:spcPct val="150000"/>
+              </a:lnSpc>
+              <a:buFont typeface="Arial" panose="020B0604020202020204" pitchFamily="34" charset="0"/>
+              <a:buChar char="•"/>
+            </a:pPr>
+            <a:r>
+              <a:rPr lang="zh-TW" altLang="en-US" sz="1800" dirty="0"/>
+              <a:t>透過遺忘門、輸入門與輸出門控制記憶</a:t>
+            </a:r>
+          </a:p>
+          <a:p>
+            <a:pPr marL="285750" indent="-285750">
+              <a:lnSpc>
+                <a:spcPct val="150000"/>
+              </a:lnSpc>
+              <a:buFont typeface="Arial" panose="020B0604020202020204" pitchFamily="34" charset="0"/>
+              <a:buChar char="•"/>
+            </a:pPr>
+            <a:r>
+              <a:rPr lang="zh-TW" altLang="en-US" sz="1800" dirty="0"/>
+              <a:t>擅長捕捉金融數據中的長短期依賴關係</a:t>
+            </a:r>
+          </a:p>
+          <a:p>
+            <a:pPr marL="285750" indent="-285750">
+              <a:lnSpc>
+                <a:spcPct val="150000"/>
+              </a:lnSpc>
+              <a:buFont typeface="Arial" panose="020B0604020202020204" pitchFamily="34" charset="0"/>
+              <a:buChar char="•"/>
+            </a:pPr>
+            <a:r>
+              <a:rPr lang="zh-TW" altLang="en-US" sz="1800" b="1" dirty="0"/>
+              <a:t>端到端學習：</a:t>
+            </a:r>
+            <a:r>
+              <a:rPr lang="zh-TW" altLang="en-US" sz="1800" dirty="0"/>
+              <a:t> 神經網路自動提取特徵，不需手動 </a:t>
+            </a:r>
+            <a:r>
+              <a:rPr lang="en-US" altLang="zh-TW" sz="1800" dirty="0"/>
+              <a:t>Feature Engineering</a:t>
+            </a:r>
+            <a:r>
+              <a:rPr lang="zh-TW" altLang="en-US" sz="1800" dirty="0"/>
+              <a:t>。</a:t>
+            </a:r>
+          </a:p>
+          <a:p>
+            <a:pPr marL="285750" marR="0" lvl="0" indent="-285750" algn="l" rtl="0">
+              <a:spcBef>
+                <a:spcPts val="0"/>
+              </a:spcBef>
+              <a:spcAft>
+                <a:spcPts val="0"/>
+              </a:spcAft>
+              <a:buFont typeface="Arial" panose="020B0604020202020204" pitchFamily="34" charset="0"/>
+              <a:buChar char="•"/>
+            </a:pPr>
+            <a:endParaRPr dirty="0"/>
+          </a:p>
+        </p:txBody>
+      </p:sp>
+      <p:pic>
+        <p:nvPicPr>
+          <p:cNvPr id="227" name="Google Shape;227;p21" descr="image.png"/>
+          <p:cNvPicPr preferRelativeResize="0"/>
+          <p:nvPr/>
+        </p:nvPicPr>
+        <p:blipFill rotWithShape="1">
+          <a:blip r:embed="rId4">
+            <a:alphaModFix/>
+          </a:blip>
+          <a:srcRect/>
+          <a:stretch/>
+        </p:blipFill>
+        <p:spPr>
+          <a:xfrm>
+            <a:off x="5865348" y="2110994"/>
+            <a:ext cx="5940347" cy="4027530"/>
+          </a:xfrm>
+          <a:prstGeom prst="rect">
+            <a:avLst/>
+          </a:prstGeom>
+          <a:noFill/>
+          <a:ln>
+            <a:noFill/>
+          </a:ln>
+        </p:spPr>
+      </p:pic>
+      <p:sp>
+        <p:nvSpPr>
+          <p:cNvPr id="234" name="Google Shape;234;p21"/>
+          <p:cNvSpPr txBox="1"/>
+          <p:nvPr/>
+        </p:nvSpPr>
+        <p:spPr>
+          <a:xfrm>
+            <a:off x="809625" y="919311"/>
+            <a:ext cx="11351418" cy="502890"/>
+          </a:xfrm>
+          <a:prstGeom prst="rect">
+            <a:avLst/>
+          </a:prstGeom>
+          <a:noFill/>
+          <a:ln>
+            <a:noFill/>
+          </a:ln>
+        </p:spPr>
+        <p:txBody>
+          <a:bodyPr spcFirstLastPara="1" wrap="square" lIns="0" tIns="0" rIns="0" bIns="0" anchor="t" anchorCtr="0">
+            <a:spAutoFit/>
+          </a:bodyPr>
+          <a:lstStyle/>
+          <a:p>
+            <a:pPr marL="0" marR="0" lvl="0" indent="0" algn="l" rtl="0">
+              <a:lnSpc>
+                <a:spcPct val="119969"/>
+              </a:lnSpc>
+              <a:spcBef>
+                <a:spcPts val="0"/>
+              </a:spcBef>
+              <a:spcAft>
+                <a:spcPts val="0"/>
+              </a:spcAft>
+              <a:buNone/>
+            </a:pPr>
+            <a:r>
+              <a:rPr lang="en-US" sz="3300" b="1" i="0" u="none" strike="noStrike" cap="none">
+                <a:solidFill>
+                  <a:srgbClr val="002147"/>
+                </a:solidFill>
+                <a:latin typeface="Merriweather"/>
+                <a:ea typeface="Merriweather"/>
+                <a:cs typeface="Merriweather"/>
+                <a:sym typeface="Merriweather"/>
+              </a:rPr>
+              <a:t>深度學習：LSTM 神經網路</a:t>
+            </a:r>
+            <a:endParaRPr/>
+          </a:p>
+        </p:txBody>
+      </p:sp>
+      <p:sp>
+        <p:nvSpPr>
+          <p:cNvPr id="235" name="Google Shape;235;p21"/>
+          <p:cNvSpPr/>
+          <p:nvPr/>
+        </p:nvSpPr>
+        <p:spPr>
+          <a:xfrm>
+            <a:off x="571500" y="919311"/>
+            <a:ext cx="76200" cy="502890"/>
+          </a:xfrm>
+          <a:prstGeom prst="rect">
+            <a:avLst/>
+          </a:prstGeom>
+          <a:solidFill>
+            <a:srgbClr val="D4AF37"/>
+          </a:solidFill>
+          <a:ln>
+            <a:noFill/>
+          </a:ln>
+        </p:spPr>
+        <p:txBody>
+          <a:bodyPr spcFirstLastPara="1" wrap="square" lIns="91425" tIns="45700" rIns="91425" bIns="45700" anchor="ctr" anchorCtr="0">
+            <a:noAutofit/>
+          </a:bodyPr>
+          <a:lstStyle/>
+          <a:p>
+            <a:pPr marL="0" marR="0" lvl="0" indent="0" algn="ctr" rtl="0">
+              <a:spcBef>
+                <a:spcPts val="0"/>
+              </a:spcBef>
+              <a:spcAft>
+                <a:spcPts val="0"/>
+              </a:spcAft>
+              <a:buNone/>
+            </a:pPr>
+            <a:endParaRPr sz="1800" b="0" i="0" u="none" strike="noStrike" cap="none">
+              <a:solidFill>
+                <a:schemeClr val="dk1"/>
+              </a:solidFill>
+              <a:latin typeface="Calibri"/>
+              <a:ea typeface="Calibri"/>
+              <a:cs typeface="Calibri"/>
+              <a:sym typeface="Calibri"/>
+            </a:endParaRPr>
+          </a:p>
+        </p:txBody>
+      </p:sp>
+    </p:spTree>
+  </p:cSld>
+  <p:clrMapOvr>
+    <a:masterClrMapping/>
+  </p:clrMapOvr>
+</p:sld>
+</file>
+
+<file path=ppt/slides/slide12.xml><?xml version="1.0" encoding="utf-8"?>
+<p:sld xmlns:a="http://schemas.openxmlformats.org/drawingml/2006/main" xmlns:r="http://schemas.openxmlformats.org/officeDocument/2006/relationships" xmlns:p="http://schemas.openxmlformats.org/presentationml/2006/main">
+  <p:cSld>
+    <p:spTree>
+      <p:nvGrpSpPr>
+        <p:cNvPr id="1" name=""/>
+        <p:cNvGrpSpPr/>
+        <p:nvPr/>
+      </p:nvGrpSpPr>
+      <p:grpSpPr>
+        <a:xfrm>
+          <a:off x="0" y="0"/>
+          <a:ext cx="0" cy="0"/>
+          <a:chOff x="0" y="0"/>
+          <a:chExt cx="0" cy="0"/>
+        </a:xfrm>
+      </p:grpSpPr>
+      <p:sp>
+        <p:nvSpPr>
+          <p:cNvPr id="2" name="標題 1">
+            <a:extLst>
+              <a:ext uri="{FF2B5EF4-FFF2-40B4-BE49-F238E27FC236}">
+                <a16:creationId xmlns:a16="http://schemas.microsoft.com/office/drawing/2014/main" id="{36298B46-DC98-3D34-00DE-EDE24C3F6141}"/>
+              </a:ext>
+            </a:extLst>
+          </p:cNvPr>
+          <p:cNvSpPr>
+            <a:spLocks noGrp="1"/>
+          </p:cNvSpPr>
+          <p:nvPr>
+            <p:ph type="title"/>
+          </p:nvPr>
+        </p:nvSpPr>
+        <p:spPr/>
+        <p:txBody>
+          <a:bodyPr/>
+          <a:lstStyle/>
+          <a:p>
+            <a:endParaRPr lang="zh-TW" altLang="en-US"/>
+          </a:p>
+        </p:txBody>
+      </p:sp>
+      <p:sp>
+        <p:nvSpPr>
+          <p:cNvPr id="3" name="文字版面配置區 2">
+            <a:extLst>
+              <a:ext uri="{FF2B5EF4-FFF2-40B4-BE49-F238E27FC236}">
+                <a16:creationId xmlns:a16="http://schemas.microsoft.com/office/drawing/2014/main" id="{659680F0-DDD5-A5D2-0962-6B198D4EC969}"/>
+              </a:ext>
+            </a:extLst>
+          </p:cNvPr>
+          <p:cNvSpPr>
+            <a:spLocks noGrp="1"/>
+          </p:cNvSpPr>
+          <p:nvPr>
+            <p:ph type="body" idx="1"/>
+          </p:nvPr>
+        </p:nvSpPr>
+        <p:spPr/>
+        <p:txBody>
+          <a:bodyPr/>
+          <a:lstStyle/>
+          <a:p>
+            <a:endParaRPr lang="zh-TW" altLang="en-US" dirty="0"/>
+          </a:p>
+        </p:txBody>
+      </p:sp>
+    </p:spTree>
+    <p:extLst>
+      <p:ext uri="{BB962C8B-B14F-4D97-AF65-F5344CB8AC3E}">
+        <p14:creationId xmlns:p14="http://schemas.microsoft.com/office/powerpoint/2010/main" val="2578001916"/>
+      </p:ext>
+    </p:extLst>
+  </p:cSld>
+  <p:clrMapOvr>
+    <a:masterClrMapping/>
+  </p:clrMapOvr>
+</p:sld>
+</file>
+
+<file path=ppt/slides/slide13.xml><?xml version="1.0" encoding="utf-8"?>
+<p:sld xmlns:a="http://schemas.openxmlformats.org/drawingml/2006/main" xmlns:r="http://schemas.openxmlformats.org/officeDocument/2006/relationships" xmlns:p="http://schemas.openxmlformats.org/presentationml/2006/main">
+  <p:cSld>
     <p:bg>
       <p:bgPr>
         <a:solidFill>
@@ -13471,7 +14143,7 @@
 </p:sld>
 </file>
 
-<file path=ppt/slides/slide11.xml><?xml version="1.0" encoding="utf-8"?>
+<file path=ppt/slides/slide14.xml><?xml version="1.0" encoding="utf-8"?>
 <p:sld xmlns:a="http://schemas.openxmlformats.org/drawingml/2006/main" xmlns:r="http://schemas.openxmlformats.org/officeDocument/2006/relationships" xmlns:p="http://schemas.openxmlformats.org/presentationml/2006/main">
   <p:cSld>
     <p:bg>
@@ -14285,8 +14957,8 @@
         </p:nvSpPr>
         <p:spPr>
           <a:xfrm>
-            <a:off x="809625" y="919311"/>
-            <a:ext cx="11351418" cy="502890"/>
+            <a:off x="760463" y="919311"/>
+            <a:ext cx="11351418" cy="609398"/>
           </a:xfrm>
           <a:prstGeom prst="rect">
             <a:avLst/>
@@ -14315,7 +14987,7 @@
               <a:buNone/>
             </a:pPr>
             <a:r>
-              <a:rPr lang="en-US" sz="3300" b="1" i="0" u="none" strike="noStrike" cap="none">
+              <a:rPr lang="en-US" sz="3300" b="1" i="0" u="none" strike="noStrike" cap="none" dirty="0" err="1">
                 <a:solidFill>
                   <a:srgbClr val="002147"/>
                 </a:solidFill>
@@ -14324,9 +14996,45 @@
                 <a:cs typeface="Merriweather"/>
                 <a:sym typeface="Merriweather"/>
               </a:rPr>
-              <a:t>研究流程 Pipeline</a:t>
-            </a:r>
-            <a:endParaRPr/>
+              <a:t>研究流程</a:t>
+            </a:r>
+            <a:r>
+              <a:rPr lang="en-US" sz="3300" b="1" i="0" u="none" strike="noStrike" cap="none" dirty="0">
+                <a:solidFill>
+                  <a:srgbClr val="002147"/>
+                </a:solidFill>
+                <a:latin typeface="Merriweather"/>
+                <a:ea typeface="Merriweather"/>
+                <a:cs typeface="Merriweather"/>
+                <a:sym typeface="Merriweather"/>
+              </a:rPr>
+              <a:t> Pipeline</a:t>
+            </a:r>
+            <a:r>
+              <a:rPr lang="zh-TW" altLang="en-US" sz="3300" b="1" i="0" u="none" strike="noStrike" cap="none" dirty="0">
+                <a:solidFill>
+                  <a:srgbClr val="002147"/>
+                </a:solidFill>
+                <a:latin typeface="Merriweather"/>
+                <a:ea typeface="Merriweather"/>
+                <a:cs typeface="Merriweather"/>
+                <a:sym typeface="Merriweather"/>
+              </a:rPr>
+              <a:t> </a:t>
+            </a:r>
+            <a:r>
+              <a:rPr lang="en-US" altLang="zh-TW" sz="3300" b="1" dirty="0">
+                <a:solidFill>
+                  <a:srgbClr val="002147"/>
+                </a:solidFill>
+                <a:latin typeface="Merriweather"/>
+                <a:ea typeface="Merriweather"/>
+                <a:cs typeface="Merriweather"/>
+                <a:sym typeface="Merriweather"/>
+              </a:rPr>
+              <a:t>for machine learning</a:t>
+            </a:r>
+            <a:endParaRPr dirty="0"/>
           </a:p>
         </p:txBody>
       </p:sp>
@@ -14825,7 +15533,7 @@
 </p:sld>
 </file>
 
-<file path=ppt/slides/slide12.xml><?xml version="1.0" encoding="utf-8"?>
+<file path=ppt/slides/slide15.xml><?xml version="1.0" encoding="utf-8"?>
 <p:sld xmlns:a="http://schemas.openxmlformats.org/drawingml/2006/main" xmlns:r="http://schemas.openxmlformats.org/officeDocument/2006/relationships" xmlns:p="http://schemas.openxmlformats.org/presentationml/2006/main">
   <p:cSld>
     <p:bg>
@@ -14857,7 +15565,7 @@
           <p:nvPr>
             <p:extLst>
               <p:ext uri="{D42A27DB-BD31-4B8C-83A1-F6EECF244321}">
-                <p14:modId xmlns:p14="http://schemas.microsoft.com/office/powerpoint/2010/main" val="1269185860"/>
+                <p14:modId xmlns:p14="http://schemas.microsoft.com/office/powerpoint/2010/main" val="502108346"/>
               </p:ext>
             </p:extLst>
           </p:nvPr>
@@ -15922,7 +16630,7 @@
                         <a:t>  </a:t>
                       </a:r>
                       <a:r>
-                        <a:rPr lang="en-US" sz="1800" b="0" i="0" u="none" strike="noStrike" cap="none" dirty="0" err="1">
+                        <a:rPr lang="zh-TW" altLang="en-US" sz="1800" b="0" i="0" u="none" strike="noStrike" cap="none" dirty="0">
                           <a:solidFill>
                             <a:srgbClr val="1E293B"/>
                           </a:solidFill>
@@ -15931,7 +16639,7 @@
                           <a:cs typeface="DM Sans"/>
                           <a:sym typeface="DM Sans"/>
                         </a:rPr>
-                        <a:t>驗證方式</a:t>
+                        <a:t>交叉驗證</a:t>
                       </a:r>
                       <a:endParaRPr sz="1800" dirty="0"/>
                     </a:p>
@@ -16454,7 +17162,7 @@
 </p:sld>
 </file>
 
-<file path=ppt/slides/slide13.xml><?xml version="1.0" encoding="utf-8"?>
+<file path=ppt/slides/slide16.xml><?xml version="1.0" encoding="utf-8"?>
 <p:sld xmlns:a="http://schemas.openxmlformats.org/drawingml/2006/main" xmlns:r="http://schemas.openxmlformats.org/officeDocument/2006/relationships" xmlns:p="http://schemas.openxmlformats.org/presentationml/2006/main">
   <p:cSld>
     <p:bg>
@@ -16672,7 +17380,7 @@
 </p:sld>
 </file>
 
-<file path=ppt/slides/slide14.xml><?xml version="1.0" encoding="utf-8"?>
+<file path=ppt/slides/slide17.xml><?xml version="1.0" encoding="utf-8"?>
 <p:sld xmlns:a="http://schemas.openxmlformats.org/drawingml/2006/main" xmlns:r="http://schemas.openxmlformats.org/officeDocument/2006/relationships" xmlns:p="http://schemas.openxmlformats.org/presentationml/2006/main">
   <p:cSld>
     <p:bg>
@@ -16964,7 +17672,7 @@
         <p:spPr>
           <a:xfrm>
             <a:off x="866775" y="4583013"/>
-            <a:ext cx="4743450" cy="886397"/>
+            <a:ext cx="4743450" cy="443198"/>
           </a:xfrm>
           <a:prstGeom prst="rect">
             <a:avLst/>
@@ -17002,7 +17710,31 @@
                 <a:cs typeface="DM Sans"/>
                 <a:sym typeface="DM Sans"/>
               </a:rPr>
-              <a:t>美股市場規律性較強，機器學習集成模型表現穩定</a:t>
+              <a:t>機器學習</a:t>
+            </a:r>
+            <a:r>
+              <a:rPr lang="zh-TW" altLang="en-US" sz="1800" b="0" i="0" u="none" strike="noStrike" cap="none" dirty="0">
+                <a:solidFill>
+                  <a:srgbClr val="1E293B"/>
+                </a:solidFill>
+                <a:latin typeface="DM Sans"/>
+                <a:ea typeface="DM Sans"/>
+                <a:cs typeface="DM Sans"/>
+                <a:sym typeface="DM Sans"/>
+              </a:rPr>
+              <a:t>預測</a:t>
+            </a:r>
+            <a:r>
+              <a:rPr lang="en-US" sz="1800" b="0" i="0" u="none" strike="noStrike" cap="none" dirty="0" err="1">
+                <a:solidFill>
+                  <a:srgbClr val="1E293B"/>
+                </a:solidFill>
+                <a:latin typeface="DM Sans"/>
+                <a:ea typeface="DM Sans"/>
+                <a:cs typeface="DM Sans"/>
+                <a:sym typeface="DM Sans"/>
+              </a:rPr>
+              <a:t>模型表現穩定</a:t>
             </a:r>
             <a:r>
               <a:rPr lang="en-US" sz="1800" b="0" i="0" u="none" strike="noStrike" cap="none" dirty="0">
@@ -17262,7 +17994,7 @@
               <a:buNone/>
             </a:pPr>
             <a:r>
-              <a:rPr lang="en-US" sz="1800" b="0" i="0" u="none" strike="noStrike" cap="none">
+              <a:rPr lang="zh-TW" altLang="en-US" sz="1800" b="0" i="0" u="none" strike="noStrike" cap="none" dirty="0">
                 <a:solidFill>
                   <a:srgbClr val="1E293B"/>
                 </a:solidFill>
@@ -17273,7 +18005,7 @@
               </a:rPr>
               <a:t>台股受盤後美股連動影響，預測難度顯著高於美股。</a:t>
             </a:r>
-            <a:endParaRPr sz="1800"/>
+            <a:endParaRPr lang="zh-TW" altLang="en-US" sz="1800" dirty="0"/>
           </a:p>
         </p:txBody>
       </p:sp>
@@ -17286,7 +18018,7 @@
         <p:spPr>
           <a:xfrm>
             <a:off x="809625" y="919311"/>
-            <a:ext cx="11351418" cy="502890"/>
+            <a:ext cx="11351418" cy="1218795"/>
           </a:xfrm>
           <a:prstGeom prst="rect">
             <a:avLst/>
@@ -17315,7 +18047,7 @@
               <a:buNone/>
             </a:pPr>
             <a:r>
-              <a:rPr lang="en-US" sz="3300" b="1" i="0" u="none" strike="noStrike" cap="none">
+              <a:rPr lang="en-US" sz="3300" b="1" i="0" u="none" strike="noStrike" cap="none" dirty="0" err="1">
                 <a:solidFill>
                   <a:srgbClr val="002147"/>
                 </a:solidFill>
@@ -17326,7 +18058,71 @@
               </a:rPr>
               <a:t>分類結果：跨市場比較</a:t>
             </a:r>
-            <a:endParaRPr/>
+            <a:r>
+              <a:rPr lang="zh-TW" altLang="en-US" sz="3300" b="1" i="0" u="none" strike="noStrike" cap="none" dirty="0">
+                <a:solidFill>
+                  <a:srgbClr val="002147"/>
+                </a:solidFill>
+                <a:latin typeface="Merriweather"/>
+                <a:ea typeface="Merriweather"/>
+                <a:cs typeface="Merriweather"/>
+                <a:sym typeface="Merriweather"/>
+              </a:rPr>
+              <a:t>  </a:t>
+            </a:r>
+            <a:r>
+              <a:rPr lang="en-US" altLang="zh-TW" sz="3300" b="1" i="0" u="none" strike="noStrike" cap="none" dirty="0">
+                <a:solidFill>
+                  <a:srgbClr val="FF0000"/>
+                </a:solidFill>
+                <a:latin typeface="Merriweather"/>
+                <a:ea typeface="Merriweather"/>
+                <a:cs typeface="Merriweather"/>
+                <a:sym typeface="Merriweather"/>
+              </a:rPr>
+              <a:t>(</a:t>
+            </a:r>
+            <a:r>
+              <a:rPr lang="zh-TW" altLang="en-US" sz="3300" b="1" i="0" u="none" strike="noStrike" cap="none" dirty="0">
+                <a:solidFill>
+                  <a:srgbClr val="FF0000"/>
+                </a:solidFill>
+                <a:latin typeface="Merriweather"/>
+                <a:ea typeface="Merriweather"/>
+                <a:cs typeface="Merriweather"/>
+                <a:sym typeface="Merriweather"/>
+              </a:rPr>
+              <a:t>只要說哪一個結果好就好</a:t>
+            </a:r>
+            <a:r>
+              <a:rPr lang="zh-TW" altLang="en-US" sz="3300" b="1" dirty="0">
+                <a:solidFill>
+                  <a:srgbClr val="FF0000"/>
+                </a:solidFill>
+                <a:latin typeface="Merriweather"/>
+                <a:ea typeface="Merriweather"/>
+                <a:cs typeface="Merriweather"/>
+                <a:sym typeface="Merriweather"/>
+              </a:rPr>
+              <a:t> 不用這麼多廢話</a:t>
+            </a:r>
+            <a:r>
+              <a:rPr lang="en-US" altLang="zh-TW" sz="3300" b="1" i="0" u="none" strike="noStrike" cap="none" dirty="0">
+                <a:solidFill>
+                  <a:srgbClr val="FF0000"/>
+                </a:solidFill>
+                <a:latin typeface="Merriweather"/>
+                <a:ea typeface="Merriweather"/>
+                <a:cs typeface="Merriweather"/>
+                <a:sym typeface="Merriweather"/>
+              </a:rPr>
+              <a:t>)</a:t>
+            </a:r>
+            <a:endParaRPr dirty="0">
+              <a:solidFill>
+                <a:srgbClr val="FF0000"/>
+              </a:solidFill>
+            </a:endParaRPr>
           </a:p>
         </p:txBody>
       </p:sp>
@@ -17422,7 +18218,7 @@
 </p:sld>
 </file>
 
-<file path=ppt/slides/slide15.xml><?xml version="1.0" encoding="utf-8"?>
+<file path=ppt/slides/slide18.xml><?xml version="1.0" encoding="utf-8"?>
 <p:sld xmlns:a="http://schemas.openxmlformats.org/drawingml/2006/main" xmlns:r="http://schemas.openxmlformats.org/officeDocument/2006/relationships" xmlns:p="http://schemas.openxmlformats.org/presentationml/2006/main">
   <p:cSld>
     <p:bg>
@@ -17707,10 +18503,22 @@
                 <a:cs typeface="DM Sans"/>
                 <a:sym typeface="DM Sans"/>
               </a:rPr>
-              <a:t>，均低於隨機漫步基準（</a:t>
-            </a:r>
-            <a:r>
-              <a:rPr lang="en-US" altLang="zh-TW" sz="1800" i="0" u="none" strike="noStrike" cap="none" dirty="0">
+              <a:t>，均低於</a:t>
+            </a:r>
+            <a:r>
+              <a:rPr lang="zh-TW" altLang="en-US" sz="1800" i="0" u="none" strike="sngStrike" cap="none" dirty="0">
+                <a:solidFill>
+                  <a:srgbClr val="1E293B"/>
+                </a:solidFill>
+                <a:latin typeface="DM Sans"/>
+                <a:ea typeface="DM Sans"/>
+                <a:cs typeface="DM Sans"/>
+                <a:sym typeface="DM Sans"/>
+              </a:rPr>
+              <a:t>隨機漫步基準（</a:t>
+            </a:r>
+            <a:r>
+              <a:rPr lang="en-US" altLang="zh-TW" sz="1800" i="0" u="none" strike="sngStrike" cap="none" dirty="0">
                 <a:solidFill>
                   <a:srgbClr val="1E293B"/>
                 </a:solidFill>
@@ -17722,7 +18530,7 @@
               <a:t>0.999</a:t>
             </a:r>
             <a:r>
-              <a:rPr lang="zh-TW" altLang="en-US" sz="1800" i="0" u="none" strike="noStrike" cap="none" dirty="0">
+              <a:rPr lang="zh-TW" altLang="en-US" sz="1800" i="0" u="none" strike="sngStrike" cap="none" dirty="0">
                 <a:solidFill>
                   <a:srgbClr val="1E293B"/>
                 </a:solidFill>
@@ -17731,7 +18539,19 @@
                 <a:cs typeface="DM Sans"/>
                 <a:sym typeface="DM Sans"/>
               </a:rPr>
-              <a:t>），顯示價格水準之高 </a:t>
+              <a:t>），</a:t>
+            </a:r>
+            <a:r>
+              <a:rPr lang="zh-TW" altLang="en-US" sz="1800" i="0" u="none" strike="noStrike" cap="none" dirty="0">
+                <a:solidFill>
+                  <a:srgbClr val="1E293B"/>
+                </a:solidFill>
+                <a:latin typeface="DM Sans"/>
+                <a:ea typeface="DM Sans"/>
+                <a:cs typeface="DM Sans"/>
+                <a:sym typeface="DM Sans"/>
+              </a:rPr>
+              <a:t>顯示價格水準之高 </a:t>
             </a:r>
             <a:r>
               <a:rPr lang="en-US" sz="1800" i="0" u="none" strike="noStrike" cap="none" dirty="0">
@@ -17803,6 +18623,112 @@
           </a:prstGeom>
         </p:spPr>
       </p:pic>
+      <p:sp>
+        <p:nvSpPr>
+          <p:cNvPr id="2" name="Google Shape;210;p20">
+            <a:extLst>
+              <a:ext uri="{FF2B5EF4-FFF2-40B4-BE49-F238E27FC236}">
+                <a16:creationId xmlns:a16="http://schemas.microsoft.com/office/drawing/2014/main" id="{9F3BFDD2-0E73-64E9-D6D8-BADFC9E05EA4}"/>
+              </a:ext>
+            </a:extLst>
+          </p:cNvPr>
+          <p:cNvSpPr txBox="1"/>
+          <p:nvPr/>
+        </p:nvSpPr>
+        <p:spPr>
+          <a:xfrm>
+            <a:off x="1113790" y="1609397"/>
+            <a:ext cx="4288712" cy="738664"/>
+          </a:xfrm>
+          <a:prstGeom prst="rect">
+            <a:avLst/>
+          </a:prstGeom>
+          <a:noFill/>
+          <a:ln>
+            <a:noFill/>
+          </a:ln>
+        </p:spPr>
+        <p:txBody>
+          <a:bodyPr spcFirstLastPara="1" wrap="square" lIns="0" tIns="0" rIns="0" bIns="0" anchor="t" anchorCtr="0">
+            <a:spAutoFit/>
+          </a:bodyPr>
+          <a:lstStyle>
+            <a:defPPr marR="0" lvl="0" algn="l" rtl="0">
+              <a:lnSpc>
+                <a:spcPct val="100000"/>
+              </a:lnSpc>
+              <a:spcBef>
+                <a:spcPts val="0"/>
+              </a:spcBef>
+              <a:spcAft>
+                <a:spcPts val="0"/>
+              </a:spcAft>
+            </a:defPPr>
+            <a:lvl1pPr marL="0" indent="0" algn="ctr">
+              <a:buNone/>
+              <a:defRPr sz="2400" b="1">
+                <a:solidFill>
+                  <a:srgbClr val="002147"/>
+                </a:solidFill>
+                <a:latin typeface="+mj-lt"/>
+                <a:ea typeface="DM Sans"/>
+                <a:cs typeface="DM Sans"/>
+              </a:defRPr>
+            </a:lvl1pPr>
+          </a:lstStyle>
+          <a:p>
+            <a:r>
+              <a:rPr lang="zh-TW" altLang="en-US" dirty="0">
+                <a:solidFill>
+                  <a:srgbClr val="FF0000"/>
+                </a:solidFill>
+                <a:sym typeface="DM Sans"/>
+              </a:rPr>
+              <a:t>要把</a:t>
+            </a:r>
+            <a:r>
+              <a:rPr lang="en-US" altLang="zh-TW" dirty="0">
+                <a:solidFill>
+                  <a:srgbClr val="FF0000"/>
+                </a:solidFill>
+                <a:sym typeface="DM Sans"/>
+              </a:rPr>
+              <a:t>1</a:t>
+            </a:r>
+            <a:r>
+              <a:rPr lang="zh-TW" altLang="en-US" dirty="0">
+                <a:solidFill>
+                  <a:srgbClr val="FF0000"/>
+                </a:solidFill>
+                <a:sym typeface="DM Sans"/>
+              </a:rPr>
+              <a:t>都拿掉</a:t>
+            </a:r>
+            <a:br>
+              <a:rPr lang="en-US" altLang="zh-TW" dirty="0">
+                <a:solidFill>
+                  <a:srgbClr val="FF0000"/>
+                </a:solidFill>
+                <a:sym typeface="DM Sans"/>
+              </a:rPr>
+            </a:br>
+            <a:r>
+              <a:rPr lang="zh-TW" altLang="en-US" dirty="0">
+                <a:solidFill>
+                  <a:srgbClr val="FF0000"/>
+                </a:solidFill>
+                <a:sym typeface="DM Sans"/>
+              </a:rPr>
+              <a:t>把不同模型顏色區分開</a:t>
+            </a:r>
+            <a:endParaRPr dirty="0">
+              <a:solidFill>
+                <a:srgbClr val="FF0000"/>
+              </a:solidFill>
+            </a:endParaRPr>
+          </a:p>
+        </p:txBody>
+      </p:sp>
     </p:spTree>
   </p:cSld>
   <p:clrMapOvr>
@@ -17811,7 +18737,7 @@
 </p:sld>
 </file>
 
-<file path=ppt/slides/slide16.xml><?xml version="1.0" encoding="utf-8"?>
+<file path=ppt/slides/slide19.xml><?xml version="1.0" encoding="utf-8"?>
 <p:sld xmlns:a="http://schemas.openxmlformats.org/drawingml/2006/main" xmlns:r="http://schemas.openxmlformats.org/officeDocument/2006/relationships" xmlns:p="http://schemas.openxmlformats.org/presentationml/2006/main">
   <p:cSld>
     <p:spTree>
@@ -18134,1921 +19060,6 @@
         <p14:creationId xmlns:p14="http://schemas.microsoft.com/office/powerpoint/2010/main" val="3397872819"/>
       </p:ext>
     </p:extLst>
-  </p:cSld>
-  <p:clrMapOvr>
-    <a:masterClrMapping/>
-  </p:clrMapOvr>
-</p:sld>
-</file>
-
-<file path=ppt/slides/slide17.xml><?xml version="1.0" encoding="utf-8"?>
-<p:sld xmlns:a="http://schemas.openxmlformats.org/drawingml/2006/main" xmlns:r="http://schemas.openxmlformats.org/officeDocument/2006/relationships" xmlns:p="http://schemas.openxmlformats.org/presentationml/2006/main">
-  <p:cSld>
-    <p:bg>
-      <p:bgPr>
-        <a:solidFill>
-          <a:srgbClr val="FFFFFF"/>
-        </a:solidFill>
-        <a:effectLst/>
-      </p:bgPr>
-    </p:bg>
-    <p:spTree>
-      <p:nvGrpSpPr>
-        <p:cNvPr id="1" name="Shape 354"/>
-        <p:cNvGrpSpPr/>
-        <p:nvPr/>
-      </p:nvGrpSpPr>
-      <p:grpSpPr>
-        <a:xfrm>
-          <a:off x="0" y="0"/>
-          <a:ext cx="0" cy="0"/>
-          <a:chOff x="0" y="0"/>
-          <a:chExt cx="0" cy="0"/>
-        </a:xfrm>
-      </p:grpSpPr>
-      <p:sp>
-        <p:nvSpPr>
-          <p:cNvPr id="356" name="Google Shape;356;p29"/>
-          <p:cNvSpPr txBox="1"/>
-          <p:nvPr/>
-        </p:nvSpPr>
-        <p:spPr>
-          <a:xfrm>
-            <a:off x="571500" y="4959250"/>
-            <a:ext cx="4953000" cy="553998"/>
-          </a:xfrm>
-          <a:prstGeom prst="rect">
-            <a:avLst/>
-          </a:prstGeom>
-          <a:noFill/>
-          <a:ln>
-            <a:noFill/>
-          </a:ln>
-        </p:spPr>
-        <p:txBody>
-          <a:bodyPr spcFirstLastPara="1" wrap="square" lIns="0" tIns="0" rIns="0" bIns="0" anchor="t" anchorCtr="0">
-            <a:spAutoFit/>
-          </a:bodyPr>
-          <a:lstStyle/>
-          <a:p>
-            <a:pPr marL="0" marR="0" lvl="0" indent="0" algn="l" rtl="0">
-              <a:spcBef>
-                <a:spcPts val="0"/>
-              </a:spcBef>
-              <a:spcAft>
-                <a:spcPts val="0"/>
-              </a:spcAft>
-              <a:buNone/>
-            </a:pPr>
-            <a:r>
-              <a:rPr lang="en-US" sz="1800" b="0" i="0" u="none" strike="noStrike" cap="none" dirty="0" err="1">
-                <a:solidFill>
-                  <a:srgbClr val="000000"/>
-                </a:solidFill>
-                <a:latin typeface="DM Sans"/>
-                <a:ea typeface="DM Sans"/>
-                <a:cs typeface="DM Sans"/>
-                <a:sym typeface="DM Sans"/>
-              </a:rPr>
-              <a:t>低延遲保證在一般終端設備亦能順暢執行，極具商用價值</a:t>
-            </a:r>
-            <a:r>
-              <a:rPr lang="en-US" sz="1800" b="0" i="0" u="none" strike="noStrike" cap="none" dirty="0">
-                <a:solidFill>
-                  <a:srgbClr val="000000"/>
-                </a:solidFill>
-                <a:latin typeface="DM Sans"/>
-                <a:ea typeface="DM Sans"/>
-                <a:cs typeface="DM Sans"/>
-                <a:sym typeface="DM Sans"/>
-              </a:rPr>
-              <a:t>。</a:t>
-            </a:r>
-            <a:endParaRPr sz="1800" dirty="0"/>
-          </a:p>
-        </p:txBody>
-      </p:sp>
-      <p:sp>
-        <p:nvSpPr>
-          <p:cNvPr id="358" name="Google Shape;358;p29"/>
-          <p:cNvSpPr txBox="1"/>
-          <p:nvPr/>
-        </p:nvSpPr>
-        <p:spPr>
-          <a:xfrm>
-            <a:off x="1047750" y="3063775"/>
-            <a:ext cx="4476750" cy="285750"/>
-          </a:xfrm>
-          <a:prstGeom prst="rect">
-            <a:avLst/>
-          </a:prstGeom>
-          <a:noFill/>
-          <a:ln>
-            <a:noFill/>
-          </a:ln>
-        </p:spPr>
-        <p:txBody>
-          <a:bodyPr spcFirstLastPara="1" wrap="square" lIns="0" tIns="0" rIns="0" bIns="0" anchor="ctr" anchorCtr="0">
-            <a:spAutoFit/>
-          </a:bodyPr>
-          <a:lstStyle/>
-          <a:p>
-            <a:pPr marL="0" marR="0" lvl="0" indent="0" algn="l" rtl="0">
-              <a:spcBef>
-                <a:spcPts val="0"/>
-              </a:spcBef>
-              <a:spcAft>
-                <a:spcPts val="0"/>
-              </a:spcAft>
-              <a:buNone/>
-            </a:pPr>
-            <a:r>
-              <a:rPr lang="en-US" sz="1800" b="0" i="0" u="none" strike="noStrike" cap="none" dirty="0" err="1">
-                <a:solidFill>
-                  <a:srgbClr val="000000"/>
-                </a:solidFill>
-                <a:latin typeface="DM Sans"/>
-                <a:ea typeface="DM Sans"/>
-                <a:cs typeface="DM Sans"/>
-                <a:sym typeface="DM Sans"/>
-              </a:rPr>
-              <a:t>Streamlit</a:t>
-            </a:r>
-            <a:r>
-              <a:rPr lang="en-US" sz="1800" b="0" i="0" u="none" strike="noStrike" cap="none" dirty="0">
-                <a:solidFill>
-                  <a:srgbClr val="000000"/>
-                </a:solidFill>
-                <a:latin typeface="DM Sans"/>
-                <a:ea typeface="DM Sans"/>
-                <a:cs typeface="DM Sans"/>
-                <a:sym typeface="DM Sans"/>
-              </a:rPr>
-              <a:t> + Plotly + SQLite</a:t>
-            </a:r>
-            <a:endParaRPr sz="1800" dirty="0"/>
-          </a:p>
-        </p:txBody>
-      </p:sp>
-      <p:sp>
-        <p:nvSpPr>
-          <p:cNvPr id="359" name="Google Shape;359;p29"/>
-          <p:cNvSpPr/>
-          <p:nvPr/>
-        </p:nvSpPr>
-        <p:spPr>
-          <a:xfrm>
-            <a:off x="571500" y="3482875"/>
-            <a:ext cx="4953000" cy="9525"/>
-          </a:xfrm>
-          <a:prstGeom prst="rect">
-            <a:avLst/>
-          </a:prstGeom>
-          <a:solidFill>
-            <a:srgbClr val="F0F0F0"/>
-          </a:solidFill>
-          <a:ln>
-            <a:noFill/>
-          </a:ln>
-        </p:spPr>
-        <p:txBody>
-          <a:bodyPr spcFirstLastPara="1" wrap="square" lIns="91425" tIns="45700" rIns="91425" bIns="45700" anchor="ctr" anchorCtr="0">
-            <a:noAutofit/>
-          </a:bodyPr>
-          <a:lstStyle/>
-          <a:p>
-            <a:pPr marL="0" marR="0" lvl="0" indent="0" algn="ctr" rtl="0">
-              <a:spcBef>
-                <a:spcPts val="0"/>
-              </a:spcBef>
-              <a:spcAft>
-                <a:spcPts val="0"/>
-              </a:spcAft>
-              <a:buNone/>
-            </a:pPr>
-            <a:endParaRPr sz="1800" b="0" i="0" u="none" strike="noStrike" cap="none">
-              <a:solidFill>
-                <a:schemeClr val="dk1"/>
-              </a:solidFill>
-              <a:latin typeface="Calibri"/>
-              <a:ea typeface="Calibri"/>
-              <a:cs typeface="Calibri"/>
-              <a:sym typeface="Calibri"/>
-            </a:endParaRPr>
-          </a:p>
-        </p:txBody>
-      </p:sp>
-      <p:sp>
-        <p:nvSpPr>
-          <p:cNvPr id="360" name="Google Shape;360;p29"/>
-          <p:cNvSpPr txBox="1"/>
-          <p:nvPr/>
-        </p:nvSpPr>
-        <p:spPr>
-          <a:xfrm>
-            <a:off x="1047750" y="3644413"/>
-            <a:ext cx="4476750" cy="276999"/>
-          </a:xfrm>
-          <a:prstGeom prst="rect">
-            <a:avLst/>
-          </a:prstGeom>
-          <a:noFill/>
-          <a:ln>
-            <a:noFill/>
-          </a:ln>
-        </p:spPr>
-        <p:txBody>
-          <a:bodyPr spcFirstLastPara="1" wrap="square" lIns="0" tIns="0" rIns="0" bIns="0" anchor="ctr" anchorCtr="0">
-            <a:spAutoFit/>
-          </a:bodyPr>
-          <a:lstStyle/>
-          <a:p>
-            <a:pPr marL="0" marR="0" lvl="0" indent="0" algn="l" rtl="0">
-              <a:spcBef>
-                <a:spcPts val="0"/>
-              </a:spcBef>
-              <a:spcAft>
-                <a:spcPts val="0"/>
-              </a:spcAft>
-              <a:buNone/>
-            </a:pPr>
-            <a:r>
-              <a:rPr lang="en-US" sz="1800" b="0" i="0" u="none" strike="noStrike" cap="none" dirty="0">
-                <a:solidFill>
-                  <a:srgbClr val="000000"/>
-                </a:solidFill>
-                <a:latin typeface="DM Sans"/>
-                <a:ea typeface="DM Sans"/>
-                <a:cs typeface="DM Sans"/>
-                <a:sym typeface="DM Sans"/>
-              </a:rPr>
-              <a:t>GPT-3.5 / Gemini API </a:t>
-            </a:r>
-            <a:r>
-              <a:rPr lang="zh-TW" altLang="en-US" sz="1800" b="0" i="0" u="none" strike="noStrike" cap="none" dirty="0">
-                <a:solidFill>
-                  <a:srgbClr val="000000"/>
-                </a:solidFill>
-                <a:latin typeface="DM Sans"/>
-                <a:ea typeface="DM Sans"/>
-                <a:cs typeface="DM Sans"/>
-                <a:sym typeface="DM Sans"/>
-              </a:rPr>
-              <a:t>即時風險摘要</a:t>
-            </a:r>
-            <a:endParaRPr sz="1800" dirty="0"/>
-          </a:p>
-        </p:txBody>
-      </p:sp>
-      <p:sp>
-        <p:nvSpPr>
-          <p:cNvPr id="361" name="Google Shape;361;p29"/>
-          <p:cNvSpPr/>
-          <p:nvPr/>
-        </p:nvSpPr>
-        <p:spPr>
-          <a:xfrm>
-            <a:off x="571500" y="4063900"/>
-            <a:ext cx="4953000" cy="9525"/>
-          </a:xfrm>
-          <a:prstGeom prst="rect">
-            <a:avLst/>
-          </a:prstGeom>
-          <a:solidFill>
-            <a:srgbClr val="F0F0F0"/>
-          </a:solidFill>
-          <a:ln>
-            <a:noFill/>
-          </a:ln>
-        </p:spPr>
-        <p:txBody>
-          <a:bodyPr spcFirstLastPara="1" wrap="square" lIns="91425" tIns="45700" rIns="91425" bIns="45700" anchor="ctr" anchorCtr="0">
-            <a:noAutofit/>
-          </a:bodyPr>
-          <a:lstStyle/>
-          <a:p>
-            <a:pPr marL="0" marR="0" lvl="0" indent="0" algn="ctr" rtl="0">
-              <a:spcBef>
-                <a:spcPts val="0"/>
-              </a:spcBef>
-              <a:spcAft>
-                <a:spcPts val="0"/>
-              </a:spcAft>
-              <a:buNone/>
-            </a:pPr>
-            <a:endParaRPr sz="1800" b="0" i="0" u="none" strike="noStrike" cap="none">
-              <a:solidFill>
-                <a:schemeClr val="dk1"/>
-              </a:solidFill>
-              <a:latin typeface="Calibri"/>
-              <a:ea typeface="Calibri"/>
-              <a:cs typeface="Calibri"/>
-              <a:sym typeface="Calibri"/>
-            </a:endParaRPr>
-          </a:p>
-        </p:txBody>
-      </p:sp>
-      <p:sp>
-        <p:nvSpPr>
-          <p:cNvPr id="362" name="Google Shape;362;p29"/>
-          <p:cNvSpPr txBox="1"/>
-          <p:nvPr/>
-        </p:nvSpPr>
-        <p:spPr>
-          <a:xfrm>
-            <a:off x="1047750" y="4225438"/>
-            <a:ext cx="4476750" cy="276999"/>
-          </a:xfrm>
-          <a:prstGeom prst="rect">
-            <a:avLst/>
-          </a:prstGeom>
-          <a:noFill/>
-          <a:ln>
-            <a:noFill/>
-          </a:ln>
-        </p:spPr>
-        <p:txBody>
-          <a:bodyPr spcFirstLastPara="1" wrap="square" lIns="0" tIns="0" rIns="0" bIns="0" anchor="ctr" anchorCtr="0">
-            <a:spAutoFit/>
-          </a:bodyPr>
-          <a:lstStyle/>
-          <a:p>
-            <a:pPr marL="0" marR="0" lvl="0" indent="0" algn="l" rtl="0">
-              <a:spcBef>
-                <a:spcPts val="0"/>
-              </a:spcBef>
-              <a:spcAft>
-                <a:spcPts val="0"/>
-              </a:spcAft>
-              <a:buNone/>
-            </a:pPr>
-            <a:r>
-              <a:rPr lang="en-US" sz="1800" b="0" i="0" u="none" strike="noStrike" cap="none">
-                <a:solidFill>
-                  <a:srgbClr val="000000"/>
-                </a:solidFill>
-                <a:latin typeface="DM Sans"/>
-                <a:ea typeface="DM Sans"/>
-                <a:cs typeface="DM Sans"/>
-                <a:sym typeface="DM Sans"/>
-              </a:rPr>
-              <a:t>平均延遲：</a:t>
-            </a:r>
-            <a:r>
-              <a:rPr lang="en-US" sz="1800" b="1" i="0" u="none" strike="noStrike" cap="none">
-                <a:solidFill>
-                  <a:srgbClr val="000000"/>
-                </a:solidFill>
-                <a:latin typeface="DM Sans"/>
-                <a:ea typeface="DM Sans"/>
-                <a:cs typeface="DM Sans"/>
-                <a:sym typeface="DM Sans"/>
-              </a:rPr>
-              <a:t>840 毫秒</a:t>
-            </a:r>
-            <a:endParaRPr sz="1800"/>
-          </a:p>
-        </p:txBody>
-      </p:sp>
-      <p:sp>
-        <p:nvSpPr>
-          <p:cNvPr id="363" name="Google Shape;363;p29"/>
-          <p:cNvSpPr/>
-          <p:nvPr/>
-        </p:nvSpPr>
-        <p:spPr>
-          <a:xfrm>
-            <a:off x="571500" y="4644925"/>
-            <a:ext cx="4953000" cy="9525"/>
-          </a:xfrm>
-          <a:prstGeom prst="rect">
-            <a:avLst/>
-          </a:prstGeom>
-          <a:solidFill>
-            <a:srgbClr val="F0F0F0"/>
-          </a:solidFill>
-          <a:ln>
-            <a:noFill/>
-          </a:ln>
-        </p:spPr>
-        <p:txBody>
-          <a:bodyPr spcFirstLastPara="1" wrap="square" lIns="91425" tIns="45700" rIns="91425" bIns="45700" anchor="ctr" anchorCtr="0">
-            <a:noAutofit/>
-          </a:bodyPr>
-          <a:lstStyle/>
-          <a:p>
-            <a:pPr marL="0" marR="0" lvl="0" indent="0" algn="ctr" rtl="0">
-              <a:spcBef>
-                <a:spcPts val="0"/>
-              </a:spcBef>
-              <a:spcAft>
-                <a:spcPts val="0"/>
-              </a:spcAft>
-              <a:buNone/>
-            </a:pPr>
-            <a:endParaRPr sz="1800" b="0" i="0" u="none" strike="noStrike" cap="none">
-              <a:solidFill>
-                <a:schemeClr val="dk1"/>
-              </a:solidFill>
-              <a:latin typeface="Calibri"/>
-              <a:ea typeface="Calibri"/>
-              <a:cs typeface="Calibri"/>
-              <a:sym typeface="Calibri"/>
-            </a:endParaRPr>
-          </a:p>
-        </p:txBody>
-      </p:sp>
-      <p:sp>
-        <p:nvSpPr>
-          <p:cNvPr id="364" name="Google Shape;364;p29"/>
-          <p:cNvSpPr/>
-          <p:nvPr/>
-        </p:nvSpPr>
-        <p:spPr>
-          <a:xfrm>
-            <a:off x="571500" y="3482875"/>
-            <a:ext cx="4953000" cy="9525"/>
-          </a:xfrm>
-          <a:prstGeom prst="rect">
-            <a:avLst/>
-          </a:prstGeom>
-          <a:solidFill>
-            <a:srgbClr val="F0F0F0"/>
-          </a:solidFill>
-          <a:ln>
-            <a:noFill/>
-          </a:ln>
-        </p:spPr>
-        <p:txBody>
-          <a:bodyPr spcFirstLastPara="1" wrap="square" lIns="91425" tIns="45700" rIns="91425" bIns="45700" anchor="ctr" anchorCtr="0">
-            <a:noAutofit/>
-          </a:bodyPr>
-          <a:lstStyle/>
-          <a:p>
-            <a:pPr marL="0" marR="0" lvl="0" indent="0" algn="ctr" rtl="0">
-              <a:spcBef>
-                <a:spcPts val="0"/>
-              </a:spcBef>
-              <a:spcAft>
-                <a:spcPts val="0"/>
-              </a:spcAft>
-              <a:buNone/>
-            </a:pPr>
-            <a:endParaRPr sz="1800" b="0" i="0" u="none" strike="noStrike" cap="none">
-              <a:solidFill>
-                <a:schemeClr val="dk1"/>
-              </a:solidFill>
-              <a:latin typeface="Calibri"/>
-              <a:ea typeface="Calibri"/>
-              <a:cs typeface="Calibri"/>
-              <a:sym typeface="Calibri"/>
-            </a:endParaRPr>
-          </a:p>
-        </p:txBody>
-      </p:sp>
-      <p:sp>
-        <p:nvSpPr>
-          <p:cNvPr id="365" name="Google Shape;365;p29"/>
-          <p:cNvSpPr/>
-          <p:nvPr/>
-        </p:nvSpPr>
-        <p:spPr>
-          <a:xfrm>
-            <a:off x="571500" y="4063900"/>
-            <a:ext cx="4953000" cy="9525"/>
-          </a:xfrm>
-          <a:prstGeom prst="rect">
-            <a:avLst/>
-          </a:prstGeom>
-          <a:solidFill>
-            <a:srgbClr val="F0F0F0"/>
-          </a:solidFill>
-          <a:ln>
-            <a:noFill/>
-          </a:ln>
-        </p:spPr>
-        <p:txBody>
-          <a:bodyPr spcFirstLastPara="1" wrap="square" lIns="91425" tIns="45700" rIns="91425" bIns="45700" anchor="ctr" anchorCtr="0">
-            <a:noAutofit/>
-          </a:bodyPr>
-          <a:lstStyle/>
-          <a:p>
-            <a:pPr marL="0" marR="0" lvl="0" indent="0" algn="ctr" rtl="0">
-              <a:spcBef>
-                <a:spcPts val="0"/>
-              </a:spcBef>
-              <a:spcAft>
-                <a:spcPts val="0"/>
-              </a:spcAft>
-              <a:buNone/>
-            </a:pPr>
-            <a:endParaRPr sz="1800" b="0" i="0" u="none" strike="noStrike" cap="none">
-              <a:solidFill>
-                <a:schemeClr val="dk1"/>
-              </a:solidFill>
-              <a:latin typeface="Calibri"/>
-              <a:ea typeface="Calibri"/>
-              <a:cs typeface="Calibri"/>
-              <a:sym typeface="Calibri"/>
-            </a:endParaRPr>
-          </a:p>
-        </p:txBody>
-      </p:sp>
-      <p:sp>
-        <p:nvSpPr>
-          <p:cNvPr id="366" name="Google Shape;366;p29"/>
-          <p:cNvSpPr/>
-          <p:nvPr/>
-        </p:nvSpPr>
-        <p:spPr>
-          <a:xfrm>
-            <a:off x="571500" y="4644925"/>
-            <a:ext cx="4953000" cy="9525"/>
-          </a:xfrm>
-          <a:prstGeom prst="rect">
-            <a:avLst/>
-          </a:prstGeom>
-          <a:solidFill>
-            <a:srgbClr val="F0F0F0"/>
-          </a:solidFill>
-          <a:ln>
-            <a:noFill/>
-          </a:ln>
-        </p:spPr>
-        <p:txBody>
-          <a:bodyPr spcFirstLastPara="1" wrap="square" lIns="91425" tIns="45700" rIns="91425" bIns="45700" anchor="ctr" anchorCtr="0">
-            <a:noAutofit/>
-          </a:bodyPr>
-          <a:lstStyle/>
-          <a:p>
-            <a:pPr marL="0" marR="0" lvl="0" indent="0" algn="ctr" rtl="0">
-              <a:spcBef>
-                <a:spcPts val="0"/>
-              </a:spcBef>
-              <a:spcAft>
-                <a:spcPts val="0"/>
-              </a:spcAft>
-              <a:buNone/>
-            </a:pPr>
-            <a:endParaRPr sz="1800" b="0" i="0" u="none" strike="noStrike" cap="none">
-              <a:solidFill>
-                <a:schemeClr val="dk1"/>
-              </a:solidFill>
-              <a:latin typeface="Calibri"/>
-              <a:ea typeface="Calibri"/>
-              <a:cs typeface="Calibri"/>
-              <a:sym typeface="Calibri"/>
-            </a:endParaRPr>
-          </a:p>
-        </p:txBody>
-      </p:sp>
-      <p:pic>
-        <p:nvPicPr>
-          <p:cNvPr id="367" name="Google Shape;367;p29" descr="image.png"/>
-          <p:cNvPicPr preferRelativeResize="0"/>
-          <p:nvPr/>
-        </p:nvPicPr>
-        <p:blipFill rotWithShape="1">
-          <a:blip r:embed="rId3">
-            <a:alphaModFix/>
-          </a:blip>
-          <a:srcRect/>
-          <a:stretch/>
-        </p:blipFill>
-        <p:spPr>
-          <a:xfrm>
-            <a:off x="571500" y="3092350"/>
-            <a:ext cx="266700" cy="219075"/>
-          </a:xfrm>
-          <a:prstGeom prst="rect">
-            <a:avLst/>
-          </a:prstGeom>
-          <a:noFill/>
-          <a:ln>
-            <a:noFill/>
-          </a:ln>
-        </p:spPr>
-      </p:pic>
-      <p:pic>
-        <p:nvPicPr>
-          <p:cNvPr id="368" name="Google Shape;368;p29" descr="image.png"/>
-          <p:cNvPicPr preferRelativeResize="0"/>
-          <p:nvPr/>
-        </p:nvPicPr>
-        <p:blipFill rotWithShape="1">
-          <a:blip r:embed="rId4">
-            <a:alphaModFix/>
-          </a:blip>
-          <a:srcRect/>
-          <a:stretch/>
-        </p:blipFill>
-        <p:spPr>
-          <a:xfrm>
-            <a:off x="571500" y="3668613"/>
-            <a:ext cx="209550" cy="219075"/>
-          </a:xfrm>
-          <a:prstGeom prst="rect">
-            <a:avLst/>
-          </a:prstGeom>
-          <a:noFill/>
-          <a:ln>
-            <a:noFill/>
-          </a:ln>
-        </p:spPr>
-      </p:pic>
-      <p:pic>
-        <p:nvPicPr>
-          <p:cNvPr id="369" name="Google Shape;369;p29" descr="image.png"/>
-          <p:cNvPicPr preferRelativeResize="0"/>
-          <p:nvPr/>
-        </p:nvPicPr>
-        <p:blipFill rotWithShape="1">
-          <a:blip r:embed="rId5">
-            <a:alphaModFix/>
-          </a:blip>
-          <a:srcRect/>
-          <a:stretch/>
-        </p:blipFill>
-        <p:spPr>
-          <a:xfrm>
-            <a:off x="571500" y="4249638"/>
-            <a:ext cx="180975" cy="219075"/>
-          </a:xfrm>
-          <a:prstGeom prst="rect">
-            <a:avLst/>
-          </a:prstGeom>
-          <a:noFill/>
-          <a:ln>
-            <a:noFill/>
-          </a:ln>
-        </p:spPr>
-      </p:pic>
-      <p:sp>
-        <p:nvSpPr>
-          <p:cNvPr id="370" name="Google Shape;370;p29"/>
-          <p:cNvSpPr txBox="1"/>
-          <p:nvPr/>
-        </p:nvSpPr>
-        <p:spPr>
-          <a:xfrm>
-            <a:off x="809625" y="1884610"/>
-            <a:ext cx="4950618" cy="502890"/>
-          </a:xfrm>
-          <a:prstGeom prst="rect">
-            <a:avLst/>
-          </a:prstGeom>
-          <a:noFill/>
-          <a:ln>
-            <a:noFill/>
-          </a:ln>
-        </p:spPr>
-        <p:txBody>
-          <a:bodyPr spcFirstLastPara="1" wrap="square" lIns="0" tIns="0" rIns="0" bIns="0" anchor="t" anchorCtr="0">
-            <a:spAutoFit/>
-          </a:bodyPr>
-          <a:lstStyle/>
-          <a:p>
-            <a:pPr marL="0" marR="0" lvl="0" indent="0" algn="l" rtl="0">
-              <a:lnSpc>
-                <a:spcPct val="119969"/>
-              </a:lnSpc>
-              <a:spcBef>
-                <a:spcPts val="0"/>
-              </a:spcBef>
-              <a:spcAft>
-                <a:spcPts val="0"/>
-              </a:spcAft>
-              <a:buNone/>
-            </a:pPr>
-            <a:r>
-              <a:rPr lang="en-US" sz="3300" b="1" i="0" u="none" strike="noStrike" cap="none">
-                <a:solidFill>
-                  <a:srgbClr val="002147"/>
-                </a:solidFill>
-                <a:latin typeface="Merriweather"/>
-                <a:ea typeface="Merriweather"/>
-                <a:cs typeface="Merriweather"/>
-                <a:sym typeface="Merriweather"/>
-              </a:rPr>
-              <a:t>LLM-ETF 平台實作</a:t>
-            </a:r>
-            <a:endParaRPr/>
-          </a:p>
-        </p:txBody>
-      </p:sp>
-      <p:sp>
-        <p:nvSpPr>
-          <p:cNvPr id="371" name="Google Shape;371;p29"/>
-          <p:cNvSpPr/>
-          <p:nvPr/>
-        </p:nvSpPr>
-        <p:spPr>
-          <a:xfrm>
-            <a:off x="571500" y="1884610"/>
-            <a:ext cx="76200" cy="502890"/>
-          </a:xfrm>
-          <a:prstGeom prst="rect">
-            <a:avLst/>
-          </a:prstGeom>
-          <a:solidFill>
-            <a:srgbClr val="D4AF37"/>
-          </a:solidFill>
-          <a:ln>
-            <a:noFill/>
-          </a:ln>
-        </p:spPr>
-        <p:txBody>
-          <a:bodyPr spcFirstLastPara="1" wrap="square" lIns="91425" tIns="45700" rIns="91425" bIns="45700" anchor="ctr" anchorCtr="0">
-            <a:noAutofit/>
-          </a:bodyPr>
-          <a:lstStyle/>
-          <a:p>
-            <a:pPr marL="0" marR="0" lvl="0" indent="0" algn="ctr" rtl="0">
-              <a:spcBef>
-                <a:spcPts val="0"/>
-              </a:spcBef>
-              <a:spcAft>
-                <a:spcPts val="0"/>
-              </a:spcAft>
-              <a:buNone/>
-            </a:pPr>
-            <a:endParaRPr sz="1800" b="0" i="0" u="none" strike="noStrike" cap="none">
-              <a:solidFill>
-                <a:schemeClr val="dk1"/>
-              </a:solidFill>
-              <a:latin typeface="Calibri"/>
-              <a:ea typeface="Calibri"/>
-              <a:cs typeface="Calibri"/>
-              <a:sym typeface="Calibri"/>
-            </a:endParaRPr>
-          </a:p>
-        </p:txBody>
-      </p:sp>
-      <p:pic>
-        <p:nvPicPr>
-          <p:cNvPr id="3" name="圖片 2">
-            <a:extLst>
-              <a:ext uri="{FF2B5EF4-FFF2-40B4-BE49-F238E27FC236}">
-                <a16:creationId xmlns:a16="http://schemas.microsoft.com/office/drawing/2014/main" id="{092D2DF1-8899-CD1A-2145-6E63CFC27CAD}"/>
-              </a:ext>
-            </a:extLst>
-          </p:cNvPr>
-          <p:cNvPicPr>
-            <a:picLocks noChangeAspect="1"/>
-          </p:cNvPicPr>
-          <p:nvPr/>
-        </p:nvPicPr>
-        <p:blipFill>
-          <a:blip r:embed="rId6"/>
-          <a:stretch>
-            <a:fillRect/>
-          </a:stretch>
-        </p:blipFill>
-        <p:spPr>
-          <a:xfrm>
-            <a:off x="5686425" y="510072"/>
-            <a:ext cx="6407288" cy="5964655"/>
-          </a:xfrm>
-          <a:prstGeom prst="rect">
-            <a:avLst/>
-          </a:prstGeom>
-        </p:spPr>
-      </p:pic>
-    </p:spTree>
-  </p:cSld>
-  <p:clrMapOvr>
-    <a:masterClrMapping/>
-  </p:clrMapOvr>
-</p:sld>
-</file>
-
-<file path=ppt/slides/slide18.xml><?xml version="1.0" encoding="utf-8"?>
-<p:sld xmlns:a="http://schemas.openxmlformats.org/drawingml/2006/main" xmlns:r="http://schemas.openxmlformats.org/officeDocument/2006/relationships" xmlns:p="http://schemas.openxmlformats.org/presentationml/2006/main">
-  <p:cSld>
-    <p:bg>
-      <p:bgPr>
-        <a:solidFill>
-          <a:srgbClr val="FFFFFF"/>
-        </a:solidFill>
-        <a:effectLst/>
-      </p:bgPr>
-    </p:bg>
-    <p:spTree>
-      <p:nvGrpSpPr>
-        <p:cNvPr id="1" name="Shape 375"/>
-        <p:cNvGrpSpPr/>
-        <p:nvPr/>
-      </p:nvGrpSpPr>
-      <p:grpSpPr>
-        <a:xfrm>
-          <a:off x="0" y="0"/>
-          <a:ext cx="0" cy="0"/>
-          <a:chOff x="0" y="0"/>
-          <a:chExt cx="0" cy="0"/>
-        </a:xfrm>
-      </p:grpSpPr>
-      <p:pic>
-        <p:nvPicPr>
-          <p:cNvPr id="377" name="Google Shape;377;p30" descr="image.png"/>
-          <p:cNvPicPr preferRelativeResize="0"/>
-          <p:nvPr/>
-        </p:nvPicPr>
-        <p:blipFill rotWithShape="1">
-          <a:blip r:embed="rId3">
-            <a:alphaModFix/>
-          </a:blip>
-          <a:srcRect/>
-          <a:stretch/>
-        </p:blipFill>
-        <p:spPr>
-          <a:xfrm>
-            <a:off x="571500" y="2807369"/>
-            <a:ext cx="5334000" cy="2550694"/>
-          </a:xfrm>
-          <a:prstGeom prst="rect">
-            <a:avLst/>
-          </a:prstGeom>
-          <a:noFill/>
-          <a:ln>
-            <a:noFill/>
-          </a:ln>
-        </p:spPr>
-      </p:pic>
-      <p:pic>
-        <p:nvPicPr>
-          <p:cNvPr id="378" name="Google Shape;378;p30" descr="image.png"/>
-          <p:cNvPicPr preferRelativeResize="0"/>
-          <p:nvPr/>
-        </p:nvPicPr>
-        <p:blipFill rotWithShape="1">
-          <a:blip r:embed="rId4">
-            <a:alphaModFix/>
-          </a:blip>
-          <a:srcRect/>
-          <a:stretch/>
-        </p:blipFill>
-        <p:spPr>
-          <a:xfrm>
-            <a:off x="6286500" y="2807369"/>
-            <a:ext cx="5334000" cy="2550694"/>
-          </a:xfrm>
-          <a:prstGeom prst="rect">
-            <a:avLst/>
-          </a:prstGeom>
-          <a:noFill/>
-          <a:ln>
-            <a:noFill/>
-          </a:ln>
-        </p:spPr>
-      </p:pic>
-      <p:sp>
-        <p:nvSpPr>
-          <p:cNvPr id="379" name="Google Shape;379;p30"/>
-          <p:cNvSpPr txBox="1"/>
-          <p:nvPr/>
-        </p:nvSpPr>
-        <p:spPr>
-          <a:xfrm>
-            <a:off x="866775" y="3354288"/>
-            <a:ext cx="4980622" cy="369332"/>
-          </a:xfrm>
-          <a:prstGeom prst="rect">
-            <a:avLst/>
-          </a:prstGeom>
-          <a:noFill/>
-          <a:ln>
-            <a:noFill/>
-          </a:ln>
-        </p:spPr>
-        <p:txBody>
-          <a:bodyPr spcFirstLastPara="1" wrap="square" lIns="0" tIns="0" rIns="0" bIns="0" anchor="t" anchorCtr="0">
-            <a:spAutoFit/>
-          </a:bodyPr>
-          <a:lstStyle/>
-          <a:p>
-            <a:pPr marL="0" marR="0" lvl="0" indent="0" algn="l" rtl="0">
-              <a:spcBef>
-                <a:spcPts val="0"/>
-              </a:spcBef>
-              <a:spcAft>
-                <a:spcPts val="0"/>
-              </a:spcAft>
-              <a:buNone/>
-            </a:pPr>
-            <a:r>
-              <a:rPr lang="en-US" sz="2400" b="1" i="0" u="none" strike="noStrike" cap="none" dirty="0" err="1">
-                <a:solidFill>
-                  <a:srgbClr val="002147"/>
-                </a:solidFill>
-                <a:latin typeface="DM Sans"/>
-                <a:ea typeface="DM Sans"/>
-                <a:cs typeface="DM Sans"/>
-                <a:sym typeface="DM Sans"/>
-              </a:rPr>
-              <a:t>分類任務</a:t>
-            </a:r>
-            <a:r>
-              <a:rPr lang="en-US" sz="2400" b="1" i="0" u="none" strike="noStrike" cap="none" dirty="0">
-                <a:solidFill>
-                  <a:srgbClr val="002147"/>
-                </a:solidFill>
-                <a:latin typeface="DM Sans"/>
-                <a:ea typeface="DM Sans"/>
-                <a:cs typeface="DM Sans"/>
-                <a:sym typeface="DM Sans"/>
-              </a:rPr>
-              <a:t> (</a:t>
-            </a:r>
-            <a:r>
-              <a:rPr lang="en-US" sz="2400" b="1" i="0" u="none" strike="noStrike" cap="none" dirty="0" err="1">
-                <a:solidFill>
-                  <a:srgbClr val="002147"/>
-                </a:solidFill>
-                <a:latin typeface="DM Sans"/>
-                <a:ea typeface="DM Sans"/>
-                <a:cs typeface="DM Sans"/>
-                <a:sym typeface="DM Sans"/>
-              </a:rPr>
-              <a:t>漲跌</a:t>
-            </a:r>
-            <a:r>
-              <a:rPr lang="en-US" sz="2400" b="1" i="0" u="none" strike="noStrike" cap="none" dirty="0">
-                <a:solidFill>
-                  <a:srgbClr val="002147"/>
-                </a:solidFill>
-                <a:latin typeface="DM Sans"/>
-                <a:ea typeface="DM Sans"/>
-                <a:cs typeface="DM Sans"/>
-                <a:sym typeface="DM Sans"/>
-              </a:rPr>
-              <a:t>)</a:t>
-            </a:r>
-            <a:endParaRPr sz="2400" dirty="0"/>
-          </a:p>
-        </p:txBody>
-      </p:sp>
-      <p:sp>
-        <p:nvSpPr>
-          <p:cNvPr id="380" name="Google Shape;380;p30"/>
-          <p:cNvSpPr txBox="1"/>
-          <p:nvPr/>
-        </p:nvSpPr>
-        <p:spPr>
-          <a:xfrm>
-            <a:off x="866775" y="3935313"/>
-            <a:ext cx="4743450" cy="886397"/>
-          </a:xfrm>
-          <a:prstGeom prst="rect">
-            <a:avLst/>
-          </a:prstGeom>
-          <a:noFill/>
-          <a:ln>
-            <a:noFill/>
-          </a:ln>
-        </p:spPr>
-        <p:txBody>
-          <a:bodyPr spcFirstLastPara="1" wrap="square" lIns="0" tIns="0" rIns="0" bIns="0" anchor="t" anchorCtr="0">
-            <a:spAutoFit/>
-          </a:bodyPr>
-          <a:lstStyle/>
-          <a:p>
-            <a:pPr marL="0" marR="0" lvl="0" indent="0" algn="l" rtl="0">
-              <a:lnSpc>
-                <a:spcPct val="160000"/>
-              </a:lnSpc>
-              <a:spcBef>
-                <a:spcPts val="0"/>
-              </a:spcBef>
-              <a:spcAft>
-                <a:spcPts val="0"/>
-              </a:spcAft>
-              <a:buNone/>
-            </a:pPr>
-            <a:r>
-              <a:rPr lang="en-US" sz="1800" b="0" i="0" u="none" strike="noStrike" cap="none" dirty="0" err="1">
-                <a:solidFill>
-                  <a:srgbClr val="1E293B"/>
-                </a:solidFill>
-                <a:latin typeface="DM Sans"/>
-                <a:ea typeface="DM Sans"/>
-                <a:cs typeface="DM Sans"/>
-                <a:sym typeface="DM Sans"/>
-              </a:rPr>
-              <a:t>雖然直覺，但缺乏幅度資訊。實務上難以判斷波動大小，投資價值受限</a:t>
-            </a:r>
-            <a:r>
-              <a:rPr lang="en-US" sz="1800" b="0" i="0" u="none" strike="noStrike" cap="none" dirty="0">
-                <a:solidFill>
-                  <a:srgbClr val="1E293B"/>
-                </a:solidFill>
-                <a:latin typeface="DM Sans"/>
-                <a:ea typeface="DM Sans"/>
-                <a:cs typeface="DM Sans"/>
-                <a:sym typeface="DM Sans"/>
-              </a:rPr>
-              <a:t>。</a:t>
-            </a:r>
-            <a:endParaRPr sz="1800" dirty="0"/>
-          </a:p>
-        </p:txBody>
-      </p:sp>
-      <p:sp>
-        <p:nvSpPr>
-          <p:cNvPr id="381" name="Google Shape;381;p30"/>
-          <p:cNvSpPr txBox="1"/>
-          <p:nvPr/>
-        </p:nvSpPr>
-        <p:spPr>
-          <a:xfrm>
-            <a:off x="6581775" y="3354288"/>
-            <a:ext cx="4980622" cy="369332"/>
-          </a:xfrm>
-          <a:prstGeom prst="rect">
-            <a:avLst/>
-          </a:prstGeom>
-          <a:noFill/>
-          <a:ln>
-            <a:noFill/>
-          </a:ln>
-        </p:spPr>
-        <p:txBody>
-          <a:bodyPr spcFirstLastPara="1" wrap="square" lIns="0" tIns="0" rIns="0" bIns="0" anchor="t" anchorCtr="0">
-            <a:spAutoFit/>
-          </a:bodyPr>
-          <a:lstStyle/>
-          <a:p>
-            <a:pPr marL="0" marR="0" lvl="0" indent="0" algn="l" rtl="0">
-              <a:spcBef>
-                <a:spcPts val="0"/>
-              </a:spcBef>
-              <a:spcAft>
-                <a:spcPts val="0"/>
-              </a:spcAft>
-              <a:buNone/>
-            </a:pPr>
-            <a:r>
-              <a:rPr lang="en-US" sz="2400" b="1" i="0" u="none" strike="noStrike" cap="none">
-                <a:solidFill>
-                  <a:srgbClr val="002147"/>
-                </a:solidFill>
-                <a:latin typeface="DM Sans"/>
-                <a:ea typeface="DM Sans"/>
-                <a:cs typeface="DM Sans"/>
-                <a:sym typeface="DM Sans"/>
-              </a:rPr>
-              <a:t>迴歸任務 (數值)</a:t>
-            </a:r>
-            <a:endParaRPr sz="2400"/>
-          </a:p>
-        </p:txBody>
-      </p:sp>
-      <p:sp>
-        <p:nvSpPr>
-          <p:cNvPr id="382" name="Google Shape;382;p30"/>
-          <p:cNvSpPr txBox="1"/>
-          <p:nvPr/>
-        </p:nvSpPr>
-        <p:spPr>
-          <a:xfrm>
-            <a:off x="6581775" y="3935313"/>
-            <a:ext cx="4743450" cy="886397"/>
-          </a:xfrm>
-          <a:prstGeom prst="rect">
-            <a:avLst/>
-          </a:prstGeom>
-          <a:noFill/>
-          <a:ln>
-            <a:noFill/>
-          </a:ln>
-        </p:spPr>
-        <p:txBody>
-          <a:bodyPr spcFirstLastPara="1" wrap="square" lIns="0" tIns="0" rIns="0" bIns="0" anchor="t" anchorCtr="0">
-            <a:spAutoFit/>
-          </a:bodyPr>
-          <a:lstStyle/>
-          <a:p>
-            <a:pPr marL="0" marR="0" lvl="0" indent="0" algn="l" rtl="0">
-              <a:lnSpc>
-                <a:spcPct val="160000"/>
-              </a:lnSpc>
-              <a:spcBef>
-                <a:spcPts val="0"/>
-              </a:spcBef>
-              <a:spcAft>
-                <a:spcPts val="0"/>
-              </a:spcAft>
-              <a:buNone/>
-            </a:pPr>
-            <a:r>
-              <a:rPr lang="en-US" sz="1800" b="0" i="0" u="none" strike="noStrike" cap="none">
-                <a:solidFill>
-                  <a:srgbClr val="1E293B"/>
-                </a:solidFill>
-                <a:latin typeface="DM Sans"/>
-                <a:ea typeface="DM Sans"/>
-                <a:cs typeface="DM Sans"/>
-                <a:sym typeface="DM Sans"/>
-              </a:rPr>
-              <a:t>能精確計算損益與風險比率，更符合專業投資機構之決策需求。</a:t>
-            </a:r>
-            <a:endParaRPr sz="1800"/>
-          </a:p>
-        </p:txBody>
-      </p:sp>
-      <p:sp>
-        <p:nvSpPr>
-          <p:cNvPr id="383" name="Google Shape;383;p30"/>
-          <p:cNvSpPr txBox="1"/>
-          <p:nvPr/>
-        </p:nvSpPr>
-        <p:spPr>
-          <a:xfrm>
-            <a:off x="809625" y="919311"/>
-            <a:ext cx="11351418" cy="502890"/>
-          </a:xfrm>
-          <a:prstGeom prst="rect">
-            <a:avLst/>
-          </a:prstGeom>
-          <a:noFill/>
-          <a:ln>
-            <a:noFill/>
-          </a:ln>
-        </p:spPr>
-        <p:txBody>
-          <a:bodyPr spcFirstLastPara="1" wrap="square" lIns="0" tIns="0" rIns="0" bIns="0" anchor="t" anchorCtr="0">
-            <a:spAutoFit/>
-          </a:bodyPr>
-          <a:lstStyle/>
-          <a:p>
-            <a:pPr marL="0" marR="0" lvl="0" indent="0" algn="l" rtl="0">
-              <a:lnSpc>
-                <a:spcPct val="119969"/>
-              </a:lnSpc>
-              <a:spcBef>
-                <a:spcPts val="0"/>
-              </a:spcBef>
-              <a:spcAft>
-                <a:spcPts val="0"/>
-              </a:spcAft>
-              <a:buNone/>
-            </a:pPr>
-            <a:r>
-              <a:rPr lang="en-US" sz="3300" b="1" i="0" u="none" strike="noStrike" cap="none">
-                <a:solidFill>
-                  <a:srgbClr val="002147"/>
-                </a:solidFill>
-                <a:latin typeface="Merriweather"/>
-                <a:ea typeface="Merriweather"/>
-                <a:cs typeface="Merriweather"/>
-                <a:sym typeface="Merriweather"/>
-              </a:rPr>
-              <a:t>討論：分類與迴歸之抉擇</a:t>
-            </a:r>
-            <a:endParaRPr/>
-          </a:p>
-        </p:txBody>
-      </p:sp>
-      <p:sp>
-        <p:nvSpPr>
-          <p:cNvPr id="384" name="Google Shape;384;p30"/>
-          <p:cNvSpPr/>
-          <p:nvPr/>
-        </p:nvSpPr>
-        <p:spPr>
-          <a:xfrm>
-            <a:off x="571500" y="919311"/>
-            <a:ext cx="76200" cy="502890"/>
-          </a:xfrm>
-          <a:prstGeom prst="rect">
-            <a:avLst/>
-          </a:prstGeom>
-          <a:solidFill>
-            <a:srgbClr val="D4AF37"/>
-          </a:solidFill>
-          <a:ln>
-            <a:noFill/>
-          </a:ln>
-        </p:spPr>
-        <p:txBody>
-          <a:bodyPr spcFirstLastPara="1" wrap="square" lIns="91425" tIns="45700" rIns="91425" bIns="45700" anchor="ctr" anchorCtr="0">
-            <a:noAutofit/>
-          </a:bodyPr>
-          <a:lstStyle/>
-          <a:p>
-            <a:pPr marL="0" marR="0" lvl="0" indent="0" algn="ctr" rtl="0">
-              <a:spcBef>
-                <a:spcPts val="0"/>
-              </a:spcBef>
-              <a:spcAft>
-                <a:spcPts val="0"/>
-              </a:spcAft>
-              <a:buNone/>
-            </a:pPr>
-            <a:endParaRPr sz="1800" b="0" i="0" u="none" strike="noStrike" cap="none">
-              <a:solidFill>
-                <a:schemeClr val="dk1"/>
-              </a:solidFill>
-              <a:latin typeface="Calibri"/>
-              <a:ea typeface="Calibri"/>
-              <a:cs typeface="Calibri"/>
-              <a:sym typeface="Calibri"/>
-            </a:endParaRPr>
-          </a:p>
-        </p:txBody>
-      </p:sp>
-    </p:spTree>
-  </p:cSld>
-  <p:clrMapOvr>
-    <a:masterClrMapping/>
-  </p:clrMapOvr>
-</p:sld>
-</file>
-
-<file path=ppt/slides/slide19.xml><?xml version="1.0" encoding="utf-8"?>
-<p:sld xmlns:a="http://schemas.openxmlformats.org/drawingml/2006/main" xmlns:r="http://schemas.openxmlformats.org/officeDocument/2006/relationships" xmlns:p="http://schemas.openxmlformats.org/presentationml/2006/main">
-  <p:cSld>
-    <p:bg>
-      <p:bgPr>
-        <a:solidFill>
-          <a:srgbClr val="FFFFFF"/>
-        </a:solidFill>
-        <a:effectLst/>
-      </p:bgPr>
-    </p:bg>
-    <p:spTree>
-      <p:nvGrpSpPr>
-        <p:cNvPr id="1" name="Shape 388"/>
-        <p:cNvGrpSpPr/>
-        <p:nvPr/>
-      </p:nvGrpSpPr>
-      <p:grpSpPr>
-        <a:xfrm>
-          <a:off x="0" y="0"/>
-          <a:ext cx="0" cy="0"/>
-          <a:chOff x="0" y="0"/>
-          <a:chExt cx="0" cy="0"/>
-        </a:xfrm>
-      </p:grpSpPr>
-      <p:pic>
-        <p:nvPicPr>
-          <p:cNvPr id="390" name="Google Shape;390;p31" descr="image.png"/>
-          <p:cNvPicPr preferRelativeResize="0"/>
-          <p:nvPr/>
-        </p:nvPicPr>
-        <p:blipFill rotWithShape="1">
-          <a:blip r:embed="rId3">
-            <a:alphaModFix/>
-          </a:blip>
-          <a:srcRect/>
-          <a:stretch/>
-        </p:blipFill>
-        <p:spPr>
-          <a:xfrm>
-            <a:off x="571500" y="2743200"/>
-            <a:ext cx="3524250" cy="2662989"/>
-          </a:xfrm>
-          <a:prstGeom prst="rect">
-            <a:avLst/>
-          </a:prstGeom>
-          <a:noFill/>
-          <a:ln>
-            <a:noFill/>
-          </a:ln>
-        </p:spPr>
-      </p:pic>
-      <p:pic>
-        <p:nvPicPr>
-          <p:cNvPr id="391" name="Google Shape;391;p31" descr="image.png"/>
-          <p:cNvPicPr preferRelativeResize="0"/>
-          <p:nvPr/>
-        </p:nvPicPr>
-        <p:blipFill rotWithShape="1">
-          <a:blip r:embed="rId3">
-            <a:alphaModFix/>
-          </a:blip>
-          <a:srcRect/>
-          <a:stretch/>
-        </p:blipFill>
-        <p:spPr>
-          <a:xfrm>
-            <a:off x="4333875" y="2743200"/>
-            <a:ext cx="3524250" cy="2662989"/>
-          </a:xfrm>
-          <a:prstGeom prst="rect">
-            <a:avLst/>
-          </a:prstGeom>
-          <a:noFill/>
-          <a:ln>
-            <a:noFill/>
-          </a:ln>
-        </p:spPr>
-      </p:pic>
-      <p:pic>
-        <p:nvPicPr>
-          <p:cNvPr id="392" name="Google Shape;392;p31" descr="image.png"/>
-          <p:cNvPicPr preferRelativeResize="0"/>
-          <p:nvPr/>
-        </p:nvPicPr>
-        <p:blipFill rotWithShape="1">
-          <a:blip r:embed="rId4">
-            <a:alphaModFix/>
-          </a:blip>
-          <a:srcRect/>
-          <a:stretch/>
-        </p:blipFill>
-        <p:spPr>
-          <a:xfrm>
-            <a:off x="8096250" y="2743200"/>
-            <a:ext cx="3524250" cy="2662989"/>
-          </a:xfrm>
-          <a:prstGeom prst="rect">
-            <a:avLst/>
-          </a:prstGeom>
-          <a:noFill/>
-          <a:ln>
-            <a:noFill/>
-          </a:ln>
-        </p:spPr>
-      </p:pic>
-      <p:pic>
-        <p:nvPicPr>
-          <p:cNvPr id="393" name="Google Shape;393;p31" descr="image.png"/>
-          <p:cNvPicPr preferRelativeResize="0"/>
-          <p:nvPr/>
-        </p:nvPicPr>
-        <p:blipFill rotWithShape="1">
-          <a:blip r:embed="rId5">
-            <a:alphaModFix/>
-          </a:blip>
-          <a:srcRect/>
-          <a:stretch/>
-        </p:blipFill>
-        <p:spPr>
-          <a:xfrm>
-            <a:off x="2095500" y="3194090"/>
-            <a:ext cx="428625" cy="381000"/>
-          </a:xfrm>
-          <a:prstGeom prst="rect">
-            <a:avLst/>
-          </a:prstGeom>
-          <a:noFill/>
-          <a:ln>
-            <a:noFill/>
-          </a:ln>
-        </p:spPr>
-      </p:pic>
-      <p:sp>
-        <p:nvSpPr>
-          <p:cNvPr id="394" name="Google Shape;394;p31"/>
-          <p:cNvSpPr txBox="1"/>
-          <p:nvPr/>
-        </p:nvSpPr>
-        <p:spPr>
-          <a:xfrm>
-            <a:off x="809625" y="3884850"/>
-            <a:ext cx="3100387" cy="369332"/>
-          </a:xfrm>
-          <a:prstGeom prst="rect">
-            <a:avLst/>
-          </a:prstGeom>
-          <a:noFill/>
-          <a:ln>
-            <a:noFill/>
-          </a:ln>
-        </p:spPr>
-        <p:txBody>
-          <a:bodyPr spcFirstLastPara="1" wrap="square" lIns="0" tIns="0" rIns="0" bIns="0" anchor="t" anchorCtr="0">
-            <a:spAutoFit/>
-          </a:bodyPr>
-          <a:lstStyle/>
-          <a:p>
-            <a:pPr marL="0" marR="0" lvl="0" indent="0" algn="ctr" rtl="0">
-              <a:spcBef>
-                <a:spcPts val="0"/>
-              </a:spcBef>
-              <a:spcAft>
-                <a:spcPts val="0"/>
-              </a:spcAft>
-              <a:buNone/>
-            </a:pPr>
-            <a:r>
-              <a:rPr lang="en-US" sz="2400" b="1" i="0" u="none" strike="noStrike" cap="none" dirty="0" err="1">
-                <a:solidFill>
-                  <a:srgbClr val="FFFFFF"/>
-                </a:solidFill>
-                <a:latin typeface="DM Sans"/>
-                <a:ea typeface="DM Sans"/>
-                <a:cs typeface="DM Sans"/>
-                <a:sym typeface="DM Sans"/>
-              </a:rPr>
-              <a:t>無單一冠軍</a:t>
-            </a:r>
-            <a:endParaRPr sz="2400" dirty="0"/>
-          </a:p>
-        </p:txBody>
-      </p:sp>
-      <p:sp>
-        <p:nvSpPr>
-          <p:cNvPr id="395" name="Google Shape;395;p31"/>
-          <p:cNvSpPr txBox="1"/>
-          <p:nvPr/>
-        </p:nvSpPr>
-        <p:spPr>
-          <a:xfrm>
-            <a:off x="957262" y="4426089"/>
-            <a:ext cx="2952750" cy="553998"/>
-          </a:xfrm>
-          <a:prstGeom prst="rect">
-            <a:avLst/>
-          </a:prstGeom>
-          <a:noFill/>
-          <a:ln>
-            <a:noFill/>
-          </a:ln>
-        </p:spPr>
-        <p:txBody>
-          <a:bodyPr spcFirstLastPara="1" wrap="square" lIns="0" tIns="0" rIns="0" bIns="0" anchor="t" anchorCtr="0">
-            <a:spAutoFit/>
-          </a:bodyPr>
-          <a:lstStyle/>
-          <a:p>
-            <a:pPr marL="0" marR="0" lvl="0" indent="0" algn="ctr" rtl="0">
-              <a:spcBef>
-                <a:spcPts val="0"/>
-              </a:spcBef>
-              <a:spcAft>
-                <a:spcPts val="0"/>
-              </a:spcAft>
-              <a:buNone/>
-            </a:pPr>
-            <a:r>
-              <a:rPr lang="en-US" sz="1800" b="0" i="0" u="none" strike="noStrike" cap="none" dirty="0" err="1">
-                <a:solidFill>
-                  <a:srgbClr val="FFFFFF"/>
-                </a:solidFill>
-                <a:latin typeface="DM Sans"/>
-                <a:ea typeface="DM Sans"/>
-                <a:cs typeface="DM Sans"/>
-                <a:sym typeface="DM Sans"/>
-              </a:rPr>
-              <a:t>不同市場與不同時段，最佳模型各異</a:t>
-            </a:r>
-            <a:r>
-              <a:rPr lang="en-US" sz="1800" b="0" i="0" u="none" strike="noStrike" cap="none" dirty="0">
-                <a:solidFill>
-                  <a:srgbClr val="FFFFFF"/>
-                </a:solidFill>
-                <a:latin typeface="DM Sans"/>
-                <a:ea typeface="DM Sans"/>
-                <a:cs typeface="DM Sans"/>
-                <a:sym typeface="DM Sans"/>
-              </a:rPr>
-              <a:t>。</a:t>
-            </a:r>
-            <a:endParaRPr sz="1800" dirty="0"/>
-          </a:p>
-        </p:txBody>
-      </p:sp>
-      <p:pic>
-        <p:nvPicPr>
-          <p:cNvPr id="396" name="Google Shape;396;p31" descr="image.png"/>
-          <p:cNvPicPr preferRelativeResize="0"/>
-          <p:nvPr/>
-        </p:nvPicPr>
-        <p:blipFill rotWithShape="1">
-          <a:blip r:embed="rId6">
-            <a:alphaModFix/>
-          </a:blip>
-          <a:srcRect/>
-          <a:stretch/>
-        </p:blipFill>
-        <p:spPr>
-          <a:xfrm>
-            <a:off x="5857875" y="3194090"/>
-            <a:ext cx="476250" cy="381000"/>
-          </a:xfrm>
-          <a:prstGeom prst="rect">
-            <a:avLst/>
-          </a:prstGeom>
-          <a:noFill/>
-          <a:ln>
-            <a:noFill/>
-          </a:ln>
-        </p:spPr>
-      </p:pic>
-      <p:sp>
-        <p:nvSpPr>
-          <p:cNvPr id="397" name="Google Shape;397;p31"/>
-          <p:cNvSpPr txBox="1"/>
-          <p:nvPr/>
-        </p:nvSpPr>
-        <p:spPr>
-          <a:xfrm>
-            <a:off x="4572000" y="3761739"/>
-            <a:ext cx="3100387" cy="615553"/>
-          </a:xfrm>
-          <a:prstGeom prst="rect">
-            <a:avLst/>
-          </a:prstGeom>
-          <a:noFill/>
-          <a:ln>
-            <a:noFill/>
-          </a:ln>
-        </p:spPr>
-        <p:txBody>
-          <a:bodyPr spcFirstLastPara="1" wrap="square" lIns="0" tIns="0" rIns="0" bIns="0" anchor="t" anchorCtr="0">
-            <a:spAutoFit/>
-          </a:bodyPr>
-          <a:lstStyle/>
-          <a:p>
-            <a:pPr marL="0" marR="0" lvl="0" indent="0" algn="ctr" rtl="0">
-              <a:spcBef>
-                <a:spcPts val="0"/>
-              </a:spcBef>
-              <a:spcAft>
-                <a:spcPts val="0"/>
-              </a:spcAft>
-              <a:buNone/>
-            </a:pPr>
-            <a:r>
-              <a:rPr lang="zh-TW" altLang="en-US" sz="2000" b="1" i="0" u="none" strike="noStrike" cap="none" dirty="0">
-                <a:solidFill>
-                  <a:srgbClr val="FFFFFF"/>
-                </a:solidFill>
-                <a:latin typeface="DM Sans"/>
-                <a:ea typeface="DM Sans"/>
-                <a:cs typeface="DM Sans"/>
-                <a:sym typeface="DM Sans"/>
-              </a:rPr>
-              <a:t>價格 </a:t>
-            </a:r>
-            <a:r>
-              <a:rPr lang="en-US" sz="2000" b="1" i="0" u="none" strike="noStrike" cap="none" dirty="0">
-                <a:solidFill>
-                  <a:srgbClr val="FFFFFF"/>
-                </a:solidFill>
-                <a:latin typeface="DM Sans"/>
-                <a:ea typeface="DM Sans"/>
-                <a:cs typeface="DM Sans"/>
-                <a:sym typeface="DM Sans"/>
-              </a:rPr>
-              <a:t>R² </a:t>
-            </a:r>
-            <a:r>
-              <a:rPr lang="zh-TW" altLang="en-US" sz="2000" b="1" i="0" u="none" strike="noStrike" cap="none" dirty="0">
-                <a:solidFill>
-                  <a:srgbClr val="FFFFFF"/>
-                </a:solidFill>
-                <a:latin typeface="DM Sans"/>
-                <a:ea typeface="DM Sans"/>
-                <a:cs typeface="DM Sans"/>
-                <a:sym typeface="DM Sans"/>
-              </a:rPr>
-              <a:t>高但輸基準、報酬率 </a:t>
-            </a:r>
-            <a:r>
-              <a:rPr lang="en-US" sz="2000" b="1" i="0" u="none" strike="noStrike" cap="none" dirty="0">
-                <a:solidFill>
-                  <a:srgbClr val="FFFFFF"/>
-                </a:solidFill>
-                <a:latin typeface="DM Sans"/>
-                <a:ea typeface="DM Sans"/>
-                <a:cs typeface="DM Sans"/>
-                <a:sym typeface="DM Sans"/>
-              </a:rPr>
-              <a:t>R² </a:t>
-            </a:r>
-            <a:r>
-              <a:rPr lang="zh-TW" altLang="en-US" sz="2000" b="1" i="0" u="none" strike="noStrike" cap="none" dirty="0">
-                <a:solidFill>
-                  <a:srgbClr val="FFFFFF"/>
-                </a:solidFill>
-                <a:latin typeface="DM Sans"/>
-                <a:ea typeface="DM Sans"/>
-                <a:cs typeface="DM Sans"/>
-                <a:sym typeface="DM Sans"/>
-              </a:rPr>
-              <a:t>近 </a:t>
-            </a:r>
-            <a:r>
-              <a:rPr lang="en-US" altLang="zh-TW" sz="2000" b="1" i="0" u="none" strike="noStrike" cap="none" dirty="0">
-                <a:solidFill>
-                  <a:srgbClr val="FFFFFF"/>
-                </a:solidFill>
-                <a:latin typeface="DM Sans"/>
-                <a:ea typeface="DM Sans"/>
-                <a:cs typeface="DM Sans"/>
-                <a:sym typeface="DM Sans"/>
-              </a:rPr>
-              <a:t>0 </a:t>
-            </a:r>
-            <a:endParaRPr sz="2000" dirty="0"/>
-          </a:p>
-        </p:txBody>
-      </p:sp>
-      <p:sp>
-        <p:nvSpPr>
-          <p:cNvPr id="398" name="Google Shape;398;p31"/>
-          <p:cNvSpPr txBox="1"/>
-          <p:nvPr/>
-        </p:nvSpPr>
-        <p:spPr>
-          <a:xfrm>
-            <a:off x="4719637" y="4426089"/>
-            <a:ext cx="2952750" cy="553998"/>
-          </a:xfrm>
-          <a:prstGeom prst="rect">
-            <a:avLst/>
-          </a:prstGeom>
-          <a:noFill/>
-          <a:ln>
-            <a:noFill/>
-          </a:ln>
-        </p:spPr>
-        <p:txBody>
-          <a:bodyPr spcFirstLastPara="1" wrap="square" lIns="0" tIns="0" rIns="0" bIns="0" anchor="t" anchorCtr="0">
-            <a:spAutoFit/>
-          </a:bodyPr>
-          <a:lstStyle/>
-          <a:p>
-            <a:pPr marL="0" marR="0" lvl="0" indent="0" algn="ctr" rtl="0">
-              <a:spcBef>
-                <a:spcPts val="0"/>
-              </a:spcBef>
-              <a:spcAft>
-                <a:spcPts val="0"/>
-              </a:spcAft>
-              <a:buNone/>
-            </a:pPr>
-            <a:r>
-              <a:rPr lang="zh-TW" altLang="en-US" sz="1800" b="0" i="0" u="none" strike="noStrike" cap="none" dirty="0">
-                <a:solidFill>
-                  <a:srgbClr val="FFFFFF"/>
-                </a:solidFill>
-                <a:latin typeface="DM Sans"/>
-                <a:ea typeface="DM Sans"/>
-                <a:cs typeface="DM Sans"/>
-                <a:sym typeface="DM Sans"/>
-              </a:rPr>
-              <a:t>次日走勢難預測，故分類與 </a:t>
-            </a:r>
-            <a:r>
-              <a:rPr lang="en-US" altLang="zh-TW" sz="1800" b="0" i="0" u="none" strike="noStrike" cap="none" dirty="0">
-                <a:solidFill>
-                  <a:srgbClr val="FFFFFF"/>
-                </a:solidFill>
-                <a:latin typeface="DM Sans"/>
-                <a:ea typeface="DM Sans"/>
-                <a:cs typeface="DM Sans"/>
-                <a:sym typeface="DM Sans"/>
-              </a:rPr>
-              <a:t>LLM </a:t>
-            </a:r>
-            <a:r>
-              <a:rPr lang="zh-TW" altLang="en-US" sz="1800" b="0" i="0" u="none" strike="noStrike" cap="none" dirty="0">
-                <a:solidFill>
-                  <a:srgbClr val="FFFFFF"/>
-                </a:solidFill>
-                <a:latin typeface="DM Sans"/>
-                <a:ea typeface="DM Sans"/>
-                <a:cs typeface="DM Sans"/>
-                <a:sym typeface="DM Sans"/>
-              </a:rPr>
-              <a:t>為輔助</a:t>
-            </a:r>
-            <a:endParaRPr sz="1800" dirty="0"/>
-          </a:p>
-        </p:txBody>
-      </p:sp>
-      <p:pic>
-        <p:nvPicPr>
-          <p:cNvPr id="399" name="Google Shape;399;p31" descr="image.png"/>
-          <p:cNvPicPr preferRelativeResize="0"/>
-          <p:nvPr/>
-        </p:nvPicPr>
-        <p:blipFill rotWithShape="1">
-          <a:blip r:embed="rId7">
-            <a:alphaModFix/>
-          </a:blip>
-          <a:srcRect/>
-          <a:stretch/>
-        </p:blipFill>
-        <p:spPr>
-          <a:xfrm>
-            <a:off x="9620250" y="3194090"/>
-            <a:ext cx="476250" cy="381000"/>
-          </a:xfrm>
-          <a:prstGeom prst="rect">
-            <a:avLst/>
-          </a:prstGeom>
-          <a:noFill/>
-          <a:ln>
-            <a:noFill/>
-          </a:ln>
-        </p:spPr>
-      </p:pic>
-      <p:sp>
-        <p:nvSpPr>
-          <p:cNvPr id="400" name="Google Shape;400;p31"/>
-          <p:cNvSpPr txBox="1"/>
-          <p:nvPr/>
-        </p:nvSpPr>
-        <p:spPr>
-          <a:xfrm>
-            <a:off x="8334375" y="3884850"/>
-            <a:ext cx="3100387" cy="369332"/>
-          </a:xfrm>
-          <a:prstGeom prst="rect">
-            <a:avLst/>
-          </a:prstGeom>
-          <a:noFill/>
-          <a:ln>
-            <a:noFill/>
-          </a:ln>
-        </p:spPr>
-        <p:txBody>
-          <a:bodyPr spcFirstLastPara="1" wrap="square" lIns="0" tIns="0" rIns="0" bIns="0" anchor="t" anchorCtr="0">
-            <a:spAutoFit/>
-          </a:bodyPr>
-          <a:lstStyle/>
-          <a:p>
-            <a:pPr marL="0" marR="0" lvl="0" indent="0" algn="ctr" rtl="0">
-              <a:spcBef>
-                <a:spcPts val="0"/>
-              </a:spcBef>
-              <a:spcAft>
-                <a:spcPts val="0"/>
-              </a:spcAft>
-              <a:buNone/>
-            </a:pPr>
-            <a:r>
-              <a:rPr lang="en-US" sz="2400" b="1" i="0" u="none" strike="noStrike" cap="none">
-                <a:solidFill>
-                  <a:srgbClr val="FFFFFF"/>
-                </a:solidFill>
-                <a:latin typeface="DM Sans"/>
-                <a:ea typeface="DM Sans"/>
-                <a:cs typeface="DM Sans"/>
-                <a:sym typeface="DM Sans"/>
-              </a:rPr>
-              <a:t>LLM 定位</a:t>
-            </a:r>
-            <a:endParaRPr sz="2400"/>
-          </a:p>
-        </p:txBody>
-      </p:sp>
-      <p:sp>
-        <p:nvSpPr>
-          <p:cNvPr id="401" name="Google Shape;401;p31"/>
-          <p:cNvSpPr txBox="1"/>
-          <p:nvPr/>
-        </p:nvSpPr>
-        <p:spPr>
-          <a:xfrm>
-            <a:off x="8482012" y="4426089"/>
-            <a:ext cx="2952750" cy="553998"/>
-          </a:xfrm>
-          <a:prstGeom prst="rect">
-            <a:avLst/>
-          </a:prstGeom>
-          <a:noFill/>
-          <a:ln>
-            <a:noFill/>
-          </a:ln>
-        </p:spPr>
-        <p:txBody>
-          <a:bodyPr spcFirstLastPara="1" wrap="square" lIns="0" tIns="0" rIns="0" bIns="0" anchor="t" anchorCtr="0">
-            <a:spAutoFit/>
-          </a:bodyPr>
-          <a:lstStyle/>
-          <a:p>
-            <a:pPr marL="0" marR="0" lvl="0" indent="0" algn="ctr" rtl="0">
-              <a:spcBef>
-                <a:spcPts val="0"/>
-              </a:spcBef>
-              <a:spcAft>
-                <a:spcPts val="0"/>
-              </a:spcAft>
-              <a:buNone/>
-            </a:pPr>
-            <a:r>
-              <a:rPr lang="en-US" sz="1800" b="0" i="0" u="none" strike="noStrike" cap="none">
-                <a:solidFill>
-                  <a:srgbClr val="FFFFFF"/>
-                </a:solidFill>
-                <a:latin typeface="DM Sans"/>
-                <a:ea typeface="DM Sans"/>
-                <a:cs typeface="DM Sans"/>
-                <a:sym typeface="DM Sans"/>
-              </a:rPr>
-              <a:t>適合作為「解釋型」輔助，而非純算力引擎。</a:t>
-            </a:r>
-            <a:endParaRPr sz="1800"/>
-          </a:p>
-        </p:txBody>
-      </p:sp>
-      <p:sp>
-        <p:nvSpPr>
-          <p:cNvPr id="402" name="Google Shape;402;p31"/>
-          <p:cNvSpPr txBox="1"/>
-          <p:nvPr/>
-        </p:nvSpPr>
-        <p:spPr>
-          <a:xfrm>
-            <a:off x="809625" y="919311"/>
-            <a:ext cx="11351418" cy="502890"/>
-          </a:xfrm>
-          <a:prstGeom prst="rect">
-            <a:avLst/>
-          </a:prstGeom>
-          <a:noFill/>
-          <a:ln>
-            <a:noFill/>
-          </a:ln>
-        </p:spPr>
-        <p:txBody>
-          <a:bodyPr spcFirstLastPara="1" wrap="square" lIns="0" tIns="0" rIns="0" bIns="0" anchor="t" anchorCtr="0">
-            <a:spAutoFit/>
-          </a:bodyPr>
-          <a:lstStyle/>
-          <a:p>
-            <a:pPr marL="0" marR="0" lvl="0" indent="0" algn="l" rtl="0">
-              <a:lnSpc>
-                <a:spcPct val="119969"/>
-              </a:lnSpc>
-              <a:spcBef>
-                <a:spcPts val="0"/>
-              </a:spcBef>
-              <a:spcAft>
-                <a:spcPts val="0"/>
-              </a:spcAft>
-              <a:buNone/>
-            </a:pPr>
-            <a:r>
-              <a:rPr lang="en-US" sz="3300" b="1" i="0" u="none" strike="noStrike" cap="none">
-                <a:solidFill>
-                  <a:srgbClr val="002147"/>
-                </a:solidFill>
-                <a:latin typeface="Merriweather"/>
-                <a:ea typeface="Merriweather"/>
-                <a:cs typeface="Merriweather"/>
-                <a:sym typeface="Merriweather"/>
-              </a:rPr>
-              <a:t>討論：模型比較關鍵發現</a:t>
-            </a:r>
-            <a:endParaRPr/>
-          </a:p>
-        </p:txBody>
-      </p:sp>
-      <p:sp>
-        <p:nvSpPr>
-          <p:cNvPr id="403" name="Google Shape;403;p31"/>
-          <p:cNvSpPr/>
-          <p:nvPr/>
-        </p:nvSpPr>
-        <p:spPr>
-          <a:xfrm>
-            <a:off x="571500" y="919311"/>
-            <a:ext cx="76200" cy="502890"/>
-          </a:xfrm>
-          <a:prstGeom prst="rect">
-            <a:avLst/>
-          </a:prstGeom>
-          <a:solidFill>
-            <a:srgbClr val="D4AF37"/>
-          </a:solidFill>
-          <a:ln>
-            <a:noFill/>
-          </a:ln>
-        </p:spPr>
-        <p:txBody>
-          <a:bodyPr spcFirstLastPara="1" wrap="square" lIns="91425" tIns="45700" rIns="91425" bIns="45700" anchor="ctr" anchorCtr="0">
-            <a:noAutofit/>
-          </a:bodyPr>
-          <a:lstStyle/>
-          <a:p>
-            <a:pPr marL="0" marR="0" lvl="0" indent="0" algn="ctr" rtl="0">
-              <a:spcBef>
-                <a:spcPts val="0"/>
-              </a:spcBef>
-              <a:spcAft>
-                <a:spcPts val="0"/>
-              </a:spcAft>
-              <a:buNone/>
-            </a:pPr>
-            <a:endParaRPr sz="1800" b="0" i="0" u="none" strike="noStrike" cap="none">
-              <a:solidFill>
-                <a:schemeClr val="dk1"/>
-              </a:solidFill>
-              <a:latin typeface="Calibri"/>
-              <a:ea typeface="Calibri"/>
-              <a:cs typeface="Calibri"/>
-              <a:sym typeface="Calibri"/>
-            </a:endParaRPr>
-          </a:p>
-        </p:txBody>
-      </p:sp>
-    </p:spTree>
   </p:cSld>
   <p:clrMapOvr>
     <a:masterClrMapping/>
@@ -21127,6 +20138,1921 @@
     </p:bg>
     <p:spTree>
       <p:nvGrpSpPr>
+        <p:cNvPr id="1" name="Shape 354"/>
+        <p:cNvGrpSpPr/>
+        <p:nvPr/>
+      </p:nvGrpSpPr>
+      <p:grpSpPr>
+        <a:xfrm>
+          <a:off x="0" y="0"/>
+          <a:ext cx="0" cy="0"/>
+          <a:chOff x="0" y="0"/>
+          <a:chExt cx="0" cy="0"/>
+        </a:xfrm>
+      </p:grpSpPr>
+      <p:sp>
+        <p:nvSpPr>
+          <p:cNvPr id="356" name="Google Shape;356;p29"/>
+          <p:cNvSpPr txBox="1"/>
+          <p:nvPr/>
+        </p:nvSpPr>
+        <p:spPr>
+          <a:xfrm>
+            <a:off x="571500" y="4959250"/>
+            <a:ext cx="4953000" cy="553998"/>
+          </a:xfrm>
+          <a:prstGeom prst="rect">
+            <a:avLst/>
+          </a:prstGeom>
+          <a:noFill/>
+          <a:ln>
+            <a:noFill/>
+          </a:ln>
+        </p:spPr>
+        <p:txBody>
+          <a:bodyPr spcFirstLastPara="1" wrap="square" lIns="0" tIns="0" rIns="0" bIns="0" anchor="t" anchorCtr="0">
+            <a:spAutoFit/>
+          </a:bodyPr>
+          <a:lstStyle/>
+          <a:p>
+            <a:pPr marL="0" marR="0" lvl="0" indent="0" algn="l" rtl="0">
+              <a:spcBef>
+                <a:spcPts val="0"/>
+              </a:spcBef>
+              <a:spcAft>
+                <a:spcPts val="0"/>
+              </a:spcAft>
+              <a:buNone/>
+            </a:pPr>
+            <a:r>
+              <a:rPr lang="en-US" sz="1800" b="0" i="0" u="none" strike="noStrike" cap="none" dirty="0" err="1">
+                <a:solidFill>
+                  <a:srgbClr val="000000"/>
+                </a:solidFill>
+                <a:latin typeface="DM Sans"/>
+                <a:ea typeface="DM Sans"/>
+                <a:cs typeface="DM Sans"/>
+                <a:sym typeface="DM Sans"/>
+              </a:rPr>
+              <a:t>低延遲保證在一般終端設備亦能順暢執行，極具商用價值</a:t>
+            </a:r>
+            <a:r>
+              <a:rPr lang="en-US" sz="1800" b="0" i="0" u="none" strike="noStrike" cap="none" dirty="0">
+                <a:solidFill>
+                  <a:srgbClr val="000000"/>
+                </a:solidFill>
+                <a:latin typeface="DM Sans"/>
+                <a:ea typeface="DM Sans"/>
+                <a:cs typeface="DM Sans"/>
+                <a:sym typeface="DM Sans"/>
+              </a:rPr>
+              <a:t>。</a:t>
+            </a:r>
+            <a:endParaRPr sz="1800" dirty="0"/>
+          </a:p>
+        </p:txBody>
+      </p:sp>
+      <p:sp>
+        <p:nvSpPr>
+          <p:cNvPr id="358" name="Google Shape;358;p29"/>
+          <p:cNvSpPr txBox="1"/>
+          <p:nvPr/>
+        </p:nvSpPr>
+        <p:spPr>
+          <a:xfrm>
+            <a:off x="1047750" y="3063775"/>
+            <a:ext cx="4476750" cy="285750"/>
+          </a:xfrm>
+          <a:prstGeom prst="rect">
+            <a:avLst/>
+          </a:prstGeom>
+          <a:noFill/>
+          <a:ln>
+            <a:noFill/>
+          </a:ln>
+        </p:spPr>
+        <p:txBody>
+          <a:bodyPr spcFirstLastPara="1" wrap="square" lIns="0" tIns="0" rIns="0" bIns="0" anchor="ctr" anchorCtr="0">
+            <a:spAutoFit/>
+          </a:bodyPr>
+          <a:lstStyle/>
+          <a:p>
+            <a:pPr marL="0" marR="0" lvl="0" indent="0" algn="l" rtl="0">
+              <a:spcBef>
+                <a:spcPts val="0"/>
+              </a:spcBef>
+              <a:spcAft>
+                <a:spcPts val="0"/>
+              </a:spcAft>
+              <a:buNone/>
+            </a:pPr>
+            <a:r>
+              <a:rPr lang="en-US" sz="1800" b="0" i="0" u="none" strike="noStrike" cap="none" dirty="0" err="1">
+                <a:solidFill>
+                  <a:srgbClr val="000000"/>
+                </a:solidFill>
+                <a:latin typeface="DM Sans"/>
+                <a:ea typeface="DM Sans"/>
+                <a:cs typeface="DM Sans"/>
+                <a:sym typeface="DM Sans"/>
+              </a:rPr>
+              <a:t>Streamlit</a:t>
+            </a:r>
+            <a:r>
+              <a:rPr lang="en-US" sz="1800" b="0" i="0" u="none" strike="noStrike" cap="none" dirty="0">
+                <a:solidFill>
+                  <a:srgbClr val="000000"/>
+                </a:solidFill>
+                <a:latin typeface="DM Sans"/>
+                <a:ea typeface="DM Sans"/>
+                <a:cs typeface="DM Sans"/>
+                <a:sym typeface="DM Sans"/>
+              </a:rPr>
+              <a:t> + Plotly + SQLite</a:t>
+            </a:r>
+            <a:endParaRPr sz="1800" dirty="0"/>
+          </a:p>
+        </p:txBody>
+      </p:sp>
+      <p:sp>
+        <p:nvSpPr>
+          <p:cNvPr id="359" name="Google Shape;359;p29"/>
+          <p:cNvSpPr/>
+          <p:nvPr/>
+        </p:nvSpPr>
+        <p:spPr>
+          <a:xfrm>
+            <a:off x="571500" y="3482875"/>
+            <a:ext cx="4953000" cy="9525"/>
+          </a:xfrm>
+          <a:prstGeom prst="rect">
+            <a:avLst/>
+          </a:prstGeom>
+          <a:solidFill>
+            <a:srgbClr val="F0F0F0"/>
+          </a:solidFill>
+          <a:ln>
+            <a:noFill/>
+          </a:ln>
+        </p:spPr>
+        <p:txBody>
+          <a:bodyPr spcFirstLastPara="1" wrap="square" lIns="91425" tIns="45700" rIns="91425" bIns="45700" anchor="ctr" anchorCtr="0">
+            <a:noAutofit/>
+          </a:bodyPr>
+          <a:lstStyle/>
+          <a:p>
+            <a:pPr marL="0" marR="0" lvl="0" indent="0" algn="ctr" rtl="0">
+              <a:spcBef>
+                <a:spcPts val="0"/>
+              </a:spcBef>
+              <a:spcAft>
+                <a:spcPts val="0"/>
+              </a:spcAft>
+              <a:buNone/>
+            </a:pPr>
+            <a:endParaRPr sz="1800" b="0" i="0" u="none" strike="noStrike" cap="none">
+              <a:solidFill>
+                <a:schemeClr val="dk1"/>
+              </a:solidFill>
+              <a:latin typeface="Calibri"/>
+              <a:ea typeface="Calibri"/>
+              <a:cs typeface="Calibri"/>
+              <a:sym typeface="Calibri"/>
+            </a:endParaRPr>
+          </a:p>
+        </p:txBody>
+      </p:sp>
+      <p:sp>
+        <p:nvSpPr>
+          <p:cNvPr id="360" name="Google Shape;360;p29"/>
+          <p:cNvSpPr txBox="1"/>
+          <p:nvPr/>
+        </p:nvSpPr>
+        <p:spPr>
+          <a:xfrm>
+            <a:off x="1047750" y="3644413"/>
+            <a:ext cx="4476750" cy="276999"/>
+          </a:xfrm>
+          <a:prstGeom prst="rect">
+            <a:avLst/>
+          </a:prstGeom>
+          <a:noFill/>
+          <a:ln>
+            <a:noFill/>
+          </a:ln>
+        </p:spPr>
+        <p:txBody>
+          <a:bodyPr spcFirstLastPara="1" wrap="square" lIns="0" tIns="0" rIns="0" bIns="0" anchor="ctr" anchorCtr="0">
+            <a:spAutoFit/>
+          </a:bodyPr>
+          <a:lstStyle/>
+          <a:p>
+            <a:pPr marL="0" marR="0" lvl="0" indent="0" algn="l" rtl="0">
+              <a:spcBef>
+                <a:spcPts val="0"/>
+              </a:spcBef>
+              <a:spcAft>
+                <a:spcPts val="0"/>
+              </a:spcAft>
+              <a:buNone/>
+            </a:pPr>
+            <a:r>
+              <a:rPr lang="en-US" sz="1800" b="0" i="0" u="none" strike="noStrike" cap="none" dirty="0">
+                <a:solidFill>
+                  <a:srgbClr val="000000"/>
+                </a:solidFill>
+                <a:latin typeface="DM Sans"/>
+                <a:ea typeface="DM Sans"/>
+                <a:cs typeface="DM Sans"/>
+                <a:sym typeface="DM Sans"/>
+              </a:rPr>
+              <a:t>GPT-3.5 / Gemini API </a:t>
+            </a:r>
+            <a:r>
+              <a:rPr lang="zh-TW" altLang="en-US" sz="1800" b="0" i="0" u="none" strike="noStrike" cap="none" dirty="0">
+                <a:solidFill>
+                  <a:srgbClr val="000000"/>
+                </a:solidFill>
+                <a:latin typeface="DM Sans"/>
+                <a:ea typeface="DM Sans"/>
+                <a:cs typeface="DM Sans"/>
+                <a:sym typeface="DM Sans"/>
+              </a:rPr>
+              <a:t>即時風險摘要</a:t>
+            </a:r>
+            <a:endParaRPr sz="1800" dirty="0"/>
+          </a:p>
+        </p:txBody>
+      </p:sp>
+      <p:sp>
+        <p:nvSpPr>
+          <p:cNvPr id="361" name="Google Shape;361;p29"/>
+          <p:cNvSpPr/>
+          <p:nvPr/>
+        </p:nvSpPr>
+        <p:spPr>
+          <a:xfrm>
+            <a:off x="571500" y="4063900"/>
+            <a:ext cx="4953000" cy="9525"/>
+          </a:xfrm>
+          <a:prstGeom prst="rect">
+            <a:avLst/>
+          </a:prstGeom>
+          <a:solidFill>
+            <a:srgbClr val="F0F0F0"/>
+          </a:solidFill>
+          <a:ln>
+            <a:noFill/>
+          </a:ln>
+        </p:spPr>
+        <p:txBody>
+          <a:bodyPr spcFirstLastPara="1" wrap="square" lIns="91425" tIns="45700" rIns="91425" bIns="45700" anchor="ctr" anchorCtr="0">
+            <a:noAutofit/>
+          </a:bodyPr>
+          <a:lstStyle/>
+          <a:p>
+            <a:pPr marL="0" marR="0" lvl="0" indent="0" algn="ctr" rtl="0">
+              <a:spcBef>
+                <a:spcPts val="0"/>
+              </a:spcBef>
+              <a:spcAft>
+                <a:spcPts val="0"/>
+              </a:spcAft>
+              <a:buNone/>
+            </a:pPr>
+            <a:endParaRPr sz="1800" b="0" i="0" u="none" strike="noStrike" cap="none">
+              <a:solidFill>
+                <a:schemeClr val="dk1"/>
+              </a:solidFill>
+              <a:latin typeface="Calibri"/>
+              <a:ea typeface="Calibri"/>
+              <a:cs typeface="Calibri"/>
+              <a:sym typeface="Calibri"/>
+            </a:endParaRPr>
+          </a:p>
+        </p:txBody>
+      </p:sp>
+      <p:sp>
+        <p:nvSpPr>
+          <p:cNvPr id="362" name="Google Shape;362;p29"/>
+          <p:cNvSpPr txBox="1"/>
+          <p:nvPr/>
+        </p:nvSpPr>
+        <p:spPr>
+          <a:xfrm>
+            <a:off x="1047750" y="4225438"/>
+            <a:ext cx="4476750" cy="276999"/>
+          </a:xfrm>
+          <a:prstGeom prst="rect">
+            <a:avLst/>
+          </a:prstGeom>
+          <a:noFill/>
+          <a:ln>
+            <a:noFill/>
+          </a:ln>
+        </p:spPr>
+        <p:txBody>
+          <a:bodyPr spcFirstLastPara="1" wrap="square" lIns="0" tIns="0" rIns="0" bIns="0" anchor="ctr" anchorCtr="0">
+            <a:spAutoFit/>
+          </a:bodyPr>
+          <a:lstStyle/>
+          <a:p>
+            <a:pPr marL="0" marR="0" lvl="0" indent="0" algn="l" rtl="0">
+              <a:spcBef>
+                <a:spcPts val="0"/>
+              </a:spcBef>
+              <a:spcAft>
+                <a:spcPts val="0"/>
+              </a:spcAft>
+              <a:buNone/>
+            </a:pPr>
+            <a:r>
+              <a:rPr lang="en-US" sz="1800" b="0" i="0" u="none" strike="noStrike" cap="none">
+                <a:solidFill>
+                  <a:srgbClr val="000000"/>
+                </a:solidFill>
+                <a:latin typeface="DM Sans"/>
+                <a:ea typeface="DM Sans"/>
+                <a:cs typeface="DM Sans"/>
+                <a:sym typeface="DM Sans"/>
+              </a:rPr>
+              <a:t>平均延遲：</a:t>
+            </a:r>
+            <a:r>
+              <a:rPr lang="en-US" sz="1800" b="1" i="0" u="none" strike="noStrike" cap="none">
+                <a:solidFill>
+                  <a:srgbClr val="000000"/>
+                </a:solidFill>
+                <a:latin typeface="DM Sans"/>
+                <a:ea typeface="DM Sans"/>
+                <a:cs typeface="DM Sans"/>
+                <a:sym typeface="DM Sans"/>
+              </a:rPr>
+              <a:t>840 毫秒</a:t>
+            </a:r>
+            <a:endParaRPr sz="1800"/>
+          </a:p>
+        </p:txBody>
+      </p:sp>
+      <p:sp>
+        <p:nvSpPr>
+          <p:cNvPr id="363" name="Google Shape;363;p29"/>
+          <p:cNvSpPr/>
+          <p:nvPr/>
+        </p:nvSpPr>
+        <p:spPr>
+          <a:xfrm>
+            <a:off x="571500" y="4644925"/>
+            <a:ext cx="4953000" cy="9525"/>
+          </a:xfrm>
+          <a:prstGeom prst="rect">
+            <a:avLst/>
+          </a:prstGeom>
+          <a:solidFill>
+            <a:srgbClr val="F0F0F0"/>
+          </a:solidFill>
+          <a:ln>
+            <a:noFill/>
+          </a:ln>
+        </p:spPr>
+        <p:txBody>
+          <a:bodyPr spcFirstLastPara="1" wrap="square" lIns="91425" tIns="45700" rIns="91425" bIns="45700" anchor="ctr" anchorCtr="0">
+            <a:noAutofit/>
+          </a:bodyPr>
+          <a:lstStyle/>
+          <a:p>
+            <a:pPr marL="0" marR="0" lvl="0" indent="0" algn="ctr" rtl="0">
+              <a:spcBef>
+                <a:spcPts val="0"/>
+              </a:spcBef>
+              <a:spcAft>
+                <a:spcPts val="0"/>
+              </a:spcAft>
+              <a:buNone/>
+            </a:pPr>
+            <a:endParaRPr sz="1800" b="0" i="0" u="none" strike="noStrike" cap="none">
+              <a:solidFill>
+                <a:schemeClr val="dk1"/>
+              </a:solidFill>
+              <a:latin typeface="Calibri"/>
+              <a:ea typeface="Calibri"/>
+              <a:cs typeface="Calibri"/>
+              <a:sym typeface="Calibri"/>
+            </a:endParaRPr>
+          </a:p>
+        </p:txBody>
+      </p:sp>
+      <p:sp>
+        <p:nvSpPr>
+          <p:cNvPr id="364" name="Google Shape;364;p29"/>
+          <p:cNvSpPr/>
+          <p:nvPr/>
+        </p:nvSpPr>
+        <p:spPr>
+          <a:xfrm>
+            <a:off x="571500" y="3482875"/>
+            <a:ext cx="4953000" cy="9525"/>
+          </a:xfrm>
+          <a:prstGeom prst="rect">
+            <a:avLst/>
+          </a:prstGeom>
+          <a:solidFill>
+            <a:srgbClr val="F0F0F0"/>
+          </a:solidFill>
+          <a:ln>
+            <a:noFill/>
+          </a:ln>
+        </p:spPr>
+        <p:txBody>
+          <a:bodyPr spcFirstLastPara="1" wrap="square" lIns="91425" tIns="45700" rIns="91425" bIns="45700" anchor="ctr" anchorCtr="0">
+            <a:noAutofit/>
+          </a:bodyPr>
+          <a:lstStyle/>
+          <a:p>
+            <a:pPr marL="0" marR="0" lvl="0" indent="0" algn="ctr" rtl="0">
+              <a:spcBef>
+                <a:spcPts val="0"/>
+              </a:spcBef>
+              <a:spcAft>
+                <a:spcPts val="0"/>
+              </a:spcAft>
+              <a:buNone/>
+            </a:pPr>
+            <a:endParaRPr sz="1800" b="0" i="0" u="none" strike="noStrike" cap="none">
+              <a:solidFill>
+                <a:schemeClr val="dk1"/>
+              </a:solidFill>
+              <a:latin typeface="Calibri"/>
+              <a:ea typeface="Calibri"/>
+              <a:cs typeface="Calibri"/>
+              <a:sym typeface="Calibri"/>
+            </a:endParaRPr>
+          </a:p>
+        </p:txBody>
+      </p:sp>
+      <p:sp>
+        <p:nvSpPr>
+          <p:cNvPr id="365" name="Google Shape;365;p29"/>
+          <p:cNvSpPr/>
+          <p:nvPr/>
+        </p:nvSpPr>
+        <p:spPr>
+          <a:xfrm>
+            <a:off x="571500" y="4063900"/>
+            <a:ext cx="4953000" cy="9525"/>
+          </a:xfrm>
+          <a:prstGeom prst="rect">
+            <a:avLst/>
+          </a:prstGeom>
+          <a:solidFill>
+            <a:srgbClr val="F0F0F0"/>
+          </a:solidFill>
+          <a:ln>
+            <a:noFill/>
+          </a:ln>
+        </p:spPr>
+        <p:txBody>
+          <a:bodyPr spcFirstLastPara="1" wrap="square" lIns="91425" tIns="45700" rIns="91425" bIns="45700" anchor="ctr" anchorCtr="0">
+            <a:noAutofit/>
+          </a:bodyPr>
+          <a:lstStyle/>
+          <a:p>
+            <a:pPr marL="0" marR="0" lvl="0" indent="0" algn="ctr" rtl="0">
+              <a:spcBef>
+                <a:spcPts val="0"/>
+              </a:spcBef>
+              <a:spcAft>
+                <a:spcPts val="0"/>
+              </a:spcAft>
+              <a:buNone/>
+            </a:pPr>
+            <a:endParaRPr sz="1800" b="0" i="0" u="none" strike="noStrike" cap="none">
+              <a:solidFill>
+                <a:schemeClr val="dk1"/>
+              </a:solidFill>
+              <a:latin typeface="Calibri"/>
+              <a:ea typeface="Calibri"/>
+              <a:cs typeface="Calibri"/>
+              <a:sym typeface="Calibri"/>
+            </a:endParaRPr>
+          </a:p>
+        </p:txBody>
+      </p:sp>
+      <p:sp>
+        <p:nvSpPr>
+          <p:cNvPr id="366" name="Google Shape;366;p29"/>
+          <p:cNvSpPr/>
+          <p:nvPr/>
+        </p:nvSpPr>
+        <p:spPr>
+          <a:xfrm>
+            <a:off x="571500" y="4644925"/>
+            <a:ext cx="4953000" cy="9525"/>
+          </a:xfrm>
+          <a:prstGeom prst="rect">
+            <a:avLst/>
+          </a:prstGeom>
+          <a:solidFill>
+            <a:srgbClr val="F0F0F0"/>
+          </a:solidFill>
+          <a:ln>
+            <a:noFill/>
+          </a:ln>
+        </p:spPr>
+        <p:txBody>
+          <a:bodyPr spcFirstLastPara="1" wrap="square" lIns="91425" tIns="45700" rIns="91425" bIns="45700" anchor="ctr" anchorCtr="0">
+            <a:noAutofit/>
+          </a:bodyPr>
+          <a:lstStyle/>
+          <a:p>
+            <a:pPr marL="0" marR="0" lvl="0" indent="0" algn="ctr" rtl="0">
+              <a:spcBef>
+                <a:spcPts val="0"/>
+              </a:spcBef>
+              <a:spcAft>
+                <a:spcPts val="0"/>
+              </a:spcAft>
+              <a:buNone/>
+            </a:pPr>
+            <a:endParaRPr sz="1800" b="0" i="0" u="none" strike="noStrike" cap="none">
+              <a:solidFill>
+                <a:schemeClr val="dk1"/>
+              </a:solidFill>
+              <a:latin typeface="Calibri"/>
+              <a:ea typeface="Calibri"/>
+              <a:cs typeface="Calibri"/>
+              <a:sym typeface="Calibri"/>
+            </a:endParaRPr>
+          </a:p>
+        </p:txBody>
+      </p:sp>
+      <p:pic>
+        <p:nvPicPr>
+          <p:cNvPr id="367" name="Google Shape;367;p29" descr="image.png"/>
+          <p:cNvPicPr preferRelativeResize="0"/>
+          <p:nvPr/>
+        </p:nvPicPr>
+        <p:blipFill rotWithShape="1">
+          <a:blip r:embed="rId3">
+            <a:alphaModFix/>
+          </a:blip>
+          <a:srcRect/>
+          <a:stretch/>
+        </p:blipFill>
+        <p:spPr>
+          <a:xfrm>
+            <a:off x="571500" y="3092350"/>
+            <a:ext cx="266700" cy="219075"/>
+          </a:xfrm>
+          <a:prstGeom prst="rect">
+            <a:avLst/>
+          </a:prstGeom>
+          <a:noFill/>
+          <a:ln>
+            <a:noFill/>
+          </a:ln>
+        </p:spPr>
+      </p:pic>
+      <p:pic>
+        <p:nvPicPr>
+          <p:cNvPr id="368" name="Google Shape;368;p29" descr="image.png"/>
+          <p:cNvPicPr preferRelativeResize="0"/>
+          <p:nvPr/>
+        </p:nvPicPr>
+        <p:blipFill rotWithShape="1">
+          <a:blip r:embed="rId4">
+            <a:alphaModFix/>
+          </a:blip>
+          <a:srcRect/>
+          <a:stretch/>
+        </p:blipFill>
+        <p:spPr>
+          <a:xfrm>
+            <a:off x="571500" y="3668613"/>
+            <a:ext cx="209550" cy="219075"/>
+          </a:xfrm>
+          <a:prstGeom prst="rect">
+            <a:avLst/>
+          </a:prstGeom>
+          <a:noFill/>
+          <a:ln>
+            <a:noFill/>
+          </a:ln>
+        </p:spPr>
+      </p:pic>
+      <p:pic>
+        <p:nvPicPr>
+          <p:cNvPr id="369" name="Google Shape;369;p29" descr="image.png"/>
+          <p:cNvPicPr preferRelativeResize="0"/>
+          <p:nvPr/>
+        </p:nvPicPr>
+        <p:blipFill rotWithShape="1">
+          <a:blip r:embed="rId5">
+            <a:alphaModFix/>
+          </a:blip>
+          <a:srcRect/>
+          <a:stretch/>
+        </p:blipFill>
+        <p:spPr>
+          <a:xfrm>
+            <a:off x="571500" y="4249638"/>
+            <a:ext cx="180975" cy="219075"/>
+          </a:xfrm>
+          <a:prstGeom prst="rect">
+            <a:avLst/>
+          </a:prstGeom>
+          <a:noFill/>
+          <a:ln>
+            <a:noFill/>
+          </a:ln>
+        </p:spPr>
+      </p:pic>
+      <p:sp>
+        <p:nvSpPr>
+          <p:cNvPr id="370" name="Google Shape;370;p29"/>
+          <p:cNvSpPr txBox="1"/>
+          <p:nvPr/>
+        </p:nvSpPr>
+        <p:spPr>
+          <a:xfrm>
+            <a:off x="809625" y="1884610"/>
+            <a:ext cx="4950618" cy="502890"/>
+          </a:xfrm>
+          <a:prstGeom prst="rect">
+            <a:avLst/>
+          </a:prstGeom>
+          <a:noFill/>
+          <a:ln>
+            <a:noFill/>
+          </a:ln>
+        </p:spPr>
+        <p:txBody>
+          <a:bodyPr spcFirstLastPara="1" wrap="square" lIns="0" tIns="0" rIns="0" bIns="0" anchor="t" anchorCtr="0">
+            <a:spAutoFit/>
+          </a:bodyPr>
+          <a:lstStyle/>
+          <a:p>
+            <a:pPr marL="0" marR="0" lvl="0" indent="0" algn="l" rtl="0">
+              <a:lnSpc>
+                <a:spcPct val="119969"/>
+              </a:lnSpc>
+              <a:spcBef>
+                <a:spcPts val="0"/>
+              </a:spcBef>
+              <a:spcAft>
+                <a:spcPts val="0"/>
+              </a:spcAft>
+              <a:buNone/>
+            </a:pPr>
+            <a:r>
+              <a:rPr lang="en-US" sz="3300" b="1" i="0" u="none" strike="noStrike" cap="none">
+                <a:solidFill>
+                  <a:srgbClr val="002147"/>
+                </a:solidFill>
+                <a:latin typeface="Merriweather"/>
+                <a:ea typeface="Merriweather"/>
+                <a:cs typeface="Merriweather"/>
+                <a:sym typeface="Merriweather"/>
+              </a:rPr>
+              <a:t>LLM-ETF 平台實作</a:t>
+            </a:r>
+            <a:endParaRPr/>
+          </a:p>
+        </p:txBody>
+      </p:sp>
+      <p:sp>
+        <p:nvSpPr>
+          <p:cNvPr id="371" name="Google Shape;371;p29"/>
+          <p:cNvSpPr/>
+          <p:nvPr/>
+        </p:nvSpPr>
+        <p:spPr>
+          <a:xfrm>
+            <a:off x="571500" y="1884610"/>
+            <a:ext cx="76200" cy="502890"/>
+          </a:xfrm>
+          <a:prstGeom prst="rect">
+            <a:avLst/>
+          </a:prstGeom>
+          <a:solidFill>
+            <a:srgbClr val="D4AF37"/>
+          </a:solidFill>
+          <a:ln>
+            <a:noFill/>
+          </a:ln>
+        </p:spPr>
+        <p:txBody>
+          <a:bodyPr spcFirstLastPara="1" wrap="square" lIns="91425" tIns="45700" rIns="91425" bIns="45700" anchor="ctr" anchorCtr="0">
+            <a:noAutofit/>
+          </a:bodyPr>
+          <a:lstStyle/>
+          <a:p>
+            <a:pPr marL="0" marR="0" lvl="0" indent="0" algn="ctr" rtl="0">
+              <a:spcBef>
+                <a:spcPts val="0"/>
+              </a:spcBef>
+              <a:spcAft>
+                <a:spcPts val="0"/>
+              </a:spcAft>
+              <a:buNone/>
+            </a:pPr>
+            <a:endParaRPr sz="1800" b="0" i="0" u="none" strike="noStrike" cap="none">
+              <a:solidFill>
+                <a:schemeClr val="dk1"/>
+              </a:solidFill>
+              <a:latin typeface="Calibri"/>
+              <a:ea typeface="Calibri"/>
+              <a:cs typeface="Calibri"/>
+              <a:sym typeface="Calibri"/>
+            </a:endParaRPr>
+          </a:p>
+        </p:txBody>
+      </p:sp>
+      <p:pic>
+        <p:nvPicPr>
+          <p:cNvPr id="3" name="圖片 2">
+            <a:extLst>
+              <a:ext uri="{FF2B5EF4-FFF2-40B4-BE49-F238E27FC236}">
+                <a16:creationId xmlns:a16="http://schemas.microsoft.com/office/drawing/2014/main" id="{092D2DF1-8899-CD1A-2145-6E63CFC27CAD}"/>
+              </a:ext>
+            </a:extLst>
+          </p:cNvPr>
+          <p:cNvPicPr>
+            <a:picLocks noChangeAspect="1"/>
+          </p:cNvPicPr>
+          <p:nvPr/>
+        </p:nvPicPr>
+        <p:blipFill>
+          <a:blip r:embed="rId6"/>
+          <a:stretch>
+            <a:fillRect/>
+          </a:stretch>
+        </p:blipFill>
+        <p:spPr>
+          <a:xfrm>
+            <a:off x="5686425" y="510072"/>
+            <a:ext cx="6407288" cy="5964655"/>
+          </a:xfrm>
+          <a:prstGeom prst="rect">
+            <a:avLst/>
+          </a:prstGeom>
+        </p:spPr>
+      </p:pic>
+    </p:spTree>
+  </p:cSld>
+  <p:clrMapOvr>
+    <a:masterClrMapping/>
+  </p:clrMapOvr>
+</p:sld>
+</file>
+
+<file path=ppt/slides/slide21.xml><?xml version="1.0" encoding="utf-8"?>
+<p:sld xmlns:a="http://schemas.openxmlformats.org/drawingml/2006/main" xmlns:r="http://schemas.openxmlformats.org/officeDocument/2006/relationships" xmlns:p="http://schemas.openxmlformats.org/presentationml/2006/main">
+  <p:cSld>
+    <p:bg>
+      <p:bgPr>
+        <a:solidFill>
+          <a:srgbClr val="FFFFFF"/>
+        </a:solidFill>
+        <a:effectLst/>
+      </p:bgPr>
+    </p:bg>
+    <p:spTree>
+      <p:nvGrpSpPr>
+        <p:cNvPr id="1" name="Shape 375"/>
+        <p:cNvGrpSpPr/>
+        <p:nvPr/>
+      </p:nvGrpSpPr>
+      <p:grpSpPr>
+        <a:xfrm>
+          <a:off x="0" y="0"/>
+          <a:ext cx="0" cy="0"/>
+          <a:chOff x="0" y="0"/>
+          <a:chExt cx="0" cy="0"/>
+        </a:xfrm>
+      </p:grpSpPr>
+      <p:pic>
+        <p:nvPicPr>
+          <p:cNvPr id="377" name="Google Shape;377;p30" descr="image.png"/>
+          <p:cNvPicPr preferRelativeResize="0"/>
+          <p:nvPr/>
+        </p:nvPicPr>
+        <p:blipFill rotWithShape="1">
+          <a:blip r:embed="rId3">
+            <a:alphaModFix/>
+          </a:blip>
+          <a:srcRect/>
+          <a:stretch/>
+        </p:blipFill>
+        <p:spPr>
+          <a:xfrm>
+            <a:off x="571500" y="2807369"/>
+            <a:ext cx="5334000" cy="2550694"/>
+          </a:xfrm>
+          <a:prstGeom prst="rect">
+            <a:avLst/>
+          </a:prstGeom>
+          <a:noFill/>
+          <a:ln>
+            <a:noFill/>
+          </a:ln>
+        </p:spPr>
+      </p:pic>
+      <p:pic>
+        <p:nvPicPr>
+          <p:cNvPr id="378" name="Google Shape;378;p30" descr="image.png"/>
+          <p:cNvPicPr preferRelativeResize="0"/>
+          <p:nvPr/>
+        </p:nvPicPr>
+        <p:blipFill rotWithShape="1">
+          <a:blip r:embed="rId4">
+            <a:alphaModFix/>
+          </a:blip>
+          <a:srcRect/>
+          <a:stretch/>
+        </p:blipFill>
+        <p:spPr>
+          <a:xfrm>
+            <a:off x="6286500" y="2807369"/>
+            <a:ext cx="5334000" cy="2550694"/>
+          </a:xfrm>
+          <a:prstGeom prst="rect">
+            <a:avLst/>
+          </a:prstGeom>
+          <a:noFill/>
+          <a:ln>
+            <a:noFill/>
+          </a:ln>
+        </p:spPr>
+      </p:pic>
+      <p:sp>
+        <p:nvSpPr>
+          <p:cNvPr id="379" name="Google Shape;379;p30"/>
+          <p:cNvSpPr txBox="1"/>
+          <p:nvPr/>
+        </p:nvSpPr>
+        <p:spPr>
+          <a:xfrm>
+            <a:off x="866775" y="3354288"/>
+            <a:ext cx="4980622" cy="369332"/>
+          </a:xfrm>
+          <a:prstGeom prst="rect">
+            <a:avLst/>
+          </a:prstGeom>
+          <a:noFill/>
+          <a:ln>
+            <a:noFill/>
+          </a:ln>
+        </p:spPr>
+        <p:txBody>
+          <a:bodyPr spcFirstLastPara="1" wrap="square" lIns="0" tIns="0" rIns="0" bIns="0" anchor="t" anchorCtr="0">
+            <a:spAutoFit/>
+          </a:bodyPr>
+          <a:lstStyle/>
+          <a:p>
+            <a:pPr marL="0" marR="0" lvl="0" indent="0" algn="l" rtl="0">
+              <a:spcBef>
+                <a:spcPts val="0"/>
+              </a:spcBef>
+              <a:spcAft>
+                <a:spcPts val="0"/>
+              </a:spcAft>
+              <a:buNone/>
+            </a:pPr>
+            <a:r>
+              <a:rPr lang="en-US" sz="2400" b="1" i="0" u="none" strike="noStrike" cap="none" dirty="0" err="1">
+                <a:solidFill>
+                  <a:srgbClr val="002147"/>
+                </a:solidFill>
+                <a:latin typeface="DM Sans"/>
+                <a:ea typeface="DM Sans"/>
+                <a:cs typeface="DM Sans"/>
+                <a:sym typeface="DM Sans"/>
+              </a:rPr>
+              <a:t>分類任務</a:t>
+            </a:r>
+            <a:r>
+              <a:rPr lang="en-US" sz="2400" b="1" i="0" u="none" strike="noStrike" cap="none" dirty="0">
+                <a:solidFill>
+                  <a:srgbClr val="002147"/>
+                </a:solidFill>
+                <a:latin typeface="DM Sans"/>
+                <a:ea typeface="DM Sans"/>
+                <a:cs typeface="DM Sans"/>
+                <a:sym typeface="DM Sans"/>
+              </a:rPr>
+              <a:t> (</a:t>
+            </a:r>
+            <a:r>
+              <a:rPr lang="en-US" sz="2400" b="1" i="0" u="none" strike="noStrike" cap="none" dirty="0" err="1">
+                <a:solidFill>
+                  <a:srgbClr val="002147"/>
+                </a:solidFill>
+                <a:latin typeface="DM Sans"/>
+                <a:ea typeface="DM Sans"/>
+                <a:cs typeface="DM Sans"/>
+                <a:sym typeface="DM Sans"/>
+              </a:rPr>
+              <a:t>漲跌</a:t>
+            </a:r>
+            <a:r>
+              <a:rPr lang="en-US" sz="2400" b="1" i="0" u="none" strike="noStrike" cap="none" dirty="0">
+                <a:solidFill>
+                  <a:srgbClr val="002147"/>
+                </a:solidFill>
+                <a:latin typeface="DM Sans"/>
+                <a:ea typeface="DM Sans"/>
+                <a:cs typeface="DM Sans"/>
+                <a:sym typeface="DM Sans"/>
+              </a:rPr>
+              <a:t>)</a:t>
+            </a:r>
+            <a:endParaRPr sz="2400" dirty="0"/>
+          </a:p>
+        </p:txBody>
+      </p:sp>
+      <p:sp>
+        <p:nvSpPr>
+          <p:cNvPr id="380" name="Google Shape;380;p30"/>
+          <p:cNvSpPr txBox="1"/>
+          <p:nvPr/>
+        </p:nvSpPr>
+        <p:spPr>
+          <a:xfrm>
+            <a:off x="866775" y="3935313"/>
+            <a:ext cx="4743450" cy="886397"/>
+          </a:xfrm>
+          <a:prstGeom prst="rect">
+            <a:avLst/>
+          </a:prstGeom>
+          <a:noFill/>
+          <a:ln>
+            <a:noFill/>
+          </a:ln>
+        </p:spPr>
+        <p:txBody>
+          <a:bodyPr spcFirstLastPara="1" wrap="square" lIns="0" tIns="0" rIns="0" bIns="0" anchor="t" anchorCtr="0">
+            <a:spAutoFit/>
+          </a:bodyPr>
+          <a:lstStyle/>
+          <a:p>
+            <a:pPr marL="0" marR="0" lvl="0" indent="0" algn="l" rtl="0">
+              <a:lnSpc>
+                <a:spcPct val="160000"/>
+              </a:lnSpc>
+              <a:spcBef>
+                <a:spcPts val="0"/>
+              </a:spcBef>
+              <a:spcAft>
+                <a:spcPts val="0"/>
+              </a:spcAft>
+              <a:buNone/>
+            </a:pPr>
+            <a:r>
+              <a:rPr lang="en-US" sz="1800" b="0" i="0" u="none" strike="noStrike" cap="none" dirty="0" err="1">
+                <a:solidFill>
+                  <a:srgbClr val="1E293B"/>
+                </a:solidFill>
+                <a:latin typeface="DM Sans"/>
+                <a:ea typeface="DM Sans"/>
+                <a:cs typeface="DM Sans"/>
+                <a:sym typeface="DM Sans"/>
+              </a:rPr>
+              <a:t>雖然直覺，但缺乏幅度資訊。實務上難以判斷波動大小，投資價值受限</a:t>
+            </a:r>
+            <a:r>
+              <a:rPr lang="en-US" sz="1800" b="0" i="0" u="none" strike="noStrike" cap="none" dirty="0">
+                <a:solidFill>
+                  <a:srgbClr val="1E293B"/>
+                </a:solidFill>
+                <a:latin typeface="DM Sans"/>
+                <a:ea typeface="DM Sans"/>
+                <a:cs typeface="DM Sans"/>
+                <a:sym typeface="DM Sans"/>
+              </a:rPr>
+              <a:t>。</a:t>
+            </a:r>
+            <a:endParaRPr sz="1800" dirty="0"/>
+          </a:p>
+        </p:txBody>
+      </p:sp>
+      <p:sp>
+        <p:nvSpPr>
+          <p:cNvPr id="381" name="Google Shape;381;p30"/>
+          <p:cNvSpPr txBox="1"/>
+          <p:nvPr/>
+        </p:nvSpPr>
+        <p:spPr>
+          <a:xfrm>
+            <a:off x="6581775" y="3354288"/>
+            <a:ext cx="4980622" cy="369332"/>
+          </a:xfrm>
+          <a:prstGeom prst="rect">
+            <a:avLst/>
+          </a:prstGeom>
+          <a:noFill/>
+          <a:ln>
+            <a:noFill/>
+          </a:ln>
+        </p:spPr>
+        <p:txBody>
+          <a:bodyPr spcFirstLastPara="1" wrap="square" lIns="0" tIns="0" rIns="0" bIns="0" anchor="t" anchorCtr="0">
+            <a:spAutoFit/>
+          </a:bodyPr>
+          <a:lstStyle/>
+          <a:p>
+            <a:pPr marL="0" marR="0" lvl="0" indent="0" algn="l" rtl="0">
+              <a:spcBef>
+                <a:spcPts val="0"/>
+              </a:spcBef>
+              <a:spcAft>
+                <a:spcPts val="0"/>
+              </a:spcAft>
+              <a:buNone/>
+            </a:pPr>
+            <a:r>
+              <a:rPr lang="en-US" sz="2400" b="1" i="0" u="none" strike="noStrike" cap="none">
+                <a:solidFill>
+                  <a:srgbClr val="002147"/>
+                </a:solidFill>
+                <a:latin typeface="DM Sans"/>
+                <a:ea typeface="DM Sans"/>
+                <a:cs typeface="DM Sans"/>
+                <a:sym typeface="DM Sans"/>
+              </a:rPr>
+              <a:t>迴歸任務 (數值)</a:t>
+            </a:r>
+            <a:endParaRPr sz="2400"/>
+          </a:p>
+        </p:txBody>
+      </p:sp>
+      <p:sp>
+        <p:nvSpPr>
+          <p:cNvPr id="382" name="Google Shape;382;p30"/>
+          <p:cNvSpPr txBox="1"/>
+          <p:nvPr/>
+        </p:nvSpPr>
+        <p:spPr>
+          <a:xfrm>
+            <a:off x="6581775" y="3935313"/>
+            <a:ext cx="4743450" cy="886397"/>
+          </a:xfrm>
+          <a:prstGeom prst="rect">
+            <a:avLst/>
+          </a:prstGeom>
+          <a:noFill/>
+          <a:ln>
+            <a:noFill/>
+          </a:ln>
+        </p:spPr>
+        <p:txBody>
+          <a:bodyPr spcFirstLastPara="1" wrap="square" lIns="0" tIns="0" rIns="0" bIns="0" anchor="t" anchorCtr="0">
+            <a:spAutoFit/>
+          </a:bodyPr>
+          <a:lstStyle/>
+          <a:p>
+            <a:pPr marL="0" marR="0" lvl="0" indent="0" algn="l" rtl="0">
+              <a:lnSpc>
+                <a:spcPct val="160000"/>
+              </a:lnSpc>
+              <a:spcBef>
+                <a:spcPts val="0"/>
+              </a:spcBef>
+              <a:spcAft>
+                <a:spcPts val="0"/>
+              </a:spcAft>
+              <a:buNone/>
+            </a:pPr>
+            <a:r>
+              <a:rPr lang="en-US" sz="1800" b="0" i="0" u="none" strike="noStrike" cap="none">
+                <a:solidFill>
+                  <a:srgbClr val="1E293B"/>
+                </a:solidFill>
+                <a:latin typeface="DM Sans"/>
+                <a:ea typeface="DM Sans"/>
+                <a:cs typeface="DM Sans"/>
+                <a:sym typeface="DM Sans"/>
+              </a:rPr>
+              <a:t>能精確計算損益與風險比率，更符合專業投資機構之決策需求。</a:t>
+            </a:r>
+            <a:endParaRPr sz="1800"/>
+          </a:p>
+        </p:txBody>
+      </p:sp>
+      <p:sp>
+        <p:nvSpPr>
+          <p:cNvPr id="383" name="Google Shape;383;p30"/>
+          <p:cNvSpPr txBox="1"/>
+          <p:nvPr/>
+        </p:nvSpPr>
+        <p:spPr>
+          <a:xfrm>
+            <a:off x="809625" y="919311"/>
+            <a:ext cx="11351418" cy="502890"/>
+          </a:xfrm>
+          <a:prstGeom prst="rect">
+            <a:avLst/>
+          </a:prstGeom>
+          <a:noFill/>
+          <a:ln>
+            <a:noFill/>
+          </a:ln>
+        </p:spPr>
+        <p:txBody>
+          <a:bodyPr spcFirstLastPara="1" wrap="square" lIns="0" tIns="0" rIns="0" bIns="0" anchor="t" anchorCtr="0">
+            <a:spAutoFit/>
+          </a:bodyPr>
+          <a:lstStyle/>
+          <a:p>
+            <a:pPr marL="0" marR="0" lvl="0" indent="0" algn="l" rtl="0">
+              <a:lnSpc>
+                <a:spcPct val="119969"/>
+              </a:lnSpc>
+              <a:spcBef>
+                <a:spcPts val="0"/>
+              </a:spcBef>
+              <a:spcAft>
+                <a:spcPts val="0"/>
+              </a:spcAft>
+              <a:buNone/>
+            </a:pPr>
+            <a:r>
+              <a:rPr lang="en-US" sz="3300" b="1" i="0" u="none" strike="noStrike" cap="none">
+                <a:solidFill>
+                  <a:srgbClr val="002147"/>
+                </a:solidFill>
+                <a:latin typeface="Merriweather"/>
+                <a:ea typeface="Merriweather"/>
+                <a:cs typeface="Merriweather"/>
+                <a:sym typeface="Merriweather"/>
+              </a:rPr>
+              <a:t>討論：分類與迴歸之抉擇</a:t>
+            </a:r>
+            <a:endParaRPr/>
+          </a:p>
+        </p:txBody>
+      </p:sp>
+      <p:sp>
+        <p:nvSpPr>
+          <p:cNvPr id="384" name="Google Shape;384;p30"/>
+          <p:cNvSpPr/>
+          <p:nvPr/>
+        </p:nvSpPr>
+        <p:spPr>
+          <a:xfrm>
+            <a:off x="571500" y="919311"/>
+            <a:ext cx="76200" cy="502890"/>
+          </a:xfrm>
+          <a:prstGeom prst="rect">
+            <a:avLst/>
+          </a:prstGeom>
+          <a:solidFill>
+            <a:srgbClr val="D4AF37"/>
+          </a:solidFill>
+          <a:ln>
+            <a:noFill/>
+          </a:ln>
+        </p:spPr>
+        <p:txBody>
+          <a:bodyPr spcFirstLastPara="1" wrap="square" lIns="91425" tIns="45700" rIns="91425" bIns="45700" anchor="ctr" anchorCtr="0">
+            <a:noAutofit/>
+          </a:bodyPr>
+          <a:lstStyle/>
+          <a:p>
+            <a:pPr marL="0" marR="0" lvl="0" indent="0" algn="ctr" rtl="0">
+              <a:spcBef>
+                <a:spcPts val="0"/>
+              </a:spcBef>
+              <a:spcAft>
+                <a:spcPts val="0"/>
+              </a:spcAft>
+              <a:buNone/>
+            </a:pPr>
+            <a:endParaRPr sz="1800" b="0" i="0" u="none" strike="noStrike" cap="none">
+              <a:solidFill>
+                <a:schemeClr val="dk1"/>
+              </a:solidFill>
+              <a:latin typeface="Calibri"/>
+              <a:ea typeface="Calibri"/>
+              <a:cs typeface="Calibri"/>
+              <a:sym typeface="Calibri"/>
+            </a:endParaRPr>
+          </a:p>
+        </p:txBody>
+      </p:sp>
+    </p:spTree>
+  </p:cSld>
+  <p:clrMapOvr>
+    <a:masterClrMapping/>
+  </p:clrMapOvr>
+</p:sld>
+</file>
+
+<file path=ppt/slides/slide22.xml><?xml version="1.0" encoding="utf-8"?>
+<p:sld xmlns:a="http://schemas.openxmlformats.org/drawingml/2006/main" xmlns:r="http://schemas.openxmlformats.org/officeDocument/2006/relationships" xmlns:p="http://schemas.openxmlformats.org/presentationml/2006/main">
+  <p:cSld>
+    <p:bg>
+      <p:bgPr>
+        <a:solidFill>
+          <a:srgbClr val="FFFFFF"/>
+        </a:solidFill>
+        <a:effectLst/>
+      </p:bgPr>
+    </p:bg>
+    <p:spTree>
+      <p:nvGrpSpPr>
+        <p:cNvPr id="1" name="Shape 388"/>
+        <p:cNvGrpSpPr/>
+        <p:nvPr/>
+      </p:nvGrpSpPr>
+      <p:grpSpPr>
+        <a:xfrm>
+          <a:off x="0" y="0"/>
+          <a:ext cx="0" cy="0"/>
+          <a:chOff x="0" y="0"/>
+          <a:chExt cx="0" cy="0"/>
+        </a:xfrm>
+      </p:grpSpPr>
+      <p:pic>
+        <p:nvPicPr>
+          <p:cNvPr id="390" name="Google Shape;390;p31" descr="image.png"/>
+          <p:cNvPicPr preferRelativeResize="0"/>
+          <p:nvPr/>
+        </p:nvPicPr>
+        <p:blipFill rotWithShape="1">
+          <a:blip r:embed="rId3">
+            <a:alphaModFix/>
+          </a:blip>
+          <a:srcRect/>
+          <a:stretch/>
+        </p:blipFill>
+        <p:spPr>
+          <a:xfrm>
+            <a:off x="571500" y="2743200"/>
+            <a:ext cx="3524250" cy="2662989"/>
+          </a:xfrm>
+          <a:prstGeom prst="rect">
+            <a:avLst/>
+          </a:prstGeom>
+          <a:noFill/>
+          <a:ln>
+            <a:noFill/>
+          </a:ln>
+        </p:spPr>
+      </p:pic>
+      <p:pic>
+        <p:nvPicPr>
+          <p:cNvPr id="391" name="Google Shape;391;p31" descr="image.png"/>
+          <p:cNvPicPr preferRelativeResize="0"/>
+          <p:nvPr/>
+        </p:nvPicPr>
+        <p:blipFill rotWithShape="1">
+          <a:blip r:embed="rId3">
+            <a:alphaModFix/>
+          </a:blip>
+          <a:srcRect/>
+          <a:stretch/>
+        </p:blipFill>
+        <p:spPr>
+          <a:xfrm>
+            <a:off x="4333875" y="2743200"/>
+            <a:ext cx="3524250" cy="2662989"/>
+          </a:xfrm>
+          <a:prstGeom prst="rect">
+            <a:avLst/>
+          </a:prstGeom>
+          <a:noFill/>
+          <a:ln>
+            <a:noFill/>
+          </a:ln>
+        </p:spPr>
+      </p:pic>
+      <p:pic>
+        <p:nvPicPr>
+          <p:cNvPr id="392" name="Google Shape;392;p31" descr="image.png"/>
+          <p:cNvPicPr preferRelativeResize="0"/>
+          <p:nvPr/>
+        </p:nvPicPr>
+        <p:blipFill rotWithShape="1">
+          <a:blip r:embed="rId4">
+            <a:alphaModFix/>
+          </a:blip>
+          <a:srcRect/>
+          <a:stretch/>
+        </p:blipFill>
+        <p:spPr>
+          <a:xfrm>
+            <a:off x="8096250" y="2743200"/>
+            <a:ext cx="3524250" cy="2662989"/>
+          </a:xfrm>
+          <a:prstGeom prst="rect">
+            <a:avLst/>
+          </a:prstGeom>
+          <a:noFill/>
+          <a:ln>
+            <a:noFill/>
+          </a:ln>
+        </p:spPr>
+      </p:pic>
+      <p:pic>
+        <p:nvPicPr>
+          <p:cNvPr id="393" name="Google Shape;393;p31" descr="image.png"/>
+          <p:cNvPicPr preferRelativeResize="0"/>
+          <p:nvPr/>
+        </p:nvPicPr>
+        <p:blipFill rotWithShape="1">
+          <a:blip r:embed="rId5">
+            <a:alphaModFix/>
+          </a:blip>
+          <a:srcRect/>
+          <a:stretch/>
+        </p:blipFill>
+        <p:spPr>
+          <a:xfrm>
+            <a:off x="2095500" y="3194090"/>
+            <a:ext cx="428625" cy="381000"/>
+          </a:xfrm>
+          <a:prstGeom prst="rect">
+            <a:avLst/>
+          </a:prstGeom>
+          <a:noFill/>
+          <a:ln>
+            <a:noFill/>
+          </a:ln>
+        </p:spPr>
+      </p:pic>
+      <p:sp>
+        <p:nvSpPr>
+          <p:cNvPr id="394" name="Google Shape;394;p31"/>
+          <p:cNvSpPr txBox="1"/>
+          <p:nvPr/>
+        </p:nvSpPr>
+        <p:spPr>
+          <a:xfrm>
+            <a:off x="809625" y="3884850"/>
+            <a:ext cx="3100387" cy="369332"/>
+          </a:xfrm>
+          <a:prstGeom prst="rect">
+            <a:avLst/>
+          </a:prstGeom>
+          <a:noFill/>
+          <a:ln>
+            <a:noFill/>
+          </a:ln>
+        </p:spPr>
+        <p:txBody>
+          <a:bodyPr spcFirstLastPara="1" wrap="square" lIns="0" tIns="0" rIns="0" bIns="0" anchor="t" anchorCtr="0">
+            <a:spAutoFit/>
+          </a:bodyPr>
+          <a:lstStyle/>
+          <a:p>
+            <a:pPr marL="0" marR="0" lvl="0" indent="0" algn="ctr" rtl="0">
+              <a:spcBef>
+                <a:spcPts val="0"/>
+              </a:spcBef>
+              <a:spcAft>
+                <a:spcPts val="0"/>
+              </a:spcAft>
+              <a:buNone/>
+            </a:pPr>
+            <a:r>
+              <a:rPr lang="en-US" sz="2400" b="1" i="0" u="none" strike="noStrike" cap="none" dirty="0" err="1">
+                <a:solidFill>
+                  <a:srgbClr val="FFFFFF"/>
+                </a:solidFill>
+                <a:latin typeface="DM Sans"/>
+                <a:ea typeface="DM Sans"/>
+                <a:cs typeface="DM Sans"/>
+                <a:sym typeface="DM Sans"/>
+              </a:rPr>
+              <a:t>無單一冠軍</a:t>
+            </a:r>
+            <a:endParaRPr sz="2400" dirty="0"/>
+          </a:p>
+        </p:txBody>
+      </p:sp>
+      <p:sp>
+        <p:nvSpPr>
+          <p:cNvPr id="395" name="Google Shape;395;p31"/>
+          <p:cNvSpPr txBox="1"/>
+          <p:nvPr/>
+        </p:nvSpPr>
+        <p:spPr>
+          <a:xfrm>
+            <a:off x="957262" y="4426089"/>
+            <a:ext cx="2952750" cy="553998"/>
+          </a:xfrm>
+          <a:prstGeom prst="rect">
+            <a:avLst/>
+          </a:prstGeom>
+          <a:noFill/>
+          <a:ln>
+            <a:noFill/>
+          </a:ln>
+        </p:spPr>
+        <p:txBody>
+          <a:bodyPr spcFirstLastPara="1" wrap="square" lIns="0" tIns="0" rIns="0" bIns="0" anchor="t" anchorCtr="0">
+            <a:spAutoFit/>
+          </a:bodyPr>
+          <a:lstStyle/>
+          <a:p>
+            <a:pPr marL="0" marR="0" lvl="0" indent="0" algn="ctr" rtl="0">
+              <a:spcBef>
+                <a:spcPts val="0"/>
+              </a:spcBef>
+              <a:spcAft>
+                <a:spcPts val="0"/>
+              </a:spcAft>
+              <a:buNone/>
+            </a:pPr>
+            <a:r>
+              <a:rPr lang="en-US" sz="1800" b="0" i="0" u="none" strike="noStrike" cap="none" dirty="0" err="1">
+                <a:solidFill>
+                  <a:srgbClr val="FFFFFF"/>
+                </a:solidFill>
+                <a:latin typeface="DM Sans"/>
+                <a:ea typeface="DM Sans"/>
+                <a:cs typeface="DM Sans"/>
+                <a:sym typeface="DM Sans"/>
+              </a:rPr>
+              <a:t>不同市場與不同時段，最佳模型各異</a:t>
+            </a:r>
+            <a:r>
+              <a:rPr lang="en-US" sz="1800" b="0" i="0" u="none" strike="noStrike" cap="none" dirty="0">
+                <a:solidFill>
+                  <a:srgbClr val="FFFFFF"/>
+                </a:solidFill>
+                <a:latin typeface="DM Sans"/>
+                <a:ea typeface="DM Sans"/>
+                <a:cs typeface="DM Sans"/>
+                <a:sym typeface="DM Sans"/>
+              </a:rPr>
+              <a:t>。</a:t>
+            </a:r>
+            <a:endParaRPr sz="1800" dirty="0"/>
+          </a:p>
+        </p:txBody>
+      </p:sp>
+      <p:pic>
+        <p:nvPicPr>
+          <p:cNvPr id="396" name="Google Shape;396;p31" descr="image.png"/>
+          <p:cNvPicPr preferRelativeResize="0"/>
+          <p:nvPr/>
+        </p:nvPicPr>
+        <p:blipFill rotWithShape="1">
+          <a:blip r:embed="rId6">
+            <a:alphaModFix/>
+          </a:blip>
+          <a:srcRect/>
+          <a:stretch/>
+        </p:blipFill>
+        <p:spPr>
+          <a:xfrm>
+            <a:off x="5857875" y="3194090"/>
+            <a:ext cx="476250" cy="381000"/>
+          </a:xfrm>
+          <a:prstGeom prst="rect">
+            <a:avLst/>
+          </a:prstGeom>
+          <a:noFill/>
+          <a:ln>
+            <a:noFill/>
+          </a:ln>
+        </p:spPr>
+      </p:pic>
+      <p:sp>
+        <p:nvSpPr>
+          <p:cNvPr id="397" name="Google Shape;397;p31"/>
+          <p:cNvSpPr txBox="1"/>
+          <p:nvPr/>
+        </p:nvSpPr>
+        <p:spPr>
+          <a:xfrm>
+            <a:off x="4572000" y="3761739"/>
+            <a:ext cx="3100387" cy="615553"/>
+          </a:xfrm>
+          <a:prstGeom prst="rect">
+            <a:avLst/>
+          </a:prstGeom>
+          <a:noFill/>
+          <a:ln>
+            <a:noFill/>
+          </a:ln>
+        </p:spPr>
+        <p:txBody>
+          <a:bodyPr spcFirstLastPara="1" wrap="square" lIns="0" tIns="0" rIns="0" bIns="0" anchor="t" anchorCtr="0">
+            <a:spAutoFit/>
+          </a:bodyPr>
+          <a:lstStyle/>
+          <a:p>
+            <a:pPr marL="0" marR="0" lvl="0" indent="0" algn="ctr" rtl="0">
+              <a:spcBef>
+                <a:spcPts val="0"/>
+              </a:spcBef>
+              <a:spcAft>
+                <a:spcPts val="0"/>
+              </a:spcAft>
+              <a:buNone/>
+            </a:pPr>
+            <a:r>
+              <a:rPr lang="zh-TW" altLang="en-US" sz="2000" b="1" i="0" u="none" strike="noStrike" cap="none" dirty="0">
+                <a:solidFill>
+                  <a:srgbClr val="FFFFFF"/>
+                </a:solidFill>
+                <a:latin typeface="DM Sans"/>
+                <a:ea typeface="DM Sans"/>
+                <a:cs typeface="DM Sans"/>
+                <a:sym typeface="DM Sans"/>
+              </a:rPr>
+              <a:t>價格 </a:t>
+            </a:r>
+            <a:r>
+              <a:rPr lang="en-US" sz="2000" b="1" i="0" u="none" strike="noStrike" cap="none" dirty="0">
+                <a:solidFill>
+                  <a:srgbClr val="FFFFFF"/>
+                </a:solidFill>
+                <a:latin typeface="DM Sans"/>
+                <a:ea typeface="DM Sans"/>
+                <a:cs typeface="DM Sans"/>
+                <a:sym typeface="DM Sans"/>
+              </a:rPr>
+              <a:t>R² </a:t>
+            </a:r>
+            <a:r>
+              <a:rPr lang="zh-TW" altLang="en-US" sz="2000" b="1" i="0" u="none" strike="noStrike" cap="none" dirty="0">
+                <a:solidFill>
+                  <a:srgbClr val="FFFFFF"/>
+                </a:solidFill>
+                <a:latin typeface="DM Sans"/>
+                <a:ea typeface="DM Sans"/>
+                <a:cs typeface="DM Sans"/>
+                <a:sym typeface="DM Sans"/>
+              </a:rPr>
+              <a:t>高但輸基準、報酬率 </a:t>
+            </a:r>
+            <a:r>
+              <a:rPr lang="en-US" sz="2000" b="1" i="0" u="none" strike="noStrike" cap="none" dirty="0">
+                <a:solidFill>
+                  <a:srgbClr val="FFFFFF"/>
+                </a:solidFill>
+                <a:latin typeface="DM Sans"/>
+                <a:ea typeface="DM Sans"/>
+                <a:cs typeface="DM Sans"/>
+                <a:sym typeface="DM Sans"/>
+              </a:rPr>
+              <a:t>R² </a:t>
+            </a:r>
+            <a:r>
+              <a:rPr lang="zh-TW" altLang="en-US" sz="2000" b="1" i="0" u="none" strike="noStrike" cap="none" dirty="0">
+                <a:solidFill>
+                  <a:srgbClr val="FFFFFF"/>
+                </a:solidFill>
+                <a:latin typeface="DM Sans"/>
+                <a:ea typeface="DM Sans"/>
+                <a:cs typeface="DM Sans"/>
+                <a:sym typeface="DM Sans"/>
+              </a:rPr>
+              <a:t>近 </a:t>
+            </a:r>
+            <a:r>
+              <a:rPr lang="en-US" altLang="zh-TW" sz="2000" b="1" i="0" u="none" strike="noStrike" cap="none" dirty="0">
+                <a:solidFill>
+                  <a:srgbClr val="FFFFFF"/>
+                </a:solidFill>
+                <a:latin typeface="DM Sans"/>
+                <a:ea typeface="DM Sans"/>
+                <a:cs typeface="DM Sans"/>
+                <a:sym typeface="DM Sans"/>
+              </a:rPr>
+              <a:t>0 </a:t>
+            </a:r>
+            <a:endParaRPr sz="2000" dirty="0"/>
+          </a:p>
+        </p:txBody>
+      </p:sp>
+      <p:sp>
+        <p:nvSpPr>
+          <p:cNvPr id="398" name="Google Shape;398;p31"/>
+          <p:cNvSpPr txBox="1"/>
+          <p:nvPr/>
+        </p:nvSpPr>
+        <p:spPr>
+          <a:xfrm>
+            <a:off x="4719637" y="4426089"/>
+            <a:ext cx="2952750" cy="553998"/>
+          </a:xfrm>
+          <a:prstGeom prst="rect">
+            <a:avLst/>
+          </a:prstGeom>
+          <a:noFill/>
+          <a:ln>
+            <a:noFill/>
+          </a:ln>
+        </p:spPr>
+        <p:txBody>
+          <a:bodyPr spcFirstLastPara="1" wrap="square" lIns="0" tIns="0" rIns="0" bIns="0" anchor="t" anchorCtr="0">
+            <a:spAutoFit/>
+          </a:bodyPr>
+          <a:lstStyle/>
+          <a:p>
+            <a:pPr marL="0" marR="0" lvl="0" indent="0" algn="ctr" rtl="0">
+              <a:spcBef>
+                <a:spcPts val="0"/>
+              </a:spcBef>
+              <a:spcAft>
+                <a:spcPts val="0"/>
+              </a:spcAft>
+              <a:buNone/>
+            </a:pPr>
+            <a:r>
+              <a:rPr lang="zh-TW" altLang="en-US" sz="1800" b="0" i="0" u="none" strike="noStrike" cap="none" dirty="0">
+                <a:solidFill>
+                  <a:srgbClr val="FFFFFF"/>
+                </a:solidFill>
+                <a:latin typeface="DM Sans"/>
+                <a:ea typeface="DM Sans"/>
+                <a:cs typeface="DM Sans"/>
+                <a:sym typeface="DM Sans"/>
+              </a:rPr>
+              <a:t>次日走勢難預測，故分類與 </a:t>
+            </a:r>
+            <a:r>
+              <a:rPr lang="en-US" altLang="zh-TW" sz="1800" b="0" i="0" u="none" strike="noStrike" cap="none" dirty="0">
+                <a:solidFill>
+                  <a:srgbClr val="FFFFFF"/>
+                </a:solidFill>
+                <a:latin typeface="DM Sans"/>
+                <a:ea typeface="DM Sans"/>
+                <a:cs typeface="DM Sans"/>
+                <a:sym typeface="DM Sans"/>
+              </a:rPr>
+              <a:t>LLM </a:t>
+            </a:r>
+            <a:r>
+              <a:rPr lang="zh-TW" altLang="en-US" sz="1800" b="0" i="0" u="none" strike="noStrike" cap="none" dirty="0">
+                <a:solidFill>
+                  <a:srgbClr val="FFFFFF"/>
+                </a:solidFill>
+                <a:latin typeface="DM Sans"/>
+                <a:ea typeface="DM Sans"/>
+                <a:cs typeface="DM Sans"/>
+                <a:sym typeface="DM Sans"/>
+              </a:rPr>
+              <a:t>為輔助</a:t>
+            </a:r>
+            <a:endParaRPr sz="1800" dirty="0"/>
+          </a:p>
+        </p:txBody>
+      </p:sp>
+      <p:pic>
+        <p:nvPicPr>
+          <p:cNvPr id="399" name="Google Shape;399;p31" descr="image.png"/>
+          <p:cNvPicPr preferRelativeResize="0"/>
+          <p:nvPr/>
+        </p:nvPicPr>
+        <p:blipFill rotWithShape="1">
+          <a:blip r:embed="rId7">
+            <a:alphaModFix/>
+          </a:blip>
+          <a:srcRect/>
+          <a:stretch/>
+        </p:blipFill>
+        <p:spPr>
+          <a:xfrm>
+            <a:off x="9620250" y="3194090"/>
+            <a:ext cx="476250" cy="381000"/>
+          </a:xfrm>
+          <a:prstGeom prst="rect">
+            <a:avLst/>
+          </a:prstGeom>
+          <a:noFill/>
+          <a:ln>
+            <a:noFill/>
+          </a:ln>
+        </p:spPr>
+      </p:pic>
+      <p:sp>
+        <p:nvSpPr>
+          <p:cNvPr id="400" name="Google Shape;400;p31"/>
+          <p:cNvSpPr txBox="1"/>
+          <p:nvPr/>
+        </p:nvSpPr>
+        <p:spPr>
+          <a:xfrm>
+            <a:off x="8334375" y="3884850"/>
+            <a:ext cx="3100387" cy="369332"/>
+          </a:xfrm>
+          <a:prstGeom prst="rect">
+            <a:avLst/>
+          </a:prstGeom>
+          <a:noFill/>
+          <a:ln>
+            <a:noFill/>
+          </a:ln>
+        </p:spPr>
+        <p:txBody>
+          <a:bodyPr spcFirstLastPara="1" wrap="square" lIns="0" tIns="0" rIns="0" bIns="0" anchor="t" anchorCtr="0">
+            <a:spAutoFit/>
+          </a:bodyPr>
+          <a:lstStyle/>
+          <a:p>
+            <a:pPr marL="0" marR="0" lvl="0" indent="0" algn="ctr" rtl="0">
+              <a:spcBef>
+                <a:spcPts val="0"/>
+              </a:spcBef>
+              <a:spcAft>
+                <a:spcPts val="0"/>
+              </a:spcAft>
+              <a:buNone/>
+            </a:pPr>
+            <a:r>
+              <a:rPr lang="en-US" sz="2400" b="1" i="0" u="none" strike="noStrike" cap="none">
+                <a:solidFill>
+                  <a:srgbClr val="FFFFFF"/>
+                </a:solidFill>
+                <a:latin typeface="DM Sans"/>
+                <a:ea typeface="DM Sans"/>
+                <a:cs typeface="DM Sans"/>
+                <a:sym typeface="DM Sans"/>
+              </a:rPr>
+              <a:t>LLM 定位</a:t>
+            </a:r>
+            <a:endParaRPr sz="2400"/>
+          </a:p>
+        </p:txBody>
+      </p:sp>
+      <p:sp>
+        <p:nvSpPr>
+          <p:cNvPr id="401" name="Google Shape;401;p31"/>
+          <p:cNvSpPr txBox="1"/>
+          <p:nvPr/>
+        </p:nvSpPr>
+        <p:spPr>
+          <a:xfrm>
+            <a:off x="8482012" y="4426089"/>
+            <a:ext cx="2952750" cy="553998"/>
+          </a:xfrm>
+          <a:prstGeom prst="rect">
+            <a:avLst/>
+          </a:prstGeom>
+          <a:noFill/>
+          <a:ln>
+            <a:noFill/>
+          </a:ln>
+        </p:spPr>
+        <p:txBody>
+          <a:bodyPr spcFirstLastPara="1" wrap="square" lIns="0" tIns="0" rIns="0" bIns="0" anchor="t" anchorCtr="0">
+            <a:spAutoFit/>
+          </a:bodyPr>
+          <a:lstStyle/>
+          <a:p>
+            <a:pPr marL="0" marR="0" lvl="0" indent="0" algn="ctr" rtl="0">
+              <a:spcBef>
+                <a:spcPts val="0"/>
+              </a:spcBef>
+              <a:spcAft>
+                <a:spcPts val="0"/>
+              </a:spcAft>
+              <a:buNone/>
+            </a:pPr>
+            <a:r>
+              <a:rPr lang="en-US" sz="1800" b="0" i="0" u="none" strike="noStrike" cap="none">
+                <a:solidFill>
+                  <a:srgbClr val="FFFFFF"/>
+                </a:solidFill>
+                <a:latin typeface="DM Sans"/>
+                <a:ea typeface="DM Sans"/>
+                <a:cs typeface="DM Sans"/>
+                <a:sym typeface="DM Sans"/>
+              </a:rPr>
+              <a:t>適合作為「解釋型」輔助，而非純算力引擎。</a:t>
+            </a:r>
+            <a:endParaRPr sz="1800"/>
+          </a:p>
+        </p:txBody>
+      </p:sp>
+      <p:sp>
+        <p:nvSpPr>
+          <p:cNvPr id="402" name="Google Shape;402;p31"/>
+          <p:cNvSpPr txBox="1"/>
+          <p:nvPr/>
+        </p:nvSpPr>
+        <p:spPr>
+          <a:xfrm>
+            <a:off x="809625" y="919311"/>
+            <a:ext cx="11351418" cy="502890"/>
+          </a:xfrm>
+          <a:prstGeom prst="rect">
+            <a:avLst/>
+          </a:prstGeom>
+          <a:noFill/>
+          <a:ln>
+            <a:noFill/>
+          </a:ln>
+        </p:spPr>
+        <p:txBody>
+          <a:bodyPr spcFirstLastPara="1" wrap="square" lIns="0" tIns="0" rIns="0" bIns="0" anchor="t" anchorCtr="0">
+            <a:spAutoFit/>
+          </a:bodyPr>
+          <a:lstStyle/>
+          <a:p>
+            <a:pPr marL="0" marR="0" lvl="0" indent="0" algn="l" rtl="0">
+              <a:lnSpc>
+                <a:spcPct val="119969"/>
+              </a:lnSpc>
+              <a:spcBef>
+                <a:spcPts val="0"/>
+              </a:spcBef>
+              <a:spcAft>
+                <a:spcPts val="0"/>
+              </a:spcAft>
+              <a:buNone/>
+            </a:pPr>
+            <a:r>
+              <a:rPr lang="en-US" sz="3300" b="1" i="0" u="none" strike="noStrike" cap="none">
+                <a:solidFill>
+                  <a:srgbClr val="002147"/>
+                </a:solidFill>
+                <a:latin typeface="Merriweather"/>
+                <a:ea typeface="Merriweather"/>
+                <a:cs typeface="Merriweather"/>
+                <a:sym typeface="Merriweather"/>
+              </a:rPr>
+              <a:t>討論：模型比較關鍵發現</a:t>
+            </a:r>
+            <a:endParaRPr/>
+          </a:p>
+        </p:txBody>
+      </p:sp>
+      <p:sp>
+        <p:nvSpPr>
+          <p:cNvPr id="403" name="Google Shape;403;p31"/>
+          <p:cNvSpPr/>
+          <p:nvPr/>
+        </p:nvSpPr>
+        <p:spPr>
+          <a:xfrm>
+            <a:off x="571500" y="919311"/>
+            <a:ext cx="76200" cy="502890"/>
+          </a:xfrm>
+          <a:prstGeom prst="rect">
+            <a:avLst/>
+          </a:prstGeom>
+          <a:solidFill>
+            <a:srgbClr val="D4AF37"/>
+          </a:solidFill>
+          <a:ln>
+            <a:noFill/>
+          </a:ln>
+        </p:spPr>
+        <p:txBody>
+          <a:bodyPr spcFirstLastPara="1" wrap="square" lIns="91425" tIns="45700" rIns="91425" bIns="45700" anchor="ctr" anchorCtr="0">
+            <a:noAutofit/>
+          </a:bodyPr>
+          <a:lstStyle/>
+          <a:p>
+            <a:pPr marL="0" marR="0" lvl="0" indent="0" algn="ctr" rtl="0">
+              <a:spcBef>
+                <a:spcPts val="0"/>
+              </a:spcBef>
+              <a:spcAft>
+                <a:spcPts val="0"/>
+              </a:spcAft>
+              <a:buNone/>
+            </a:pPr>
+            <a:endParaRPr sz="1800" b="0" i="0" u="none" strike="noStrike" cap="none">
+              <a:solidFill>
+                <a:schemeClr val="dk1"/>
+              </a:solidFill>
+              <a:latin typeface="Calibri"/>
+              <a:ea typeface="Calibri"/>
+              <a:cs typeface="Calibri"/>
+              <a:sym typeface="Calibri"/>
+            </a:endParaRPr>
+          </a:p>
+        </p:txBody>
+      </p:sp>
+    </p:spTree>
+  </p:cSld>
+  <p:clrMapOvr>
+    <a:masterClrMapping/>
+  </p:clrMapOvr>
+</p:sld>
+</file>
+
+<file path=ppt/slides/slide23.xml><?xml version="1.0" encoding="utf-8"?>
+<p:sld xmlns:a="http://schemas.openxmlformats.org/drawingml/2006/main" xmlns:r="http://schemas.openxmlformats.org/officeDocument/2006/relationships" xmlns:p="http://schemas.openxmlformats.org/presentationml/2006/main">
+  <p:cSld>
+    <p:bg>
+      <p:bgPr>
+        <a:solidFill>
+          <a:srgbClr val="FFFFFF"/>
+        </a:solidFill>
+        <a:effectLst/>
+      </p:bgPr>
+    </p:bg>
+    <p:spTree>
+      <p:nvGrpSpPr>
         <p:cNvPr id="1" name="Shape 407"/>
         <p:cNvGrpSpPr/>
         <p:nvPr/>
@@ -21710,7 +22636,7 @@
 </p:sld>
 </file>
 
-<file path=ppt/slides/slide21.xml><?xml version="1.0" encoding="utf-8"?>
+<file path=ppt/slides/slide24.xml><?xml version="1.0" encoding="utf-8"?>
 <p:sld xmlns:a="http://schemas.openxmlformats.org/drawingml/2006/main" xmlns:r="http://schemas.openxmlformats.org/officeDocument/2006/relationships" xmlns:p="http://schemas.openxmlformats.org/presentationml/2006/main" show="0">
   <p:cSld>
     <p:bg>
@@ -23026,7 +23952,7 @@
         <p:spPr>
           <a:xfrm>
             <a:off x="809625" y="919311"/>
-            <a:ext cx="11351418" cy="502890"/>
+            <a:ext cx="11351418" cy="609398"/>
           </a:xfrm>
           <a:prstGeom prst="rect">
             <a:avLst/>
@@ -23133,7 +24059,7 @@
         <p:spPr>
           <a:xfrm>
             <a:off x="809625" y="4793514"/>
-            <a:ext cx="3194501" cy="714042"/>
+            <a:ext cx="3194501" cy="738664"/>
           </a:xfrm>
           <a:prstGeom prst="rect">
             <a:avLst/>
@@ -23174,17 +24100,32 @@
               </a:rPr>
               <a:t>深度學習模型「黑箱」問題</a:t>
             </a:r>
-          </a:p>
-          <a:p>
-            <a:pPr marL="285750" indent="-285750">
+            <a:endParaRPr lang="en-US" altLang="zh-TW" sz="1500" b="0" i="0" u="none" strike="noStrike" cap="none" dirty="0">
+              <a:solidFill>
+                <a:srgbClr val="1E293B"/>
+              </a:solidFill>
+              <a:latin typeface="DM Sans"/>
+              <a:ea typeface="DM Sans"/>
+              <a:cs typeface="DM Sans"/>
+              <a:sym typeface="DM Sans"/>
+            </a:endParaRPr>
+          </a:p>
+          <a:p>
+            <a:pPr marL="285750" marR="0" lvl="0" indent="-285750" algn="l" rtl="0">
               <a:lnSpc>
                 <a:spcPct val="160000"/>
               </a:lnSpc>
+              <a:spcBef>
+                <a:spcPts val="0"/>
+              </a:spcBef>
+              <a:spcAft>
+                <a:spcPts val="0"/>
+              </a:spcAft>
               <a:buFont typeface="Arial" panose="020B0604020202020204" pitchFamily="34" charset="0"/>
               <a:buChar char="•"/>
             </a:pPr>
             <a:r>
-              <a:rPr lang="en-US" altLang="zh-TW" dirty="0">
+              <a:rPr lang="en-US" altLang="zh-TW" sz="1500" dirty="0">
                 <a:solidFill>
                   <a:srgbClr val="1E293B"/>
                 </a:solidFill>
@@ -23193,10 +24134,10 @@
                 <a:cs typeface="DM Sans"/>
                 <a:sym typeface="DM Sans"/>
               </a:rPr>
-              <a:t>LLM </a:t>
-            </a:r>
-            <a:r>
-              <a:rPr lang="zh-TW" altLang="en-US" dirty="0">
+              <a:t>LLM</a:t>
+            </a:r>
+            <a:r>
+              <a:rPr lang="zh-TW" altLang="en-US" sz="1500" dirty="0">
                 <a:solidFill>
                   <a:srgbClr val="1E293B"/>
                 </a:solidFill>
@@ -23205,8 +24146,17 @@
                 <a:cs typeface="DM Sans"/>
                 <a:sym typeface="DM Sans"/>
               </a:rPr>
-              <a:t>具可解釋性</a:t>
-            </a:r>
+              <a:t>具有預測力</a:t>
+            </a:r>
+            <a:endParaRPr lang="zh-TW" altLang="en-US" sz="1500" b="0" i="0" u="none" strike="noStrike" cap="none" dirty="0">
+              <a:solidFill>
+                <a:srgbClr val="1E293B"/>
+              </a:solidFill>
+              <a:latin typeface="DM Sans"/>
+              <a:ea typeface="DM Sans"/>
+              <a:cs typeface="DM Sans"/>
+              <a:sym typeface="DM Sans"/>
+            </a:endParaRPr>
           </a:p>
         </p:txBody>
       </p:sp>
@@ -23378,9 +24328,576 @@
           <a:chExt cx="0" cy="0"/>
         </a:xfrm>
       </p:grpSpPr>
+      <p:sp>
+        <p:nvSpPr>
+          <p:cNvPr id="144" name="Google Shape;144;p16"/>
+          <p:cNvSpPr txBox="1"/>
+          <p:nvPr/>
+        </p:nvSpPr>
+        <p:spPr>
+          <a:xfrm>
+            <a:off x="4914900" y="2923221"/>
+            <a:ext cx="7086600" cy="492443"/>
+          </a:xfrm>
+          <a:prstGeom prst="rect">
+            <a:avLst/>
+          </a:prstGeom>
+          <a:noFill/>
+          <a:ln>
+            <a:noFill/>
+          </a:ln>
+        </p:spPr>
+        <p:txBody>
+          <a:bodyPr spcFirstLastPara="1" wrap="square" lIns="0" tIns="0" rIns="0" bIns="0" anchor="ctr" anchorCtr="0">
+            <a:spAutoFit/>
+          </a:bodyPr>
+          <a:lstStyle/>
+          <a:p>
+            <a:pPr marL="0" marR="0" lvl="0" indent="0" algn="l" rtl="0">
+              <a:lnSpc>
+                <a:spcPct val="160000"/>
+              </a:lnSpc>
+              <a:spcBef>
+                <a:spcPts val="0"/>
+              </a:spcBef>
+              <a:spcAft>
+                <a:spcPts val="0"/>
+              </a:spcAft>
+              <a:buNone/>
+            </a:pPr>
+            <a:r>
+              <a:rPr lang="zh-TW" altLang="en-US" sz="2000" dirty="0">
+                <a:solidFill>
+                  <a:srgbClr val="1E293B"/>
+                </a:solidFill>
+                <a:latin typeface="DM Sans"/>
+                <a:ea typeface="DM Sans"/>
+                <a:cs typeface="DM Sans"/>
+                <a:sym typeface="DM Sans"/>
+              </a:rPr>
+              <a:t>架構</a:t>
+            </a:r>
+            <a:r>
+              <a:rPr lang="en-US" sz="2000" b="0" i="0" u="none" strike="noStrike" cap="none" dirty="0" err="1">
+                <a:solidFill>
+                  <a:srgbClr val="1E293B"/>
+                </a:solidFill>
+                <a:latin typeface="DM Sans"/>
+                <a:ea typeface="DM Sans"/>
+                <a:cs typeface="DM Sans"/>
+                <a:sym typeface="DM Sans"/>
+              </a:rPr>
+              <a:t>比較：探討統計、ML、DL</a:t>
+            </a:r>
+            <a:r>
+              <a:rPr lang="en-US" sz="2000" b="0" i="0" u="none" strike="noStrike" cap="none" dirty="0">
+                <a:solidFill>
+                  <a:srgbClr val="1E293B"/>
+                </a:solidFill>
+                <a:latin typeface="DM Sans"/>
+                <a:ea typeface="DM Sans"/>
+                <a:cs typeface="DM Sans"/>
+                <a:sym typeface="DM Sans"/>
+              </a:rPr>
+              <a:t> 與 LLM 在 ETF </a:t>
+            </a:r>
+            <a:r>
+              <a:rPr lang="en-US" sz="2000" b="0" i="0" u="none" strike="noStrike" cap="none" dirty="0" err="1">
+                <a:solidFill>
+                  <a:srgbClr val="1E293B"/>
+                </a:solidFill>
+                <a:latin typeface="DM Sans"/>
+                <a:ea typeface="DM Sans"/>
+                <a:cs typeface="DM Sans"/>
+                <a:sym typeface="DM Sans"/>
+              </a:rPr>
+              <a:t>預測之優劣</a:t>
+            </a:r>
+            <a:endParaRPr sz="2000" dirty="0"/>
+          </a:p>
+        </p:txBody>
+      </p:sp>
+      <p:sp>
+        <p:nvSpPr>
+          <p:cNvPr id="145" name="Google Shape;145;p16"/>
+          <p:cNvSpPr/>
+          <p:nvPr/>
+        </p:nvSpPr>
+        <p:spPr>
+          <a:xfrm>
+            <a:off x="4438650" y="3475136"/>
+            <a:ext cx="6896100" cy="9525"/>
+          </a:xfrm>
+          <a:prstGeom prst="rect">
+            <a:avLst/>
+          </a:prstGeom>
+          <a:solidFill>
+            <a:srgbClr val="F0F0F0"/>
+          </a:solidFill>
+          <a:ln>
+            <a:noFill/>
+          </a:ln>
+        </p:spPr>
+        <p:txBody>
+          <a:bodyPr spcFirstLastPara="1" wrap="square" lIns="91425" tIns="45700" rIns="91425" bIns="45700" anchor="ctr" anchorCtr="0">
+            <a:noAutofit/>
+          </a:bodyPr>
+          <a:lstStyle/>
+          <a:p>
+            <a:pPr marL="0" marR="0" lvl="0" indent="0" algn="ctr" rtl="0">
+              <a:spcBef>
+                <a:spcPts val="0"/>
+              </a:spcBef>
+              <a:spcAft>
+                <a:spcPts val="0"/>
+              </a:spcAft>
+              <a:buNone/>
+            </a:pPr>
+            <a:endParaRPr sz="1800" b="0" i="0" u="none" strike="noStrike" cap="none">
+              <a:solidFill>
+                <a:schemeClr val="dk1"/>
+              </a:solidFill>
+              <a:latin typeface="Calibri"/>
+              <a:ea typeface="Calibri"/>
+              <a:cs typeface="Calibri"/>
+              <a:sym typeface="Calibri"/>
+            </a:endParaRPr>
+          </a:p>
+        </p:txBody>
+      </p:sp>
+      <p:sp>
+        <p:nvSpPr>
+          <p:cNvPr id="146" name="Google Shape;146;p16"/>
+          <p:cNvSpPr txBox="1"/>
+          <p:nvPr/>
+        </p:nvSpPr>
+        <p:spPr>
+          <a:xfrm>
+            <a:off x="4914900" y="3553657"/>
+            <a:ext cx="7086600" cy="492443"/>
+          </a:xfrm>
+          <a:prstGeom prst="rect">
+            <a:avLst/>
+          </a:prstGeom>
+          <a:noFill/>
+          <a:ln>
+            <a:noFill/>
+          </a:ln>
+        </p:spPr>
+        <p:txBody>
+          <a:bodyPr spcFirstLastPara="1" wrap="square" lIns="0" tIns="0" rIns="0" bIns="0" anchor="ctr" anchorCtr="0">
+            <a:spAutoFit/>
+          </a:bodyPr>
+          <a:lstStyle/>
+          <a:p>
+            <a:pPr marL="0" marR="0" lvl="0" indent="0" algn="l" rtl="0">
+              <a:lnSpc>
+                <a:spcPct val="160000"/>
+              </a:lnSpc>
+              <a:spcBef>
+                <a:spcPts val="0"/>
+              </a:spcBef>
+              <a:spcAft>
+                <a:spcPts val="0"/>
+              </a:spcAft>
+              <a:buNone/>
+            </a:pPr>
+            <a:r>
+              <a:rPr lang="en-US" sz="2000" b="0" i="0" u="none" strike="noStrike" cap="none" dirty="0" err="1">
+                <a:solidFill>
+                  <a:srgbClr val="1E293B"/>
+                </a:solidFill>
+                <a:latin typeface="DM Sans"/>
+                <a:ea typeface="DM Sans"/>
+                <a:cs typeface="DM Sans"/>
+                <a:sym typeface="DM Sans"/>
+              </a:rPr>
+              <a:t>市場差異：分析台股</a:t>
+            </a:r>
+            <a:r>
+              <a:rPr lang="en-US" sz="2000" b="0" i="0" u="none" strike="noStrike" cap="none" dirty="0">
+                <a:solidFill>
+                  <a:srgbClr val="1E293B"/>
+                </a:solidFill>
+                <a:latin typeface="DM Sans"/>
+                <a:ea typeface="DM Sans"/>
+                <a:cs typeface="DM Sans"/>
+                <a:sym typeface="DM Sans"/>
+              </a:rPr>
+              <a:t>(0050)</a:t>
+            </a:r>
+            <a:r>
+              <a:rPr lang="en-US" sz="2000" b="0" i="0" u="none" strike="noStrike" cap="none" dirty="0" err="1">
+                <a:solidFill>
+                  <a:srgbClr val="1E293B"/>
+                </a:solidFill>
+                <a:latin typeface="DM Sans"/>
+                <a:ea typeface="DM Sans"/>
+                <a:cs typeface="DM Sans"/>
+                <a:sym typeface="DM Sans"/>
+              </a:rPr>
+              <a:t>與美股</a:t>
+            </a:r>
+            <a:r>
+              <a:rPr lang="en-US" sz="2000" b="0" i="0" u="none" strike="noStrike" cap="none" dirty="0">
+                <a:solidFill>
+                  <a:srgbClr val="1E293B"/>
+                </a:solidFill>
+                <a:latin typeface="DM Sans"/>
+                <a:ea typeface="DM Sans"/>
+                <a:cs typeface="DM Sans"/>
+                <a:sym typeface="DM Sans"/>
+              </a:rPr>
+              <a:t>(SPY/QQQ)</a:t>
+            </a:r>
+            <a:r>
+              <a:rPr lang="en-US" sz="2000" b="0" i="0" u="none" strike="noStrike" cap="none" dirty="0" err="1">
+                <a:solidFill>
+                  <a:srgbClr val="1E293B"/>
+                </a:solidFill>
+                <a:latin typeface="DM Sans"/>
+                <a:ea typeface="DM Sans"/>
+                <a:cs typeface="DM Sans"/>
+                <a:sym typeface="DM Sans"/>
+              </a:rPr>
+              <a:t>之預測難度差異</a:t>
+            </a:r>
+            <a:endParaRPr sz="2000" dirty="0"/>
+          </a:p>
+        </p:txBody>
+      </p:sp>
+      <p:sp>
+        <p:nvSpPr>
+          <p:cNvPr id="147" name="Google Shape;147;p16"/>
+          <p:cNvSpPr/>
+          <p:nvPr/>
+        </p:nvSpPr>
+        <p:spPr>
+          <a:xfrm>
+            <a:off x="4438650" y="4105572"/>
+            <a:ext cx="6896100" cy="9525"/>
+          </a:xfrm>
+          <a:prstGeom prst="rect">
+            <a:avLst/>
+          </a:prstGeom>
+          <a:solidFill>
+            <a:srgbClr val="F0F0F0"/>
+          </a:solidFill>
+          <a:ln>
+            <a:noFill/>
+          </a:ln>
+        </p:spPr>
+        <p:txBody>
+          <a:bodyPr spcFirstLastPara="1" wrap="square" lIns="91425" tIns="45700" rIns="91425" bIns="45700" anchor="ctr" anchorCtr="0">
+            <a:noAutofit/>
+          </a:bodyPr>
+          <a:lstStyle/>
+          <a:p>
+            <a:pPr marL="0" marR="0" lvl="0" indent="0" algn="ctr" rtl="0">
+              <a:spcBef>
+                <a:spcPts val="0"/>
+              </a:spcBef>
+              <a:spcAft>
+                <a:spcPts val="0"/>
+              </a:spcAft>
+              <a:buNone/>
+            </a:pPr>
+            <a:endParaRPr sz="1800" b="0" i="0" u="none" strike="noStrike" cap="none">
+              <a:solidFill>
+                <a:schemeClr val="dk1"/>
+              </a:solidFill>
+              <a:latin typeface="Calibri"/>
+              <a:ea typeface="Calibri"/>
+              <a:cs typeface="Calibri"/>
+              <a:sym typeface="Calibri"/>
+            </a:endParaRPr>
+          </a:p>
+        </p:txBody>
+      </p:sp>
+      <p:sp>
+        <p:nvSpPr>
+          <p:cNvPr id="148" name="Google Shape;148;p16"/>
+          <p:cNvSpPr txBox="1"/>
+          <p:nvPr/>
+        </p:nvSpPr>
+        <p:spPr>
+          <a:xfrm>
+            <a:off x="4914900" y="4184093"/>
+            <a:ext cx="7086600" cy="492443"/>
+          </a:xfrm>
+          <a:prstGeom prst="rect">
+            <a:avLst/>
+          </a:prstGeom>
+          <a:noFill/>
+          <a:ln>
+            <a:noFill/>
+          </a:ln>
+        </p:spPr>
+        <p:txBody>
+          <a:bodyPr spcFirstLastPara="1" wrap="square" lIns="0" tIns="0" rIns="0" bIns="0" anchor="ctr" anchorCtr="0">
+            <a:spAutoFit/>
+          </a:bodyPr>
+          <a:lstStyle/>
+          <a:p>
+            <a:pPr marL="0" marR="0" lvl="0" indent="0" algn="l" rtl="0">
+              <a:lnSpc>
+                <a:spcPct val="160000"/>
+              </a:lnSpc>
+              <a:spcBef>
+                <a:spcPts val="0"/>
+              </a:spcBef>
+              <a:spcAft>
+                <a:spcPts val="0"/>
+              </a:spcAft>
+              <a:buNone/>
+            </a:pPr>
+            <a:r>
+              <a:rPr lang="en-US" sz="2000" b="0" i="0" u="none" strike="noStrike" cap="none" dirty="0" err="1">
+                <a:solidFill>
+                  <a:srgbClr val="1E293B"/>
+                </a:solidFill>
+                <a:latin typeface="DM Sans"/>
+                <a:ea typeface="DM Sans"/>
+                <a:cs typeface="DM Sans"/>
+                <a:sym typeface="DM Sans"/>
+              </a:rPr>
+              <a:t>實作應用：建構</a:t>
+            </a:r>
+            <a:r>
+              <a:rPr lang="en-US" sz="2000" b="0" i="0" u="none" strike="noStrike" cap="none" dirty="0">
+                <a:solidFill>
+                  <a:srgbClr val="1E293B"/>
+                </a:solidFill>
+                <a:latin typeface="DM Sans"/>
+                <a:ea typeface="DM Sans"/>
+                <a:cs typeface="DM Sans"/>
+                <a:sym typeface="DM Sans"/>
+              </a:rPr>
+              <a:t> LLM </a:t>
+            </a:r>
+            <a:r>
+              <a:rPr lang="en-US" sz="2000" b="0" i="0" u="none" strike="noStrike" cap="none" dirty="0" err="1">
+                <a:solidFill>
+                  <a:srgbClr val="1E293B"/>
+                </a:solidFill>
+                <a:latin typeface="DM Sans"/>
+                <a:ea typeface="DM Sans"/>
+                <a:cs typeface="DM Sans"/>
+                <a:sym typeface="DM Sans"/>
+              </a:rPr>
+              <a:t>視覺化平台，提升預測</a:t>
+            </a:r>
+            <a:r>
+              <a:rPr lang="zh-TW" altLang="en-US" sz="2000" b="0" i="0" u="none" strike="noStrike" cap="none" dirty="0">
+                <a:solidFill>
+                  <a:srgbClr val="1E293B"/>
+                </a:solidFill>
+                <a:latin typeface="DM Sans"/>
+                <a:ea typeface="DM Sans"/>
+                <a:cs typeface="DM Sans"/>
+                <a:sym typeface="DM Sans"/>
+              </a:rPr>
+              <a:t>理解度</a:t>
+            </a:r>
+            <a:endParaRPr sz="2000" dirty="0"/>
+          </a:p>
+        </p:txBody>
+      </p:sp>
+      <p:sp>
+        <p:nvSpPr>
+          <p:cNvPr id="149" name="Google Shape;149;p16"/>
+          <p:cNvSpPr/>
+          <p:nvPr/>
+        </p:nvSpPr>
+        <p:spPr>
+          <a:xfrm>
+            <a:off x="4438650" y="4736008"/>
+            <a:ext cx="6896100" cy="9525"/>
+          </a:xfrm>
+          <a:prstGeom prst="rect">
+            <a:avLst/>
+          </a:prstGeom>
+          <a:solidFill>
+            <a:srgbClr val="F0F0F0"/>
+          </a:solidFill>
+          <a:ln>
+            <a:noFill/>
+          </a:ln>
+        </p:spPr>
+        <p:txBody>
+          <a:bodyPr spcFirstLastPara="1" wrap="square" lIns="91425" tIns="45700" rIns="91425" bIns="45700" anchor="ctr" anchorCtr="0">
+            <a:noAutofit/>
+          </a:bodyPr>
+          <a:lstStyle/>
+          <a:p>
+            <a:pPr marL="0" marR="0" lvl="0" indent="0" algn="ctr" rtl="0">
+              <a:spcBef>
+                <a:spcPts val="0"/>
+              </a:spcBef>
+              <a:spcAft>
+                <a:spcPts val="0"/>
+              </a:spcAft>
+              <a:buNone/>
+            </a:pPr>
+            <a:endParaRPr sz="1800" b="0" i="0" u="none" strike="noStrike" cap="none">
+              <a:solidFill>
+                <a:schemeClr val="dk1"/>
+              </a:solidFill>
+              <a:latin typeface="Calibri"/>
+              <a:ea typeface="Calibri"/>
+              <a:cs typeface="Calibri"/>
+              <a:sym typeface="Calibri"/>
+            </a:endParaRPr>
+          </a:p>
+        </p:txBody>
+      </p:sp>
+      <p:sp>
+        <p:nvSpPr>
+          <p:cNvPr id="150" name="Google Shape;150;p16"/>
+          <p:cNvSpPr/>
+          <p:nvPr/>
+        </p:nvSpPr>
+        <p:spPr>
+          <a:xfrm>
+            <a:off x="4438650" y="3475136"/>
+            <a:ext cx="6896100" cy="9525"/>
+          </a:xfrm>
+          <a:prstGeom prst="rect">
+            <a:avLst/>
+          </a:prstGeom>
+          <a:solidFill>
+            <a:srgbClr val="F0F0F0"/>
+          </a:solidFill>
+          <a:ln>
+            <a:noFill/>
+          </a:ln>
+        </p:spPr>
+        <p:txBody>
+          <a:bodyPr spcFirstLastPara="1" wrap="square" lIns="91425" tIns="45700" rIns="91425" bIns="45700" anchor="ctr" anchorCtr="0">
+            <a:noAutofit/>
+          </a:bodyPr>
+          <a:lstStyle/>
+          <a:p>
+            <a:pPr marL="0" marR="0" lvl="0" indent="0" algn="ctr" rtl="0">
+              <a:spcBef>
+                <a:spcPts val="0"/>
+              </a:spcBef>
+              <a:spcAft>
+                <a:spcPts val="0"/>
+              </a:spcAft>
+              <a:buNone/>
+            </a:pPr>
+            <a:endParaRPr sz="1800" b="0" i="0" u="none" strike="noStrike" cap="none">
+              <a:solidFill>
+                <a:schemeClr val="dk1"/>
+              </a:solidFill>
+              <a:latin typeface="Calibri"/>
+              <a:ea typeface="Calibri"/>
+              <a:cs typeface="Calibri"/>
+              <a:sym typeface="Calibri"/>
+            </a:endParaRPr>
+          </a:p>
+        </p:txBody>
+      </p:sp>
+      <p:sp>
+        <p:nvSpPr>
+          <p:cNvPr id="151" name="Google Shape;151;p16"/>
+          <p:cNvSpPr/>
+          <p:nvPr/>
+        </p:nvSpPr>
+        <p:spPr>
+          <a:xfrm>
+            <a:off x="4438650" y="4105572"/>
+            <a:ext cx="6896100" cy="9525"/>
+          </a:xfrm>
+          <a:prstGeom prst="rect">
+            <a:avLst/>
+          </a:prstGeom>
+          <a:solidFill>
+            <a:srgbClr val="F0F0F0"/>
+          </a:solidFill>
+          <a:ln>
+            <a:noFill/>
+          </a:ln>
+        </p:spPr>
+        <p:txBody>
+          <a:bodyPr spcFirstLastPara="1" wrap="square" lIns="91425" tIns="45700" rIns="91425" bIns="45700" anchor="ctr" anchorCtr="0">
+            <a:noAutofit/>
+          </a:bodyPr>
+          <a:lstStyle/>
+          <a:p>
+            <a:pPr marL="0" marR="0" lvl="0" indent="0" algn="ctr" rtl="0">
+              <a:spcBef>
+                <a:spcPts val="0"/>
+              </a:spcBef>
+              <a:spcAft>
+                <a:spcPts val="0"/>
+              </a:spcAft>
+              <a:buNone/>
+            </a:pPr>
+            <a:endParaRPr sz="1800" b="0" i="0" u="none" strike="noStrike" cap="none">
+              <a:solidFill>
+                <a:schemeClr val="dk1"/>
+              </a:solidFill>
+              <a:latin typeface="Calibri"/>
+              <a:ea typeface="Calibri"/>
+              <a:cs typeface="Calibri"/>
+              <a:sym typeface="Calibri"/>
+            </a:endParaRPr>
+          </a:p>
+        </p:txBody>
+      </p:sp>
+      <p:sp>
+        <p:nvSpPr>
+          <p:cNvPr id="152" name="Google Shape;152;p16"/>
+          <p:cNvSpPr/>
+          <p:nvPr/>
+        </p:nvSpPr>
+        <p:spPr>
+          <a:xfrm>
+            <a:off x="4438650" y="4736008"/>
+            <a:ext cx="6896100" cy="9525"/>
+          </a:xfrm>
+          <a:prstGeom prst="rect">
+            <a:avLst/>
+          </a:prstGeom>
+          <a:solidFill>
+            <a:srgbClr val="F0F0F0"/>
+          </a:solidFill>
+          <a:ln>
+            <a:noFill/>
+          </a:ln>
+        </p:spPr>
+        <p:txBody>
+          <a:bodyPr spcFirstLastPara="1" wrap="square" lIns="91425" tIns="45700" rIns="91425" bIns="45700" anchor="ctr" anchorCtr="0">
+            <a:noAutofit/>
+          </a:bodyPr>
+          <a:lstStyle/>
+          <a:p>
+            <a:pPr marL="0" marR="0" lvl="0" indent="0" algn="ctr" rtl="0">
+              <a:spcBef>
+                <a:spcPts val="0"/>
+              </a:spcBef>
+              <a:spcAft>
+                <a:spcPts val="0"/>
+              </a:spcAft>
+              <a:buNone/>
+            </a:pPr>
+            <a:endParaRPr sz="1800" b="0" i="0" u="none" strike="noStrike" cap="none">
+              <a:solidFill>
+                <a:schemeClr val="dk1"/>
+              </a:solidFill>
+              <a:latin typeface="Calibri"/>
+              <a:ea typeface="Calibri"/>
+              <a:cs typeface="Calibri"/>
+              <a:sym typeface="Calibri"/>
+            </a:endParaRPr>
+          </a:p>
+        </p:txBody>
+      </p:sp>
       <p:pic>
         <p:nvPicPr>
-          <p:cNvPr id="143" name="Google Shape;143;p16" descr="image.png"/>
+          <p:cNvPr id="153" name="Google Shape;153;p16" descr="image.png"/>
           <p:cNvPicPr preferRelativeResize="0"/>
           <p:nvPr/>
         </p:nvPicPr>
@@ -23393,8 +24910,8 @@
         </p:blipFill>
         <p:spPr>
           <a:xfrm>
-            <a:off x="571500" y="2377975"/>
-            <a:ext cx="3200400" cy="3333750"/>
+            <a:off x="4438650" y="3055143"/>
+            <a:ext cx="209550" cy="219075"/>
           </a:xfrm>
           <a:prstGeom prst="rect">
             <a:avLst/>
@@ -23405,16 +24922,23 @@
           </a:ln>
         </p:spPr>
       </p:pic>
-      <p:sp>
-        <p:nvSpPr>
-          <p:cNvPr id="144" name="Google Shape;144;p16"/>
-          <p:cNvSpPr txBox="1"/>
+      <p:pic>
+        <p:nvPicPr>
+          <p:cNvPr id="154" name="Google Shape;154;p16" descr="image.png"/>
+          <p:cNvPicPr preferRelativeResize="0"/>
           <p:nvPr/>
-        </p:nvSpPr>
-        <p:spPr>
-          <a:xfrm>
-            <a:off x="4914900" y="2923221"/>
-            <a:ext cx="7086600" cy="492443"/>
+        </p:nvPicPr>
+        <p:blipFill rotWithShape="1">
+          <a:blip r:embed="rId3">
+            <a:alphaModFix/>
+          </a:blip>
+          <a:srcRect/>
+          <a:stretch/>
+        </p:blipFill>
+        <p:spPr>
+          <a:xfrm>
+            <a:off x="4438650" y="3685579"/>
+            <a:ext cx="209550" cy="219075"/>
           </a:xfrm>
           <a:prstGeom prst="rect">
             <a:avLst/>
@@ -23424,15 +24948,62 @@
             <a:noFill/>
           </a:ln>
         </p:spPr>
+      </p:pic>
+      <p:pic>
+        <p:nvPicPr>
+          <p:cNvPr id="155" name="Google Shape;155;p16" descr="image.png"/>
+          <p:cNvPicPr preferRelativeResize="0"/>
+          <p:nvPr/>
+        </p:nvPicPr>
+        <p:blipFill rotWithShape="1">
+          <a:blip r:embed="rId3">
+            <a:alphaModFix/>
+          </a:blip>
+          <a:srcRect/>
+          <a:stretch/>
+        </p:blipFill>
+        <p:spPr>
+          <a:xfrm>
+            <a:off x="4438650" y="4316015"/>
+            <a:ext cx="209550" cy="219075"/>
+          </a:xfrm>
+          <a:prstGeom prst="rect">
+            <a:avLst/>
+          </a:prstGeom>
+          <a:noFill/>
+          <a:ln>
+            <a:noFill/>
+          </a:ln>
+        </p:spPr>
+      </p:pic>
+      <p:sp>
+        <p:nvSpPr>
+          <p:cNvPr id="156" name="Google Shape;156;p16"/>
+          <p:cNvSpPr txBox="1"/>
+          <p:nvPr/>
+        </p:nvSpPr>
+        <p:spPr>
+          <a:xfrm>
+            <a:off x="809625" y="919311"/>
+            <a:ext cx="11351418" cy="502890"/>
+          </a:xfrm>
+          <a:prstGeom prst="rect">
+            <a:avLst/>
+          </a:prstGeom>
+          <a:noFill/>
+          <a:ln>
+            <a:noFill/>
+          </a:ln>
+        </p:spPr>
         <p:txBody>
-          <a:bodyPr spcFirstLastPara="1" wrap="square" lIns="0" tIns="0" rIns="0" bIns="0" anchor="ctr" anchorCtr="0">
+          <a:bodyPr spcFirstLastPara="1" wrap="square" lIns="0" tIns="0" rIns="0" bIns="0" anchor="t" anchorCtr="0">
             <a:spAutoFit/>
           </a:bodyPr>
           <a:lstStyle/>
           <a:p>
             <a:pPr marL="0" marR="0" lvl="0" indent="0" algn="l" rtl="0">
               <a:lnSpc>
-                <a:spcPct val="160000"/>
+                <a:spcPct val="119969"/>
               </a:lnSpc>
               <a:spcBef>
                 <a:spcPts val="0"/>
@@ -23443,61 +25014,37 @@
               <a:buNone/>
             </a:pPr>
             <a:r>
-              <a:rPr lang="en-US" sz="2000" b="0" i="0" u="none" strike="noStrike" cap="none" dirty="0" err="1">
-                <a:solidFill>
-                  <a:srgbClr val="1E293B"/>
-                </a:solidFill>
-                <a:latin typeface="DM Sans"/>
-                <a:ea typeface="DM Sans"/>
-                <a:cs typeface="DM Sans"/>
-                <a:sym typeface="DM Sans"/>
+              <a:rPr lang="en-US" sz="3300" b="1" i="0" u="none" strike="noStrike" cap="none">
+                <a:solidFill>
+                  <a:srgbClr val="002147"/>
+                </a:solidFill>
+                <a:latin typeface="Merriweather"/>
+                <a:ea typeface="Merriweather"/>
+                <a:cs typeface="Merriweather"/>
+                <a:sym typeface="Merriweather"/>
               </a:rPr>
-              <a:t>效能比較：探討統計、ML、DL</a:t>
-            </a:r>
-            <a:r>
-              <a:rPr lang="en-US" sz="2000" b="0" i="0" u="none" strike="noStrike" cap="none" dirty="0">
-                <a:solidFill>
-                  <a:srgbClr val="1E293B"/>
-                </a:solidFill>
-                <a:latin typeface="DM Sans"/>
-                <a:ea typeface="DM Sans"/>
-                <a:cs typeface="DM Sans"/>
-                <a:sym typeface="DM Sans"/>
-              </a:rPr>
-              <a:t> 與 LLM 在 ETF </a:t>
-            </a:r>
-            <a:r>
-              <a:rPr lang="en-US" sz="2000" b="0" i="0" u="none" strike="noStrike" cap="none" dirty="0" err="1">
-                <a:solidFill>
-                  <a:srgbClr val="1E293B"/>
-                </a:solidFill>
-                <a:latin typeface="DM Sans"/>
-                <a:ea typeface="DM Sans"/>
-                <a:cs typeface="DM Sans"/>
-                <a:sym typeface="DM Sans"/>
-              </a:rPr>
-              <a:t>預測之優劣</a:t>
-            </a:r>
-            <a:endParaRPr sz="2000" dirty="0"/>
+              <a:t>研究目的與問題</a:t>
+            </a:r>
+            <a:endParaRPr/>
           </a:p>
         </p:txBody>
       </p:sp>
       <p:sp>
         <p:nvSpPr>
-          <p:cNvPr id="145" name="Google Shape;145;p16"/>
+          <p:cNvPr id="157" name="Google Shape;157;p16"/>
           <p:cNvSpPr/>
           <p:nvPr/>
         </p:nvSpPr>
         <p:spPr>
           <a:xfrm>
-            <a:off x="4438650" y="3475136"/>
-            <a:ext cx="6896100" cy="9525"/>
+            <a:off x="571500" y="919311"/>
+            <a:ext cx="76200" cy="502890"/>
           </a:xfrm>
           <a:prstGeom prst="rect">
             <a:avLst/>
           </a:prstGeom>
           <a:solidFill>
-            <a:srgbClr val="F0F0F0"/>
+            <a:srgbClr val="D4AF37"/>
           </a:solidFill>
           <a:ln>
             <a:noFill/>
@@ -23532,206 +25079,112 @@
       </p:sp>
       <p:sp>
         <p:nvSpPr>
-          <p:cNvPr id="146" name="Google Shape;146;p16"/>
+          <p:cNvPr id="3" name="文字方塊 2">
+            <a:extLst>
+              <a:ext uri="{FF2B5EF4-FFF2-40B4-BE49-F238E27FC236}">
+                <a16:creationId xmlns:a16="http://schemas.microsoft.com/office/drawing/2014/main" id="{C992215D-42D3-FDC4-24D8-78EFE192C10E}"/>
+              </a:ext>
+            </a:extLst>
+          </p:cNvPr>
           <p:cNvSpPr txBox="1"/>
           <p:nvPr/>
         </p:nvSpPr>
         <p:spPr>
           <a:xfrm>
-            <a:off x="4914900" y="3553657"/>
-            <a:ext cx="7086600" cy="492443"/>
+            <a:off x="68827" y="2693074"/>
+            <a:ext cx="5014451" cy="523220"/>
           </a:xfrm>
           <a:prstGeom prst="rect">
             <a:avLst/>
           </a:prstGeom>
           <a:noFill/>
-          <a:ln>
-            <a:noFill/>
-          </a:ln>
         </p:spPr>
         <p:txBody>
-          <a:bodyPr spcFirstLastPara="1" wrap="square" lIns="0" tIns="0" rIns="0" bIns="0" anchor="ctr" anchorCtr="0">
+          <a:bodyPr wrap="square">
             <a:spAutoFit/>
           </a:bodyPr>
           <a:lstStyle/>
           <a:p>
-            <a:pPr marL="0" marR="0" lvl="0" indent="0" algn="l" rtl="0">
-              <a:lnSpc>
-                <a:spcPct val="160000"/>
-              </a:lnSpc>
-              <a:spcBef>
-                <a:spcPts val="0"/>
-              </a:spcBef>
-              <a:spcAft>
-                <a:spcPts val="0"/>
-              </a:spcAft>
-              <a:buNone/>
-            </a:pPr>
-            <a:r>
-              <a:rPr lang="en-US" sz="2000" b="0" i="0" u="none" strike="noStrike" cap="none" dirty="0" err="1">
-                <a:solidFill>
-                  <a:srgbClr val="1E293B"/>
+            <a:pPr algn="ctr"/>
+            <a:r>
+              <a:rPr lang="en-US" altLang="zh-TW" b="1" dirty="0">
+                <a:solidFill>
+                  <a:srgbClr val="FF0000"/>
+                </a:solidFill>
+              </a:rPr>
+              <a:t>ETF</a:t>
+            </a:r>
+            <a:r>
+              <a:rPr lang="zh-TW" altLang="en-US" b="1" dirty="0">
+                <a:solidFill>
+                  <a:srgbClr val="FF0000"/>
+                </a:solidFill>
+              </a:rPr>
+              <a:t>預測 統計模型 機器學習 深度學習 大語言模型 </a:t>
+            </a:r>
+            <a:endParaRPr lang="en-US" altLang="zh-TW" b="1" dirty="0">
+              <a:solidFill>
+                <a:srgbClr val="FF0000"/>
+              </a:solidFill>
+            </a:endParaRPr>
+          </a:p>
+          <a:p>
+            <a:pPr algn="ctr"/>
+            <a:r>
+              <a:rPr lang="zh-TW" altLang="en-US" b="1" dirty="0">
+                <a:solidFill>
+                  <a:srgbClr val="FF0000"/>
+                </a:solidFill>
+              </a:rPr>
+              <a:t>的統計圖</a:t>
+            </a:r>
+          </a:p>
+        </p:txBody>
+      </p:sp>
+      <p:sp>
+        <p:nvSpPr>
+          <p:cNvPr id="5" name="文字方塊 4">
+            <a:extLst>
+              <a:ext uri="{FF2B5EF4-FFF2-40B4-BE49-F238E27FC236}">
+                <a16:creationId xmlns:a16="http://schemas.microsoft.com/office/drawing/2014/main" id="{FB9742B6-07F5-15D2-CD91-545950C79FBC}"/>
+              </a:ext>
+            </a:extLst>
+          </p:cNvPr>
+          <p:cNvSpPr txBox="1"/>
+          <p:nvPr/>
+        </p:nvSpPr>
+        <p:spPr>
+          <a:xfrm>
+            <a:off x="1052051" y="4225497"/>
+            <a:ext cx="2694038" cy="400110"/>
+          </a:xfrm>
+          <a:prstGeom prst="rect">
+            <a:avLst/>
+          </a:prstGeom>
+          <a:noFill/>
+        </p:spPr>
+        <p:txBody>
+          <a:bodyPr wrap="square">
+            <a:spAutoFit/>
+          </a:bodyPr>
+          <a:lstStyle/>
+          <a:p>
+            <a:r>
+              <a:rPr lang="en-US" altLang="zh-TW" sz="2000" b="0" i="0" u="none" strike="noStrike" cap="none" dirty="0" err="1">
+                <a:solidFill>
+                  <a:srgbClr val="FF0000"/>
                 </a:solidFill>
                 <a:latin typeface="DM Sans"/>
                 <a:ea typeface="DM Sans"/>
                 <a:cs typeface="DM Sans"/>
                 <a:sym typeface="DM Sans"/>
               </a:rPr>
-              <a:t>市場差異：分析台股</a:t>
-            </a:r>
-            <a:r>
-              <a:rPr lang="en-US" sz="2000" b="0" i="0" u="none" strike="noStrike" cap="none" dirty="0">
-                <a:solidFill>
-                  <a:srgbClr val="1E293B"/>
-                </a:solidFill>
-                <a:latin typeface="DM Sans"/>
-                <a:ea typeface="DM Sans"/>
-                <a:cs typeface="DM Sans"/>
-                <a:sym typeface="DM Sans"/>
-              </a:rPr>
-              <a:t>(0050)</a:t>
-            </a:r>
-            <a:r>
-              <a:rPr lang="en-US" sz="2000" b="0" i="0" u="none" strike="noStrike" cap="none" dirty="0" err="1">
-                <a:solidFill>
-                  <a:srgbClr val="1E293B"/>
-                </a:solidFill>
-                <a:latin typeface="DM Sans"/>
-                <a:ea typeface="DM Sans"/>
-                <a:cs typeface="DM Sans"/>
-                <a:sym typeface="DM Sans"/>
-              </a:rPr>
-              <a:t>與美股</a:t>
-            </a:r>
-            <a:r>
-              <a:rPr lang="en-US" sz="2000" b="0" i="0" u="none" strike="noStrike" cap="none" dirty="0">
-                <a:solidFill>
-                  <a:srgbClr val="1E293B"/>
-                </a:solidFill>
-                <a:latin typeface="DM Sans"/>
-                <a:ea typeface="DM Sans"/>
-                <a:cs typeface="DM Sans"/>
-                <a:sym typeface="DM Sans"/>
-              </a:rPr>
-              <a:t>(SPY/QQQ)</a:t>
-            </a:r>
-            <a:r>
-              <a:rPr lang="en-US" sz="2000" b="0" i="0" u="none" strike="noStrike" cap="none" dirty="0" err="1">
-                <a:solidFill>
-                  <a:srgbClr val="1E293B"/>
-                </a:solidFill>
-                <a:latin typeface="DM Sans"/>
-                <a:ea typeface="DM Sans"/>
-                <a:cs typeface="DM Sans"/>
-                <a:sym typeface="DM Sans"/>
-              </a:rPr>
-              <a:t>之預測難度差異</a:t>
-            </a:r>
-            <a:endParaRPr sz="2000" dirty="0"/>
-          </a:p>
-        </p:txBody>
-      </p:sp>
-      <p:sp>
-        <p:nvSpPr>
-          <p:cNvPr id="147" name="Google Shape;147;p16"/>
-          <p:cNvSpPr/>
-          <p:nvPr/>
-        </p:nvSpPr>
-        <p:spPr>
-          <a:xfrm>
-            <a:off x="4438650" y="4105572"/>
-            <a:ext cx="6896100" cy="9525"/>
-          </a:xfrm>
-          <a:prstGeom prst="rect">
-            <a:avLst/>
-          </a:prstGeom>
-          <a:solidFill>
-            <a:srgbClr val="F0F0F0"/>
-          </a:solidFill>
-          <a:ln>
-            <a:noFill/>
-          </a:ln>
-        </p:spPr>
-        <p:txBody>
-          <a:bodyPr spcFirstLastPara="1" wrap="square" lIns="91425" tIns="45700" rIns="91425" bIns="45700" anchor="ctr" anchorCtr="0">
-            <a:noAutofit/>
-          </a:bodyPr>
-          <a:lstStyle/>
-          <a:p>
-            <a:pPr marL="0" marR="0" lvl="0" indent="0" algn="ctr" rtl="0">
-              <a:spcBef>
-                <a:spcPts val="0"/>
-              </a:spcBef>
-              <a:spcAft>
-                <a:spcPts val="0"/>
-              </a:spcAft>
-              <a:buNone/>
-            </a:pPr>
-            <a:endParaRPr sz="1800" b="0" i="0" u="none" strike="noStrike" cap="none">
-              <a:solidFill>
-                <a:schemeClr val="dk1"/>
-              </a:solidFill>
-              <a:latin typeface="Calibri"/>
-              <a:ea typeface="Calibri"/>
-              <a:cs typeface="Calibri"/>
-              <a:sym typeface="Calibri"/>
-            </a:endParaRPr>
-          </a:p>
-        </p:txBody>
-      </p:sp>
-      <p:sp>
-        <p:nvSpPr>
-          <p:cNvPr id="148" name="Google Shape;148;p16"/>
-          <p:cNvSpPr txBox="1"/>
-          <p:nvPr/>
-        </p:nvSpPr>
-        <p:spPr>
-          <a:xfrm>
-            <a:off x="4914900" y="4184093"/>
-            <a:ext cx="7086600" cy="492443"/>
-          </a:xfrm>
-          <a:prstGeom prst="rect">
-            <a:avLst/>
-          </a:prstGeom>
-          <a:noFill/>
-          <a:ln>
-            <a:noFill/>
-          </a:ln>
-        </p:spPr>
-        <p:txBody>
-          <a:bodyPr spcFirstLastPara="1" wrap="square" lIns="0" tIns="0" rIns="0" bIns="0" anchor="ctr" anchorCtr="0">
-            <a:spAutoFit/>
-          </a:bodyPr>
-          <a:lstStyle/>
-          <a:p>
-            <a:pPr marL="0" marR="0" lvl="0" indent="0" algn="l" rtl="0">
-              <a:lnSpc>
-                <a:spcPct val="160000"/>
-              </a:lnSpc>
-              <a:spcBef>
-                <a:spcPts val="0"/>
-              </a:spcBef>
-              <a:spcAft>
-                <a:spcPts val="0"/>
-              </a:spcAft>
-              <a:buNone/>
-            </a:pPr>
-            <a:r>
-              <a:rPr lang="en-US" sz="2000" b="0" i="0" u="none" strike="noStrike" cap="none" dirty="0" err="1">
-                <a:solidFill>
-                  <a:srgbClr val="1E293B"/>
-                </a:solidFill>
-                <a:latin typeface="DM Sans"/>
-                <a:ea typeface="DM Sans"/>
-                <a:cs typeface="DM Sans"/>
-                <a:sym typeface="DM Sans"/>
-              </a:rPr>
-              <a:t>實作應用：建構</a:t>
-            </a:r>
-            <a:r>
-              <a:rPr lang="en-US" sz="2000" b="0" i="0" u="none" strike="noStrike" cap="none" dirty="0">
-                <a:solidFill>
-                  <a:srgbClr val="1E293B"/>
+              <a:t>建構</a:t>
+            </a:r>
+            <a:r>
+              <a:rPr lang="en-US" altLang="zh-TW" sz="2000" b="0" i="0" u="none" strike="noStrike" cap="none" dirty="0">
+                <a:solidFill>
+                  <a:srgbClr val="FF0000"/>
                 </a:solidFill>
                 <a:latin typeface="DM Sans"/>
                 <a:ea typeface="DM Sans"/>
@@ -23741,391 +25194,21 @@
               <a:t> LLM </a:t>
             </a:r>
             <a:r>
-              <a:rPr lang="en-US" sz="2000" b="0" i="0" u="none" strike="noStrike" cap="none" dirty="0" err="1">
-                <a:solidFill>
-                  <a:srgbClr val="1E293B"/>
+              <a:rPr lang="en-US" altLang="zh-TW" sz="2000" b="0" i="0" u="none" strike="noStrike" cap="none" dirty="0" err="1">
+                <a:solidFill>
+                  <a:srgbClr val="FF0000"/>
                 </a:solidFill>
                 <a:latin typeface="DM Sans"/>
                 <a:ea typeface="DM Sans"/>
                 <a:cs typeface="DM Sans"/>
                 <a:sym typeface="DM Sans"/>
               </a:rPr>
-              <a:t>輔助視覺化平台，提升預測可解釋性</a:t>
-            </a:r>
-            <a:endParaRPr sz="2000" dirty="0"/>
-          </a:p>
-        </p:txBody>
-      </p:sp>
-      <p:sp>
-        <p:nvSpPr>
-          <p:cNvPr id="149" name="Google Shape;149;p16"/>
-          <p:cNvSpPr/>
-          <p:nvPr/>
-        </p:nvSpPr>
-        <p:spPr>
-          <a:xfrm>
-            <a:off x="4438650" y="4736008"/>
-            <a:ext cx="6896100" cy="9525"/>
-          </a:xfrm>
-          <a:prstGeom prst="rect">
-            <a:avLst/>
-          </a:prstGeom>
-          <a:solidFill>
-            <a:srgbClr val="F0F0F0"/>
-          </a:solidFill>
-          <a:ln>
-            <a:noFill/>
-          </a:ln>
-        </p:spPr>
-        <p:txBody>
-          <a:bodyPr spcFirstLastPara="1" wrap="square" lIns="91425" tIns="45700" rIns="91425" bIns="45700" anchor="ctr" anchorCtr="0">
-            <a:noAutofit/>
-          </a:bodyPr>
-          <a:lstStyle/>
-          <a:p>
-            <a:pPr marL="0" marR="0" lvl="0" indent="0" algn="ctr" rtl="0">
-              <a:spcBef>
-                <a:spcPts val="0"/>
-              </a:spcBef>
-              <a:spcAft>
-                <a:spcPts val="0"/>
-              </a:spcAft>
-              <a:buNone/>
-            </a:pPr>
-            <a:endParaRPr sz="1800" b="0" i="0" u="none" strike="noStrike" cap="none">
+              <a:t>視覺化平台</a:t>
+            </a:r>
+            <a:endParaRPr lang="zh-TW" altLang="en-US" sz="2000" dirty="0">
               <a:solidFill>
-                <a:schemeClr val="dk1"/>
+                <a:srgbClr val="FF0000"/>
               </a:solidFill>
-              <a:latin typeface="Calibri"/>
-              <a:ea typeface="Calibri"/>
-              <a:cs typeface="Calibri"/>
-              <a:sym typeface="Calibri"/>
-            </a:endParaRPr>
-          </a:p>
-        </p:txBody>
-      </p:sp>
-      <p:sp>
-        <p:nvSpPr>
-          <p:cNvPr id="150" name="Google Shape;150;p16"/>
-          <p:cNvSpPr/>
-          <p:nvPr/>
-        </p:nvSpPr>
-        <p:spPr>
-          <a:xfrm>
-            <a:off x="4438650" y="3475136"/>
-            <a:ext cx="6896100" cy="9525"/>
-          </a:xfrm>
-          <a:prstGeom prst="rect">
-            <a:avLst/>
-          </a:prstGeom>
-          <a:solidFill>
-            <a:srgbClr val="F0F0F0"/>
-          </a:solidFill>
-          <a:ln>
-            <a:noFill/>
-          </a:ln>
-        </p:spPr>
-        <p:txBody>
-          <a:bodyPr spcFirstLastPara="1" wrap="square" lIns="91425" tIns="45700" rIns="91425" bIns="45700" anchor="ctr" anchorCtr="0">
-            <a:noAutofit/>
-          </a:bodyPr>
-          <a:lstStyle/>
-          <a:p>
-            <a:pPr marL="0" marR="0" lvl="0" indent="0" algn="ctr" rtl="0">
-              <a:spcBef>
-                <a:spcPts val="0"/>
-              </a:spcBef>
-              <a:spcAft>
-                <a:spcPts val="0"/>
-              </a:spcAft>
-              <a:buNone/>
-            </a:pPr>
-            <a:endParaRPr sz="1800" b="0" i="0" u="none" strike="noStrike" cap="none">
-              <a:solidFill>
-                <a:schemeClr val="dk1"/>
-              </a:solidFill>
-              <a:latin typeface="Calibri"/>
-              <a:ea typeface="Calibri"/>
-              <a:cs typeface="Calibri"/>
-              <a:sym typeface="Calibri"/>
-            </a:endParaRPr>
-          </a:p>
-        </p:txBody>
-      </p:sp>
-      <p:sp>
-        <p:nvSpPr>
-          <p:cNvPr id="151" name="Google Shape;151;p16"/>
-          <p:cNvSpPr/>
-          <p:nvPr/>
-        </p:nvSpPr>
-        <p:spPr>
-          <a:xfrm>
-            <a:off x="4438650" y="4105572"/>
-            <a:ext cx="6896100" cy="9525"/>
-          </a:xfrm>
-          <a:prstGeom prst="rect">
-            <a:avLst/>
-          </a:prstGeom>
-          <a:solidFill>
-            <a:srgbClr val="F0F0F0"/>
-          </a:solidFill>
-          <a:ln>
-            <a:noFill/>
-          </a:ln>
-        </p:spPr>
-        <p:txBody>
-          <a:bodyPr spcFirstLastPara="1" wrap="square" lIns="91425" tIns="45700" rIns="91425" bIns="45700" anchor="ctr" anchorCtr="0">
-            <a:noAutofit/>
-          </a:bodyPr>
-          <a:lstStyle/>
-          <a:p>
-            <a:pPr marL="0" marR="0" lvl="0" indent="0" algn="ctr" rtl="0">
-              <a:spcBef>
-                <a:spcPts val="0"/>
-              </a:spcBef>
-              <a:spcAft>
-                <a:spcPts val="0"/>
-              </a:spcAft>
-              <a:buNone/>
-            </a:pPr>
-            <a:endParaRPr sz="1800" b="0" i="0" u="none" strike="noStrike" cap="none">
-              <a:solidFill>
-                <a:schemeClr val="dk1"/>
-              </a:solidFill>
-              <a:latin typeface="Calibri"/>
-              <a:ea typeface="Calibri"/>
-              <a:cs typeface="Calibri"/>
-              <a:sym typeface="Calibri"/>
-            </a:endParaRPr>
-          </a:p>
-        </p:txBody>
-      </p:sp>
-      <p:sp>
-        <p:nvSpPr>
-          <p:cNvPr id="152" name="Google Shape;152;p16"/>
-          <p:cNvSpPr/>
-          <p:nvPr/>
-        </p:nvSpPr>
-        <p:spPr>
-          <a:xfrm>
-            <a:off x="4438650" y="4736008"/>
-            <a:ext cx="6896100" cy="9525"/>
-          </a:xfrm>
-          <a:prstGeom prst="rect">
-            <a:avLst/>
-          </a:prstGeom>
-          <a:solidFill>
-            <a:srgbClr val="F0F0F0"/>
-          </a:solidFill>
-          <a:ln>
-            <a:noFill/>
-          </a:ln>
-        </p:spPr>
-        <p:txBody>
-          <a:bodyPr spcFirstLastPara="1" wrap="square" lIns="91425" tIns="45700" rIns="91425" bIns="45700" anchor="ctr" anchorCtr="0">
-            <a:noAutofit/>
-          </a:bodyPr>
-          <a:lstStyle/>
-          <a:p>
-            <a:pPr marL="0" marR="0" lvl="0" indent="0" algn="ctr" rtl="0">
-              <a:spcBef>
-                <a:spcPts val="0"/>
-              </a:spcBef>
-              <a:spcAft>
-                <a:spcPts val="0"/>
-              </a:spcAft>
-              <a:buNone/>
-            </a:pPr>
-            <a:endParaRPr sz="1800" b="0" i="0" u="none" strike="noStrike" cap="none">
-              <a:solidFill>
-                <a:schemeClr val="dk1"/>
-              </a:solidFill>
-              <a:latin typeface="Calibri"/>
-              <a:ea typeface="Calibri"/>
-              <a:cs typeface="Calibri"/>
-              <a:sym typeface="Calibri"/>
-            </a:endParaRPr>
-          </a:p>
-        </p:txBody>
-      </p:sp>
-      <p:pic>
-        <p:nvPicPr>
-          <p:cNvPr id="153" name="Google Shape;153;p16" descr="image.png"/>
-          <p:cNvPicPr preferRelativeResize="0"/>
-          <p:nvPr/>
-        </p:nvPicPr>
-        <p:blipFill rotWithShape="1">
-          <a:blip r:embed="rId4">
-            <a:alphaModFix/>
-          </a:blip>
-          <a:srcRect/>
-          <a:stretch/>
-        </p:blipFill>
-        <p:spPr>
-          <a:xfrm>
-            <a:off x="4438650" y="3055143"/>
-            <a:ext cx="209550" cy="219075"/>
-          </a:xfrm>
-          <a:prstGeom prst="rect">
-            <a:avLst/>
-          </a:prstGeom>
-          <a:noFill/>
-          <a:ln>
-            <a:noFill/>
-          </a:ln>
-        </p:spPr>
-      </p:pic>
-      <p:pic>
-        <p:nvPicPr>
-          <p:cNvPr id="154" name="Google Shape;154;p16" descr="image.png"/>
-          <p:cNvPicPr preferRelativeResize="0"/>
-          <p:nvPr/>
-        </p:nvPicPr>
-        <p:blipFill rotWithShape="1">
-          <a:blip r:embed="rId4">
-            <a:alphaModFix/>
-          </a:blip>
-          <a:srcRect/>
-          <a:stretch/>
-        </p:blipFill>
-        <p:spPr>
-          <a:xfrm>
-            <a:off x="4438650" y="3685579"/>
-            <a:ext cx="209550" cy="219075"/>
-          </a:xfrm>
-          <a:prstGeom prst="rect">
-            <a:avLst/>
-          </a:prstGeom>
-          <a:noFill/>
-          <a:ln>
-            <a:noFill/>
-          </a:ln>
-        </p:spPr>
-      </p:pic>
-      <p:pic>
-        <p:nvPicPr>
-          <p:cNvPr id="155" name="Google Shape;155;p16" descr="image.png"/>
-          <p:cNvPicPr preferRelativeResize="0"/>
-          <p:nvPr/>
-        </p:nvPicPr>
-        <p:blipFill rotWithShape="1">
-          <a:blip r:embed="rId4">
-            <a:alphaModFix/>
-          </a:blip>
-          <a:srcRect/>
-          <a:stretch/>
-        </p:blipFill>
-        <p:spPr>
-          <a:xfrm>
-            <a:off x="4438650" y="4316015"/>
-            <a:ext cx="209550" cy="219075"/>
-          </a:xfrm>
-          <a:prstGeom prst="rect">
-            <a:avLst/>
-          </a:prstGeom>
-          <a:noFill/>
-          <a:ln>
-            <a:noFill/>
-          </a:ln>
-        </p:spPr>
-      </p:pic>
-      <p:sp>
-        <p:nvSpPr>
-          <p:cNvPr id="156" name="Google Shape;156;p16"/>
-          <p:cNvSpPr txBox="1"/>
-          <p:nvPr/>
-        </p:nvSpPr>
-        <p:spPr>
-          <a:xfrm>
-            <a:off x="809625" y="919311"/>
-            <a:ext cx="11351418" cy="502890"/>
-          </a:xfrm>
-          <a:prstGeom prst="rect">
-            <a:avLst/>
-          </a:prstGeom>
-          <a:noFill/>
-          <a:ln>
-            <a:noFill/>
-          </a:ln>
-        </p:spPr>
-        <p:txBody>
-          <a:bodyPr spcFirstLastPara="1" wrap="square" lIns="0" tIns="0" rIns="0" bIns="0" anchor="t" anchorCtr="0">
-            <a:spAutoFit/>
-          </a:bodyPr>
-          <a:lstStyle/>
-          <a:p>
-            <a:pPr marL="0" marR="0" lvl="0" indent="0" algn="l" rtl="0">
-              <a:lnSpc>
-                <a:spcPct val="119969"/>
-              </a:lnSpc>
-              <a:spcBef>
-                <a:spcPts val="0"/>
-              </a:spcBef>
-              <a:spcAft>
-                <a:spcPts val="0"/>
-              </a:spcAft>
-              <a:buNone/>
-            </a:pPr>
-            <a:r>
-              <a:rPr lang="en-US" sz="3300" b="1" i="0" u="none" strike="noStrike" cap="none">
-                <a:solidFill>
-                  <a:srgbClr val="002147"/>
-                </a:solidFill>
-                <a:latin typeface="Merriweather"/>
-                <a:ea typeface="Merriweather"/>
-                <a:cs typeface="Merriweather"/>
-                <a:sym typeface="Merriweather"/>
-              </a:rPr>
-              <a:t>研究目的與問題</a:t>
-            </a:r>
-            <a:endParaRPr/>
-          </a:p>
-        </p:txBody>
-      </p:sp>
-      <p:sp>
-        <p:nvSpPr>
-          <p:cNvPr id="157" name="Google Shape;157;p16"/>
-          <p:cNvSpPr/>
-          <p:nvPr/>
-        </p:nvSpPr>
-        <p:spPr>
-          <a:xfrm>
-            <a:off x="571500" y="919311"/>
-            <a:ext cx="76200" cy="502890"/>
-          </a:xfrm>
-          <a:prstGeom prst="rect">
-            <a:avLst/>
-          </a:prstGeom>
-          <a:solidFill>
-            <a:srgbClr val="D4AF37"/>
-          </a:solidFill>
-          <a:ln>
-            <a:noFill/>
-          </a:ln>
-        </p:spPr>
-        <p:txBody>
-          <a:bodyPr spcFirstLastPara="1" wrap="square" lIns="91425" tIns="45700" rIns="91425" bIns="45700" anchor="ctr" anchorCtr="0">
-            <a:noAutofit/>
-          </a:bodyPr>
-          <a:lstStyle/>
-          <a:p>
-            <a:pPr marL="0" marR="0" lvl="0" indent="0" algn="ctr" rtl="0">
-              <a:spcBef>
-                <a:spcPts val="0"/>
-              </a:spcBef>
-              <a:spcAft>
-                <a:spcPts val="0"/>
-              </a:spcAft>
-              <a:buNone/>
-            </a:pPr>
-            <a:endParaRPr sz="1800" b="0" i="0" u="none" strike="noStrike" cap="none">
-              <a:solidFill>
-                <a:schemeClr val="dk1"/>
-              </a:solidFill>
-              <a:latin typeface="Calibri"/>
-              <a:ea typeface="Calibri"/>
-              <a:cs typeface="Calibri"/>
-              <a:sym typeface="Calibri"/>
             </a:endParaRPr>
           </a:p>
         </p:txBody>
@@ -24374,7 +25457,7 @@
         <p:spPr>
           <a:xfrm>
             <a:off x="809625" y="919311"/>
-            <a:ext cx="11351418" cy="502890"/>
+            <a:ext cx="11351418" cy="609398"/>
           </a:xfrm>
           <a:prstGeom prst="rect">
             <a:avLst/>
@@ -24403,7 +25486,7 @@
               <a:buNone/>
             </a:pPr>
             <a:r>
-              <a:rPr lang="en-US" sz="3300" b="1" i="0" u="none" strike="noStrike" cap="none">
+              <a:rPr lang="en-US" sz="3300" b="1" i="0" u="none" strike="noStrike" cap="none" dirty="0">
                 <a:solidFill>
                   <a:srgbClr val="002147"/>
                 </a:solidFill>
@@ -24412,9 +25495,33 @@
                 <a:cs typeface="Merriweather"/>
                 <a:sym typeface="Merriweather"/>
               </a:rPr>
-              <a:t>分析主題：分類問題 (Classification)</a:t>
-            </a:r>
-            <a:endParaRPr/>
+              <a:t>分析主題</a:t>
+            </a:r>
+            <a:r>
+              <a:rPr lang="en-US" altLang="zh-TW" sz="3300" b="1" i="0" u="none" strike="noStrike" cap="none" dirty="0">
+                <a:solidFill>
+                  <a:srgbClr val="002147"/>
+                </a:solidFill>
+                <a:latin typeface="Merriweather"/>
+                <a:ea typeface="Merriweather"/>
+                <a:cs typeface="Merriweather"/>
+                <a:sym typeface="Merriweather"/>
+              </a:rPr>
+              <a:t>1</a:t>
+            </a:r>
+            <a:r>
+              <a:rPr lang="en-US" sz="3300" b="1" i="0" u="none" strike="noStrike" cap="none" dirty="0">
+                <a:solidFill>
+                  <a:srgbClr val="002147"/>
+                </a:solidFill>
+                <a:latin typeface="Merriweather"/>
+                <a:ea typeface="Merriweather"/>
+                <a:cs typeface="Merriweather"/>
+                <a:sym typeface="Merriweather"/>
+              </a:rPr>
+              <a:t>：分類問題 (Classification)</a:t>
+            </a:r>
+            <a:endParaRPr dirty="0"/>
           </a:p>
         </p:txBody>
       </p:sp>
@@ -24526,6 +25633,55 @@
           </a:prstGeom>
         </p:spPr>
       </p:pic>
+      <p:sp>
+        <p:nvSpPr>
+          <p:cNvPr id="3" name="文字方塊 2">
+            <a:extLst>
+              <a:ext uri="{FF2B5EF4-FFF2-40B4-BE49-F238E27FC236}">
+                <a16:creationId xmlns:a16="http://schemas.microsoft.com/office/drawing/2014/main" id="{CF938398-16B4-3DAC-05E0-DCEB014642E0}"/>
+              </a:ext>
+            </a:extLst>
+          </p:cNvPr>
+          <p:cNvSpPr txBox="1"/>
+          <p:nvPr/>
+        </p:nvSpPr>
+        <p:spPr>
+          <a:xfrm>
+            <a:off x="1606045" y="5509910"/>
+            <a:ext cx="6096000" cy="400110"/>
+          </a:xfrm>
+          <a:prstGeom prst="rect">
+            <a:avLst/>
+          </a:prstGeom>
+          <a:noFill/>
+        </p:spPr>
+        <p:txBody>
+          <a:bodyPr wrap="square">
+            <a:spAutoFit/>
+          </a:bodyPr>
+          <a:lstStyle/>
+          <a:p>
+            <a:r>
+              <a:rPr lang="zh-TW" altLang="en-US" sz="2000" dirty="0">
+                <a:solidFill>
+                  <a:srgbClr val="1E293B"/>
+                </a:solidFill>
+                <a:highlight>
+                  <a:srgbClr val="FFFF00"/>
+                </a:highlight>
+                <a:latin typeface="DM Sans"/>
+                <a:sym typeface="DM Sans"/>
+              </a:rPr>
+              <a:t>補上指標</a:t>
+            </a:r>
+            <a:endParaRPr lang="zh-TW" altLang="en-US" sz="2000" dirty="0">
+              <a:highlight>
+                <a:srgbClr val="FFFF00"/>
+              </a:highlight>
+            </a:endParaRPr>
+          </a:p>
+        </p:txBody>
+      </p:sp>
     </p:spTree>
   </p:cSld>
   <p:clrMapOvr>
@@ -24603,7 +25759,31 @@
                 <a:cs typeface="DM Sans"/>
                 <a:sym typeface="DM Sans"/>
               </a:rPr>
-              <a:t>目標：預測次日收盤價之「連續數值</a:t>
+              <a:t>目標：預測</a:t>
+            </a:r>
+            <a:r>
+              <a:rPr lang="en-US" sz="2000" b="1" i="0" u="none" strike="noStrike" cap="none" dirty="0" err="1">
+                <a:solidFill>
+                  <a:srgbClr val="FF0000"/>
+                </a:solidFill>
+                <a:latin typeface="DM Sans"/>
+                <a:ea typeface="DM Sans"/>
+                <a:cs typeface="DM Sans"/>
+                <a:sym typeface="DM Sans"/>
+              </a:rPr>
+              <a:t>次日收盤</a:t>
+            </a:r>
+            <a:r>
+              <a:rPr lang="en-US" sz="2000" b="0" i="0" u="none" strike="noStrike" cap="none" dirty="0" err="1">
+                <a:solidFill>
+                  <a:srgbClr val="000000"/>
+                </a:solidFill>
+                <a:latin typeface="DM Sans"/>
+                <a:ea typeface="DM Sans"/>
+                <a:cs typeface="DM Sans"/>
+                <a:sym typeface="DM Sans"/>
+              </a:rPr>
+              <a:t>價之「連續數值</a:t>
             </a:r>
             <a:r>
               <a:rPr lang="en-US" sz="2000" b="0" i="0" u="none" strike="noStrike" cap="none" dirty="0">
@@ -24632,7 +25812,7 @@
             <a:r>
               <a:rPr lang="en-US" sz="2000" b="0" i="0" u="none" strike="noStrike" cap="none" dirty="0">
                 <a:solidFill>
-                  <a:srgbClr val="000000"/>
+                  <a:schemeClr val="tx1"/>
                 </a:solidFill>
                 <a:latin typeface="DM Sans"/>
                 <a:ea typeface="DM Sans"/>
@@ -24641,7 +25821,47 @@
               </a:rPr>
               <a:t>。</a:t>
             </a:r>
-            <a:endParaRPr sz="2000" dirty="0"/>
+            <a:r>
+              <a:rPr lang="en-US" altLang="zh-TW" sz="2000" b="0" i="0" u="none" strike="noStrike" cap="none" dirty="0">
+                <a:solidFill>
+                  <a:srgbClr val="FF0000"/>
+                </a:solidFill>
+                <a:latin typeface="DM Sans"/>
+                <a:ea typeface="DM Sans"/>
+                <a:cs typeface="DM Sans"/>
+                <a:sym typeface="DM Sans"/>
+              </a:rPr>
+              <a:t>(</a:t>
+            </a:r>
+            <a:r>
+              <a:rPr lang="zh-TW" altLang="en-US" sz="2000" b="0" i="0" u="none" strike="noStrike" cap="none" dirty="0">
+                <a:solidFill>
+                  <a:srgbClr val="FF0000"/>
+                </a:solidFill>
+                <a:latin typeface="DM Sans"/>
+                <a:ea typeface="DM Sans"/>
+                <a:cs typeface="DM Sans"/>
+                <a:sym typeface="DM Sans"/>
+              </a:rPr>
+              <a:t>未來將提供短中長期預測</a:t>
+            </a:r>
+            <a:r>
+              <a:rPr lang="en-US" altLang="zh-TW" sz="2000" dirty="0">
+                <a:solidFill>
+                  <a:srgbClr val="FF0000"/>
+                </a:solidFill>
+                <a:latin typeface="DM Sans"/>
+                <a:ea typeface="DM Sans"/>
+                <a:cs typeface="DM Sans"/>
+                <a:sym typeface="DM Sans"/>
+              </a:rPr>
+              <a:t>)</a:t>
+            </a:r>
+            <a:endParaRPr sz="2000" dirty="0">
+              <a:solidFill>
+                <a:srgbClr val="FF0000"/>
+              </a:solidFill>
+            </a:endParaRPr>
           </a:p>
         </p:txBody>
       </p:sp>
@@ -24654,7 +25874,7 @@
         <p:spPr>
           <a:xfrm>
             <a:off x="809625" y="919311"/>
-            <a:ext cx="11351418" cy="502890"/>
+            <a:ext cx="11351418" cy="609398"/>
           </a:xfrm>
           <a:prstGeom prst="rect">
             <a:avLst/>
@@ -24683,7 +25903,7 @@
               <a:buNone/>
             </a:pPr>
             <a:r>
-              <a:rPr lang="en-US" sz="3300" b="1" i="0" u="none" strike="noStrike" cap="none" dirty="0" err="1">
+              <a:rPr lang="en-US" sz="3300" b="1" i="0" u="none" strike="noStrike" cap="none" dirty="0">
                 <a:solidFill>
                   <a:srgbClr val="002147"/>
                 </a:solidFill>
@@ -24692,10 +25912,10 @@
                 <a:cs typeface="Merriweather"/>
                 <a:sym typeface="Merriweather"/>
               </a:rPr>
-              <a:t>分析主題：迴歸問題</a:t>
-            </a:r>
-            <a:r>
-              <a:rPr lang="en-US" sz="3300" b="1" i="0" u="none" strike="noStrike" cap="none" dirty="0">
+              <a:t>分析主題</a:t>
+            </a:r>
+            <a:r>
+              <a:rPr lang="en-US" altLang="zh-TW" sz="3300" b="1" i="0" u="none" strike="noStrike" cap="none" dirty="0">
                 <a:solidFill>
                   <a:srgbClr val="002147"/>
                 </a:solidFill>
@@ -24704,7 +25924,19 @@
                 <a:cs typeface="Merriweather"/>
                 <a:sym typeface="Merriweather"/>
               </a:rPr>
-              <a:t> (Regression)</a:t>
+              <a:t>2</a:t>
+            </a:r>
+            <a:r>
+              <a:rPr lang="en-US" sz="3300" b="1" i="0" u="none" strike="noStrike" cap="none" dirty="0">
+                <a:solidFill>
+                  <a:srgbClr val="002147"/>
+                </a:solidFill>
+                <a:latin typeface="Merriweather"/>
+                <a:ea typeface="Merriweather"/>
+                <a:cs typeface="Merriweather"/>
+                <a:sym typeface="Merriweather"/>
+              </a:rPr>
+              <a:t>：迴歸問題 (Regression)</a:t>
             </a:r>
             <a:endParaRPr dirty="0"/>
           </a:p>
@@ -24758,8 +25990,8 @@
           </a:p>
         </p:txBody>
       </p:sp>
-      <mc:AlternateContent xmlns:mc="http://schemas.openxmlformats.org/markup-compatibility/2006" xmlns:a14="http://schemas.microsoft.com/office/drawing/2010/main">
-        <mc:Choice Requires="a14">
+      <mc:AlternateContent xmlns:mc="http://schemas.openxmlformats.org/markup-compatibility/2006">
+        <mc:Choice xmlns:a14="http://schemas.microsoft.com/office/drawing/2010/main" Requires="a14">
           <p:graphicFrame>
             <p:nvGraphicFramePr>
               <p:cNvPr id="2" name="表格 1">
@@ -24775,14 +26007,14 @@
               <p:nvPr>
                 <p:extLst>
                   <p:ext uri="{D42A27DB-BD31-4B8C-83A1-F6EECF244321}">
-                    <p14:modId xmlns:p14="http://schemas.microsoft.com/office/powerpoint/2010/main" val="2279543968"/>
+                    <p14:modId xmlns:p14="http://schemas.microsoft.com/office/powerpoint/2010/main" val="1856747147"/>
                   </p:ext>
                 </p:extLst>
               </p:nvPr>
             </p:nvGraphicFramePr>
             <p:xfrm>
               <a:off x="647700" y="3639846"/>
-              <a:ext cx="9373419" cy="2260760"/>
+              <a:ext cx="9373419" cy="2200880"/>
             </p:xfrm>
             <a:graphic>
               <a:graphicData uri="http://schemas.openxmlformats.org/drawingml/2006/table">
@@ -24905,11 +26137,14 @@
                             <a:buNone/>
                           </a:pPr>
                           <a:r>
-                            <a:rPr lang="en-US">
+                            <a:rPr lang="en-US" dirty="0">
                               <a:solidFill>
                                 <a:srgbClr val="1E293B"/>
                               </a:solidFill>
                               <a:effectLst/>
+                              <a:highlight>
+                                <a:srgbClr val="FFFF00"/>
+                              </a:highlight>
                             </a:rPr>
                             <a:t>MAE / MSE</a:t>
                           </a:r>
@@ -24935,6 +26170,9 @@
                                   <m:fPr>
                                     <m:ctrlPr>
                                       <a:rPr lang="ar-AE" altLang="zh-TW" i="1">
+                                        <a:highlight>
+                                          <a:srgbClr val="FFFF00"/>
+                                        </a:highlight>
                                         <a:latin typeface="Cambria Math" panose="02040503050406030204" pitchFamily="18" charset="0"/>
                                       </a:rPr>
                                     </m:ctrlPr>
@@ -24942,6 +26180,9 @@
                                   <m:num>
                                     <m:r>
                                       <a:rPr lang="ar-AE" altLang="zh-TW">
+                                        <a:highlight>
+                                          <a:srgbClr val="FFFF00"/>
+                                        </a:highlight>
                                         <a:latin typeface="Cambria Math" panose="02040503050406030204" pitchFamily="18" charset="0"/>
                                       </a:rPr>
                                       <m:t>1</m:t>
@@ -24950,6 +26191,9 @@
                                   <m:den>
                                     <m:r>
                                       <a:rPr lang="zh-TW" altLang="ar-AE" i="1">
+                                        <a:highlight>
+                                          <a:srgbClr val="FFFF00"/>
+                                        </a:highlight>
                                         <a:latin typeface="Cambria Math" panose="02040503050406030204" pitchFamily="18" charset="0"/>
                                       </a:rPr>
                                       <m:t>𝑛</m:t>
@@ -24961,6 +26205,9 @@
                                     <m:sty m:val="p"/>
                                   </m:rPr>
                                   <a:rPr lang="el-GR" altLang="zh-TW" i="0">
+                                    <a:highlight>
+                                      <a:srgbClr val="FFFF00"/>
+                                    </a:highlight>
                                     <a:latin typeface="Cambria Math" panose="02040503050406030204" pitchFamily="18" charset="0"/>
                                   </a:rPr>
                                   <m:t>Σ</m:t>
@@ -24971,6 +26218,9 @@
                                     <m:endChr m:val="|"/>
                                     <m:ctrlPr>
                                       <a:rPr lang="ar-AE" altLang="zh-TW" i="1">
+                                        <a:highlight>
+                                          <a:srgbClr val="FFFF00"/>
+                                        </a:highlight>
                                         <a:latin typeface="Cambria Math" panose="02040503050406030204" pitchFamily="18" charset="0"/>
                                       </a:rPr>
                                     </m:ctrlPr>
@@ -24980,6 +26230,9 @@
                                       <m:sSubPr>
                                         <m:ctrlPr>
                                           <a:rPr lang="ar-AE" altLang="zh-TW" i="1">
+                                            <a:highlight>
+                                              <a:srgbClr val="FFFF00"/>
+                                            </a:highlight>
                                             <a:latin typeface="Cambria Math" panose="02040503050406030204" pitchFamily="18" charset="0"/>
                                           </a:rPr>
                                         </m:ctrlPr>
@@ -24987,6 +26240,9 @@
                                       <m:e>
                                         <m:r>
                                           <a:rPr lang="zh-TW" altLang="ar-AE" i="1">
+                                            <a:highlight>
+                                              <a:srgbClr val="FFFF00"/>
+                                            </a:highlight>
                                             <a:latin typeface="Cambria Math" panose="02040503050406030204" pitchFamily="18" charset="0"/>
                                           </a:rPr>
                                           <m:t>𝑦</m:t>
@@ -24995,6 +26251,9 @@
                                       <m:sub>
                                         <m:r>
                                           <a:rPr lang="zh-TW" altLang="ar-AE" i="1">
+                                            <a:highlight>
+                                              <a:srgbClr val="FFFF00"/>
+                                            </a:highlight>
                                             <a:latin typeface="Cambria Math" panose="02040503050406030204" pitchFamily="18" charset="0"/>
                                           </a:rPr>
                                           <m:t>𝑖</m:t>
@@ -25003,6 +26262,9 @@
                                     </m:sSub>
                                     <m:r>
                                       <a:rPr lang="ar-AE" altLang="zh-TW" i="0">
+                                        <a:highlight>
+                                          <a:srgbClr val="FFFF00"/>
+                                        </a:highlight>
                                         <a:latin typeface="Cambria Math" panose="02040503050406030204" pitchFamily="18" charset="0"/>
                                       </a:rPr>
                                       <m:t>−</m:t>
@@ -25011,6 +26273,9 @@
                                       <m:sSubPr>
                                         <m:ctrlPr>
                                           <a:rPr lang="ar-AE" altLang="zh-TW" i="1">
+                                            <a:highlight>
+                                              <a:srgbClr val="FFFF00"/>
+                                            </a:highlight>
                                             <a:latin typeface="Cambria Math" panose="02040503050406030204" pitchFamily="18" charset="0"/>
                                           </a:rPr>
                                         </m:ctrlPr>
@@ -25021,6 +26286,9 @@
                                             <m:chr m:val="̂"/>
                                             <m:ctrlPr>
                                               <a:rPr lang="ar-AE" altLang="zh-TW" i="1">
+                                                <a:highlight>
+                                                  <a:srgbClr val="FFFF00"/>
+                                                </a:highlight>
                                                 <a:latin typeface="Cambria Math" panose="02040503050406030204" pitchFamily="18" charset="0"/>
                                               </a:rPr>
                                             </m:ctrlPr>
@@ -25028,6 +26296,9 @@
                                           <m:e>
                                             <m:r>
                                               <a:rPr lang="zh-TW" altLang="ar-AE" i="1">
+                                                <a:highlight>
+                                                  <a:srgbClr val="FFFF00"/>
+                                                </a:highlight>
                                                 <a:latin typeface="Cambria Math" panose="02040503050406030204" pitchFamily="18" charset="0"/>
                                               </a:rPr>
                                               <m:t>𝑦</m:t>
@@ -25038,6 +26309,9 @@
                                       <m:sub>
                                         <m:r>
                                           <a:rPr lang="zh-TW" altLang="ar-AE" i="1">
+                                            <a:highlight>
+                                              <a:srgbClr val="FFFF00"/>
+                                            </a:highlight>
                                             <a:latin typeface="Cambria Math" panose="02040503050406030204" pitchFamily="18" charset="0"/>
                                           </a:rPr>
                                           <m:t>𝑖</m:t>
@@ -25054,6 +26328,9 @@
                               <a:srgbClr val="1E293B"/>
                             </a:solidFill>
                             <a:effectLst/>
+                            <a:highlight>
+                              <a:srgbClr val="FFFF00"/>
+                            </a:highlight>
                           </a:endParaRPr>
                         </a:p>
                       </a:txBody>
@@ -25101,6 +26378,9 @@
                                 <a:srgbClr val="1E293B"/>
                               </a:solidFill>
                               <a:effectLst/>
+                              <a:highlight>
+                                <a:srgbClr val="FFFF00"/>
+                              </a:highlight>
                             </a:rPr>
                             <a:t>RMSE</a:t>
                           </a:r>
@@ -25127,6 +26407,9 @@
                                     <m:degHide m:val="on"/>
                                     <m:ctrlPr>
                                       <a:rPr lang="ar-AE" altLang="zh-TW" b="0" i="1">
+                                        <a:highlight>
+                                          <a:srgbClr val="FFFF00"/>
+                                        </a:highlight>
                                         <a:latin typeface="Cambria Math" panose="02040503050406030204" pitchFamily="18" charset="0"/>
                                       </a:rPr>
                                     </m:ctrlPr>
@@ -25137,7 +26420,11 @@
                                       <m:rPr>
                                         <m:nor/>
                                       </m:rPr>
-                                      <a:rPr lang="en-US" altLang="zh-TW" b="0"/>
+                                      <a:rPr lang="en-US" altLang="zh-TW" b="0">
+                                        <a:highlight>
+                                          <a:srgbClr val="FFFF00"/>
+                                        </a:highlight>
+                                      </a:rPr>
                                       <m:t>MSE</m:t>
                                     </m:r>
                                   </m:e>
@@ -25150,6 +26437,9 @@
                               <a:srgbClr val="1E293B"/>
                             </a:solidFill>
                             <a:effectLst/>
+                            <a:highlight>
+                              <a:srgbClr val="FFFF00"/>
+                            </a:highlight>
                           </a:endParaRPr>
                         </a:p>
                       </a:txBody>
@@ -25192,11 +26482,14 @@
                             <a:buNone/>
                           </a:pPr>
                           <a:r>
-                            <a:rPr lang="en-US">
+                            <a:rPr lang="en-US" dirty="0">
                               <a:solidFill>
                                 <a:srgbClr val="1E293B"/>
                               </a:solidFill>
                               <a:effectLst/>
+                              <a:highlight>
+                                <a:srgbClr val="FFFF00"/>
+                              </a:highlight>
                             </a:rPr>
                             <a:t>R² / Adj. R²</a:t>
                           </a:r>
@@ -25213,62 +26506,99 @@
                             <a:buNone/>
                           </a:pPr>
                           <a14:m>
-                            <m:oMathPara xmlns:m="http://schemas.openxmlformats.org/officeDocument/2006/math">
-                              <m:oMathParaPr>
-                                <m:jc m:val="left"/>
-                              </m:oMathParaPr>
-                              <m:oMath xmlns:m="http://schemas.openxmlformats.org/officeDocument/2006/math">
-                                <m:r>
-                                  <a:rPr lang="ar-AE" altLang="zh-TW">
-                                    <a:latin typeface="Cambria Math" panose="02040503050406030204" pitchFamily="18" charset="0"/>
-                                  </a:rPr>
-                                  <m:t>1</m:t>
-                                </m:r>
-                                <m:r>
-                                  <a:rPr lang="ar-AE" altLang="zh-TW" i="0">
-                                    <a:latin typeface="Cambria Math" panose="02040503050406030204" pitchFamily="18" charset="0"/>
-                                  </a:rPr>
-                                  <m:t>−</m:t>
-                                </m:r>
-                                <m:f>
-                                  <m:fPr>
-                                    <m:ctrlPr>
-                                      <a:rPr lang="ar-AE" altLang="zh-TW" i="1">
-                                        <a:latin typeface="Cambria Math" panose="02040503050406030204" pitchFamily="18" charset="0"/>
-                                      </a:rPr>
-                                    </m:ctrlPr>
-                                  </m:fPr>
-                                  <m:num>
-                                    <m:r>
-                                      <m:rPr>
-                                        <m:nor/>
-                                      </m:rPr>
-                                      <a:rPr lang="en-US" altLang="zh-TW" b="0" i="1">
-                                        <a:latin typeface="Cambria Math" panose="02040503050406030204" pitchFamily="18" charset="0"/>
-                                      </a:rPr>
-                                      <m:t>SSres</m:t>
-                                    </m:r>
-                                  </m:num>
-                                  <m:den>
-                                    <m:r>
-                                      <m:rPr>
-                                        <m:nor/>
-                                      </m:rPr>
-                                      <a:rPr lang="en-US" altLang="zh-TW" b="0" i="1">
-                                        <a:latin typeface="Cambria Math" panose="02040503050406030204" pitchFamily="18" charset="0"/>
-                                      </a:rPr>
-                                      <m:t>SStot</m:t>
-                                    </m:r>
-                                  </m:den>
-                                </m:f>
-                              </m:oMath>
-                            </m:oMathPara>
+                            <m:oMath xmlns:m="http://schemas.openxmlformats.org/officeDocument/2006/math">
+                              <m:r>
+                                <a:rPr lang="ar-AE" altLang="zh-TW">
+                                  <a:highlight>
+                                    <a:srgbClr val="FFFF00"/>
+                                  </a:highlight>
+                                  <a:latin typeface="Cambria Math" panose="02040503050406030204" pitchFamily="18" charset="0"/>
+                                </a:rPr>
+                                <m:t>1</m:t>
+                              </m:r>
+                              <m:r>
+                                <a:rPr lang="ar-AE" altLang="zh-TW" i="0">
+                                  <a:highlight>
+                                    <a:srgbClr val="FFFF00"/>
+                                  </a:highlight>
+                                  <a:latin typeface="Cambria Math" panose="02040503050406030204" pitchFamily="18" charset="0"/>
+                                </a:rPr>
+                                <m:t>−</m:t>
+                              </m:r>
+                              <m:f>
+                                <m:fPr>
+                                  <m:ctrlPr>
+                                    <a:rPr lang="ar-AE" altLang="zh-TW" i="1">
+                                      <a:highlight>
+                                        <a:srgbClr val="FFFF00"/>
+                                      </a:highlight>
+                                      <a:latin typeface="Cambria Math" panose="02040503050406030204" pitchFamily="18" charset="0"/>
+                                    </a:rPr>
+                                  </m:ctrlPr>
+                                </m:fPr>
+                                <m:num>
+                                  <m:r>
+                                    <m:rPr>
+                                      <m:nor/>
+                                    </m:rPr>
+                                    <a:rPr lang="en-US" altLang="zh-TW" b="0" i="1">
+                                      <a:highlight>
+                                        <a:srgbClr val="FFFF00"/>
+                                      </a:highlight>
+                                      <a:latin typeface="Cambria Math" panose="02040503050406030204" pitchFamily="18" charset="0"/>
+                                    </a:rPr>
+                                    <m:t>SSres</m:t>
+                                  </m:r>
+                                </m:num>
+                                <m:den>
+                                  <m:r>
+                                    <m:rPr>
+                                      <m:nor/>
+                                    </m:rPr>
+                                    <a:rPr lang="en-US" altLang="zh-TW" b="0" i="1">
+                                      <a:highlight>
+                                        <a:srgbClr val="FFFF00"/>
+                                      </a:highlight>
+                                      <a:latin typeface="Cambria Math" panose="02040503050406030204" pitchFamily="18" charset="0"/>
+                                    </a:rPr>
+                                    <m:t>SStot</m:t>
+                                  </m:r>
+                                </m:den>
+                              </m:f>
+                            </m:oMath>
                           </a14:m>
-                          <a:endParaRPr lang="ar-AE" dirty="0">
+                          <a:r>
+                            <a:rPr lang="zh-TW" altLang="en-US" dirty="0">
+                              <a:solidFill>
+                                <a:srgbClr val="1E293B"/>
+                              </a:solidFill>
+                              <a:effectLst/>
+                              <a:highlight>
+                                <a:srgbClr val="FFFF00"/>
+                              </a:highlight>
+                            </a:rPr>
+                            <a:t>    </a:t>
+                          </a:r>
+                          <a:r>
+                            <a:rPr lang="zh-TW" altLang="en-US" b="1" dirty="0">
+                              <a:solidFill>
+                                <a:srgbClr val="FF0000"/>
+                              </a:solidFill>
+                              <a:effectLst/>
+                              <a:highlight>
+                                <a:srgbClr val="FFFF00"/>
+                              </a:highlight>
+                            </a:rPr>
+                            <a:t>寫錯要改</a:t>
+                          </a:r>
+                          <a:endParaRPr lang="ar-AE" b="1" dirty="0">
                             <a:solidFill>
-                              <a:srgbClr val="1E293B"/>
+                              <a:srgbClr val="FF0000"/>
                             </a:solidFill>
                             <a:effectLst/>
+                            <a:highlight>
+                              <a:srgbClr val="FFFF00"/>
+                            </a:highlight>
                           </a:endParaRPr>
                         </a:p>
                       </a:txBody>
@@ -25306,7 +26636,7 @@
             </a:graphic>
           </p:graphicFrame>
         </mc:Choice>
-        <mc:Fallback xmlns="">
+        <mc:Fallback>
           <p:graphicFrame>
             <p:nvGraphicFramePr>
               <p:cNvPr id="2" name="表格 1">
@@ -25322,14 +26652,14 @@
               <p:nvPr>
                 <p:extLst>
                   <p:ext uri="{D42A27DB-BD31-4B8C-83A1-F6EECF244321}">
-                    <p14:modId xmlns:p14="http://schemas.microsoft.com/office/powerpoint/2010/main" val="2279543968"/>
+                    <p14:modId xmlns:p14="http://schemas.microsoft.com/office/powerpoint/2010/main" val="1856747147"/>
                   </p:ext>
                 </p:extLst>
               </p:nvPr>
             </p:nvGraphicFramePr>
             <p:xfrm>
               <a:off x="647700" y="3639846"/>
-              <a:ext cx="9373419" cy="2260760"/>
+              <a:ext cx="9373419" cy="2200880"/>
             </p:xfrm>
             <a:graphic>
               <a:graphicData uri="http://schemas.openxmlformats.org/drawingml/2006/table">
@@ -25452,11 +26782,14 @@
                             <a:buNone/>
                           </a:pPr>
                           <a:r>
-                            <a:rPr lang="en-US">
+                            <a:rPr lang="en-US" dirty="0">
                               <a:solidFill>
                                 <a:srgbClr val="1E293B"/>
                               </a:solidFill>
                               <a:effectLst/>
+                              <a:highlight>
+                                <a:srgbClr val="FFFF00"/>
+                              </a:highlight>
                             </a:rPr>
                             <a:t>MAE / MSE</a:t>
                           </a:r>
@@ -25476,7 +26809,7 @@
                         <a:blipFill>
                           <a:blip r:embed="rId3"/>
                           <a:stretch>
-                            <a:fillRect l="-100391" t="-79808" r="-100586" b="-179808"/>
+                            <a:fillRect l="-100391" t="-79808" r="-100586" b="-170192"/>
                           </a:stretch>
                         </a:blipFill>
                       </a:tcPr>
@@ -25523,6 +26856,9 @@
                                 <a:srgbClr val="1E293B"/>
                               </a:solidFill>
                               <a:effectLst/>
+                              <a:highlight>
+                                <a:srgbClr val="FFFF00"/>
+                              </a:highlight>
                             </a:rPr>
                             <a:t>RMSE</a:t>
                           </a:r>
@@ -25542,7 +26878,7 @@
                         <a:blipFill>
                           <a:blip r:embed="rId3"/>
                           <a:stretch>
-                            <a:fillRect l="-100391" t="-228049" r="-100586" b="-128049"/>
+                            <a:fillRect l="-100391" t="-228049" r="-100586" b="-115854"/>
                           </a:stretch>
                         </a:blipFill>
                       </a:tcPr>
@@ -25574,7 +26910,7 @@
                       </a:ext>
                     </a:extLst>
                   </a:tr>
-                  <a:tr h="629412">
+                  <a:tr h="569532">
                     <a:tc>
                       <a:txBody>
                         <a:bodyPr/>
@@ -25584,11 +26920,14 @@
                             <a:buNone/>
                           </a:pPr>
                           <a:r>
-                            <a:rPr lang="en-US">
+                            <a:rPr lang="en-US" dirty="0">
                               <a:solidFill>
                                 <a:srgbClr val="1E293B"/>
                               </a:solidFill>
                               <a:effectLst/>
+                              <a:highlight>
+                                <a:srgbClr val="FFFF00"/>
+                              </a:highlight>
                             </a:rPr>
                             <a:t>R² / Adj. R²</a:t>
                           </a:r>
@@ -25608,7 +26947,7 @@
                         <a:blipFill>
                           <a:blip r:embed="rId3"/>
                           <a:stretch>
-                            <a:fillRect l="-100391" t="-261165" r="-100586" b="-1942"/>
+                            <a:fillRect l="-100391" t="-286170" r="-100586" b="-1064"/>
                           </a:stretch>
                         </a:blipFill>
                       </a:tcPr>
@@ -26040,7 +27379,7 @@
               <a:buNone/>
             </a:pPr>
             <a:r>
-              <a:rPr lang="en-US" sz="3300" b="1" i="0" u="none" strike="noStrike" cap="none">
+              <a:rPr lang="en-US" sz="3300" b="1" i="0" u="none" strike="noStrike" cap="none" dirty="0" err="1">
                 <a:solidFill>
                   <a:srgbClr val="002147"/>
                 </a:solidFill>
@@ -26051,7 +27390,7 @@
               </a:rPr>
               <a:t>統計模型：ARIMA</a:t>
             </a:r>
-            <a:endParaRPr/>
+            <a:endParaRPr dirty="0"/>
           </a:p>
         </p:txBody>
       </p:sp>
@@ -26100,6 +27439,84 @@
               <a:cs typeface="Calibri"/>
               <a:sym typeface="Calibri"/>
             </a:endParaRPr>
+          </a:p>
+        </p:txBody>
+      </p:sp>
+      <p:sp>
+        <p:nvSpPr>
+          <p:cNvPr id="3" name="文字方塊 2">
+            <a:extLst>
+              <a:ext uri="{FF2B5EF4-FFF2-40B4-BE49-F238E27FC236}">
+                <a16:creationId xmlns:a16="http://schemas.microsoft.com/office/drawing/2014/main" id="{BEFB8C60-E17A-92BA-389E-4256222211E3}"/>
+              </a:ext>
+            </a:extLst>
+          </p:cNvPr>
+          <p:cNvSpPr txBox="1"/>
+          <p:nvPr/>
+        </p:nvSpPr>
+        <p:spPr>
+          <a:xfrm>
+            <a:off x="3682181" y="4827567"/>
+            <a:ext cx="2109019" cy="523220"/>
+          </a:xfrm>
+          <a:prstGeom prst="rect">
+            <a:avLst/>
+          </a:prstGeom>
+          <a:noFill/>
+        </p:spPr>
+        <p:txBody>
+          <a:bodyPr wrap="square">
+            <a:spAutoFit/>
+          </a:bodyPr>
+          <a:lstStyle/>
+          <a:p>
+            <a:r>
+              <a:rPr lang="zh-TW" altLang="en-US" sz="2800" dirty="0">
+                <a:solidFill>
+                  <a:srgbClr val="FF0000"/>
+                </a:solidFill>
+              </a:rPr>
+              <a:t>說明一下 </a:t>
+            </a:r>
+          </a:p>
+        </p:txBody>
+      </p:sp>
+      <p:sp>
+        <p:nvSpPr>
+          <p:cNvPr id="4" name="文字方塊 3">
+            <a:extLst>
+              <a:ext uri="{FF2B5EF4-FFF2-40B4-BE49-F238E27FC236}">
+                <a16:creationId xmlns:a16="http://schemas.microsoft.com/office/drawing/2014/main" id="{6CE58700-F8D0-E2BD-D0A4-9F530258C262}"/>
+              </a:ext>
+            </a:extLst>
+          </p:cNvPr>
+          <p:cNvSpPr txBox="1"/>
+          <p:nvPr/>
+        </p:nvSpPr>
+        <p:spPr>
+          <a:xfrm>
+            <a:off x="7492181" y="5131400"/>
+            <a:ext cx="2939845" cy="523220"/>
+          </a:xfrm>
+          <a:prstGeom prst="rect">
+            <a:avLst/>
+          </a:prstGeom>
+          <a:noFill/>
+        </p:spPr>
+        <p:txBody>
+          <a:bodyPr wrap="square">
+            <a:spAutoFit/>
+          </a:bodyPr>
+          <a:lstStyle/>
+          <a:p>
+            <a:r>
+              <a:rPr lang="zh-TW" altLang="en-US" sz="2800" dirty="0">
+                <a:solidFill>
+                  <a:srgbClr val="FF0000"/>
+                </a:solidFill>
+              </a:rPr>
+              <a:t>把實作做出來</a:t>
+            </a:r>
           </a:p>
         </p:txBody>
       </p:sp>
@@ -26112,6 +27529,221 @@
 </file>
 
 <file path=ppt/slides/slide8.xml><?xml version="1.0" encoding="utf-8"?>
+<p:sld xmlns:a="http://schemas.openxmlformats.org/drawingml/2006/main" xmlns:r="http://schemas.openxmlformats.org/officeDocument/2006/relationships" xmlns:p="http://schemas.openxmlformats.org/presentationml/2006/main">
+  <p:cSld>
+    <p:spTree>
+      <p:nvGrpSpPr>
+        <p:cNvPr id="1" name=""/>
+        <p:cNvGrpSpPr/>
+        <p:nvPr/>
+      </p:nvGrpSpPr>
+      <p:grpSpPr>
+        <a:xfrm>
+          <a:off x="0" y="0"/>
+          <a:ext cx="0" cy="0"/>
+          <a:chOff x="0" y="0"/>
+          <a:chExt cx="0" cy="0"/>
+        </a:xfrm>
+      </p:grpSpPr>
+      <p:sp>
+        <p:nvSpPr>
+          <p:cNvPr id="2" name="標題 1">
+            <a:extLst>
+              <a:ext uri="{FF2B5EF4-FFF2-40B4-BE49-F238E27FC236}">
+                <a16:creationId xmlns:a16="http://schemas.microsoft.com/office/drawing/2014/main" id="{C64BD6D0-2BCB-198A-5DDE-DFC10AE23258}"/>
+              </a:ext>
+            </a:extLst>
+          </p:cNvPr>
+          <p:cNvSpPr>
+            <a:spLocks noGrp="1"/>
+          </p:cNvSpPr>
+          <p:nvPr>
+            <p:ph type="title"/>
+          </p:nvPr>
+        </p:nvSpPr>
+        <p:spPr/>
+        <p:txBody>
+          <a:bodyPr/>
+          <a:lstStyle/>
+          <a:p>
+            <a:r>
+              <a:rPr lang="en-US" altLang="zh-TW" b="1" dirty="0">
+                <a:solidFill>
+                  <a:srgbClr val="002147"/>
+                </a:solidFill>
+                <a:latin typeface="Merriweather"/>
+                <a:ea typeface="Merriweather"/>
+                <a:cs typeface="Merriweather"/>
+                <a:sym typeface="Merriweather"/>
+              </a:rPr>
+              <a:t>ARIMA</a:t>
+            </a:r>
+            <a:endParaRPr lang="zh-TW" altLang="en-US" dirty="0"/>
+          </a:p>
+        </p:txBody>
+      </p:sp>
+      <p:sp>
+        <p:nvSpPr>
+          <p:cNvPr id="3" name="文字版面配置區 2">
+            <a:extLst>
+              <a:ext uri="{FF2B5EF4-FFF2-40B4-BE49-F238E27FC236}">
+                <a16:creationId xmlns:a16="http://schemas.microsoft.com/office/drawing/2014/main" id="{DE468B97-B4C8-2CBC-3736-A774B59503A0}"/>
+              </a:ext>
+            </a:extLst>
+          </p:cNvPr>
+          <p:cNvSpPr>
+            <a:spLocks noGrp="1"/>
+          </p:cNvSpPr>
+          <p:nvPr>
+            <p:ph type="body" idx="1"/>
+          </p:nvPr>
+        </p:nvSpPr>
+        <p:spPr>
+          <a:xfrm>
+            <a:off x="457199" y="1600200"/>
+            <a:ext cx="11321845" cy="4525963"/>
+          </a:xfrm>
+        </p:spPr>
+        <p:txBody>
+          <a:bodyPr>
+            <a:normAutofit/>
+          </a:bodyPr>
+          <a:lstStyle/>
+          <a:p>
+            <a:r>
+              <a:rPr lang="zh-TW" altLang="en-US" dirty="0"/>
+              <a:t>最常用</a:t>
+            </a:r>
+            <a:endParaRPr lang="en-US" altLang="zh-TW" dirty="0"/>
+          </a:p>
+          <a:p>
+            <a:r>
+              <a:rPr lang="zh-TW" altLang="en-US" dirty="0"/>
+              <a:t>單變量</a:t>
+            </a:r>
+            <a:endParaRPr lang="en-US" altLang="zh-TW" dirty="0"/>
+          </a:p>
+          <a:p>
+            <a:r>
+              <a:rPr lang="zh-TW" altLang="en-US" dirty="0"/>
+              <a:t>把三個整合為一體</a:t>
+            </a:r>
+            <a:endParaRPr lang="en-US" altLang="zh-TW" dirty="0"/>
+          </a:p>
+          <a:p>
+            <a:r>
+              <a:rPr lang="en-US" altLang="zh-TW" dirty="0"/>
+              <a:t>ARIMA = </a:t>
+            </a:r>
+            <a:r>
+              <a:rPr lang="en-US" altLang="zh-TW" dirty="0" err="1"/>
+              <a:t>AutoRegressive</a:t>
+            </a:r>
+            <a:r>
+              <a:rPr lang="en-US" altLang="zh-TW" dirty="0"/>
+              <a:t> Integrated Moving Average</a:t>
+            </a:r>
+            <a:r>
+              <a:rPr lang="zh-TW" altLang="en-US" dirty="0"/>
+              <a:t>，由三個部分組成，參數寫成 </a:t>
+            </a:r>
+            <a:r>
+              <a:rPr lang="en-US" altLang="zh-TW" b="1" dirty="0"/>
+              <a:t>(p, d, q)</a:t>
+            </a:r>
+            <a:r>
+              <a:rPr lang="zh-TW" altLang="en-US" dirty="0"/>
+              <a:t>：</a:t>
+            </a:r>
+          </a:p>
+          <a:p>
+            <a:r>
+              <a:rPr lang="en-US" altLang="zh-TW" b="1" dirty="0"/>
+              <a:t>AR(p) </a:t>
+            </a:r>
+            <a:r>
+              <a:rPr lang="zh-TW" altLang="en-US" b="1" dirty="0"/>
+              <a:t>自迴歸</a:t>
+            </a:r>
+            <a:r>
+              <a:rPr lang="zh-TW" altLang="en-US" dirty="0"/>
+              <a:t>：用過去 </a:t>
+            </a:r>
+            <a:r>
+              <a:rPr lang="en-US" altLang="zh-TW" dirty="0"/>
+              <a:t>p </a:t>
+            </a:r>
+            <a:r>
+              <a:rPr lang="zh-TW" altLang="en-US" dirty="0"/>
+              <a:t>期的「值」預測現在</a:t>
+            </a:r>
+          </a:p>
+          <a:p>
+            <a:r>
+              <a:rPr lang="en-US" altLang="zh-TW" b="1" dirty="0"/>
+              <a:t>I(d) </a:t>
+            </a:r>
+            <a:r>
+              <a:rPr lang="zh-TW" altLang="en-US" b="1" dirty="0"/>
+              <a:t>差分</a:t>
+            </a:r>
+            <a:r>
+              <a:rPr lang="zh-TW" altLang="en-US" dirty="0"/>
+              <a:t>：做 </a:t>
+            </a:r>
+            <a:r>
+              <a:rPr lang="en-US" altLang="zh-TW" dirty="0"/>
+              <a:t>d </a:t>
+            </a:r>
+            <a:r>
+              <a:rPr lang="zh-TW" altLang="en-US" dirty="0"/>
+              <a:t>次差分，把不穩定的序列轉成穩定</a:t>
+            </a:r>
+          </a:p>
+          <a:p>
+            <a:r>
+              <a:rPr lang="en-US" altLang="zh-TW" b="1" dirty="0"/>
+              <a:t>MA(q) </a:t>
+            </a:r>
+            <a:r>
+              <a:rPr lang="zh-TW" altLang="en-US" b="1" dirty="0"/>
+              <a:t>移動平均</a:t>
+            </a:r>
+            <a:r>
+              <a:rPr lang="zh-TW" altLang="en-US" dirty="0"/>
+              <a:t>：用過去 </a:t>
+            </a:r>
+            <a:r>
+              <a:rPr lang="en-US" altLang="zh-TW" dirty="0"/>
+              <a:t>q </a:t>
+            </a:r>
+            <a:r>
+              <a:rPr lang="zh-TW" altLang="en-US" dirty="0"/>
+              <a:t>期的「預測誤差」修正</a:t>
+            </a:r>
+          </a:p>
+          <a:p>
+            <a:endParaRPr lang="zh-TW" altLang="en-US" dirty="0"/>
+          </a:p>
+          <a:p>
+            <a:endParaRPr lang="zh-TW" altLang="en-US" dirty="0"/>
+          </a:p>
+        </p:txBody>
+      </p:sp>
+    </p:spTree>
+    <p:extLst>
+      <p:ext uri="{BB962C8B-B14F-4D97-AF65-F5344CB8AC3E}">
+        <p14:creationId xmlns:p14="http://schemas.microsoft.com/office/powerpoint/2010/main" val="240424090"/>
+      </p:ext>
+    </p:extLst>
+  </p:cSld>
+  <p:clrMapOvr>
+    <a:masterClrMapping/>
+  </p:clrMapOvr>
+</p:sld>
+</file>
+
+<file path=ppt/slides/slide9.xml><?xml version="1.0" encoding="utf-8"?>
 <p:sld xmlns:a="http://schemas.openxmlformats.org/drawingml/2006/main" xmlns:r="http://schemas.openxmlformats.org/officeDocument/2006/relationships" xmlns:p="http://schemas.openxmlformats.org/presentationml/2006/main">
   <p:cSld>
     <p:bg>
@@ -26644,7 +28276,7 @@
         <p:spPr>
           <a:xfrm>
             <a:off x="809625" y="919311"/>
-            <a:ext cx="11351418" cy="502890"/>
+            <a:ext cx="11351418" cy="609398"/>
           </a:xfrm>
           <a:prstGeom prst="rect">
             <a:avLst/>
@@ -26673,7 +28305,7 @@
               <a:buNone/>
             </a:pPr>
             <a:r>
-              <a:rPr lang="en-US" sz="3300" b="1" i="0" u="none" strike="noStrike" cap="none">
+              <a:rPr lang="en-US" sz="3300" b="1" i="0" u="none" strike="noStrike" cap="none" dirty="0" err="1">
                 <a:solidFill>
                   <a:srgbClr val="002147"/>
                 </a:solidFill>
@@ -26682,9 +28314,57 @@
                 <a:cs typeface="Merriweather"/>
                 <a:sym typeface="Merriweather"/>
               </a:rPr>
-              <a:t>機器學習：集成迴歸模型</a:t>
-            </a:r>
-            <a:endParaRPr/>
+              <a:t>機器學習：</a:t>
+            </a:r>
+            <a:r>
+              <a:rPr lang="en-US" sz="3300" b="1" i="0" u="none" strike="noStrike" cap="none" dirty="0" err="1">
+                <a:solidFill>
+                  <a:srgbClr val="FF0000"/>
+                </a:solidFill>
+                <a:latin typeface="Merriweather"/>
+                <a:ea typeface="Merriweather"/>
+                <a:cs typeface="Merriweather"/>
+                <a:sym typeface="Merriweather"/>
+              </a:rPr>
+              <a:t>集成sample</a:t>
+            </a:r>
+            <a:r>
+              <a:rPr lang="en-US" sz="3300" b="1" i="0" u="none" strike="noStrike" cap="none" dirty="0">
+                <a:solidFill>
+                  <a:srgbClr val="FF0000"/>
+                </a:solidFill>
+                <a:latin typeface="Merriweather"/>
+                <a:ea typeface="Merriweather"/>
+                <a:cs typeface="Merriweather"/>
+                <a:sym typeface="Merriweather"/>
+              </a:rPr>
+              <a:t> </a:t>
+            </a:r>
+            <a:r>
+              <a:rPr lang="en-US" sz="3300" b="1" i="0" u="none" strike="noStrike" cap="none" dirty="0" err="1">
+                <a:solidFill>
+                  <a:srgbClr val="FF0000"/>
+                </a:solidFill>
+                <a:latin typeface="Merriweather"/>
+                <a:ea typeface="Merriweather"/>
+                <a:cs typeface="Merriweather"/>
+                <a:sym typeface="Merriweather"/>
+              </a:rPr>
+              <a:t>learning</a:t>
+            </a:r>
+            <a:r>
+              <a:rPr lang="en-US" sz="3300" b="1" i="0" u="none" strike="noStrike" cap="none" dirty="0" err="1">
+                <a:solidFill>
+                  <a:srgbClr val="002147"/>
+                </a:solidFill>
+                <a:latin typeface="Merriweather"/>
+                <a:ea typeface="Merriweather"/>
+                <a:cs typeface="Merriweather"/>
+                <a:sym typeface="Merriweather"/>
+              </a:rPr>
+              <a:t>迴歸模型</a:t>
+            </a:r>
+            <a:endParaRPr dirty="0"/>
           </a:p>
         </p:txBody>
       </p:sp>
@@ -26929,56 +28609,22 @@
           </a:p>
         </p:txBody>
       </p:sp>
-    </p:spTree>
-  </p:cSld>
-  <p:clrMapOvr>
-    <a:masterClrMapping/>
-  </p:clrMapOvr>
-</p:sld>
-</file>
-
-<file path=ppt/slides/slide9.xml><?xml version="1.0" encoding="utf-8"?>
-<p:sld xmlns:a="http://schemas.openxmlformats.org/drawingml/2006/main" xmlns:r="http://schemas.openxmlformats.org/officeDocument/2006/relationships" xmlns:p="http://schemas.openxmlformats.org/presentationml/2006/main">
-  <p:cSld>
-    <p:bg>
-      <p:bgPr>
-        <a:solidFill>
-          <a:srgbClr val="FFFFFF"/>
-        </a:solidFill>
-        <a:effectLst/>
-      </p:bgPr>
-    </p:bg>
-    <p:spTree>
-      <p:nvGrpSpPr>
-        <p:cNvPr id="1" name="Shape 223"/>
-        <p:cNvGrpSpPr/>
-        <p:nvPr/>
-      </p:nvGrpSpPr>
-      <p:grpSpPr>
-        <a:xfrm>
-          <a:off x="0" y="0"/>
-          <a:ext cx="0" cy="0"/>
-          <a:chOff x="0" y="0"/>
-          <a:chExt cx="0" cy="0"/>
-        </a:xfrm>
-      </p:grpSpPr>
-      <p:pic>
-        <p:nvPicPr>
-          <p:cNvPr id="225" name="Google Shape;225;p21" descr="image.png"/>
-          <p:cNvPicPr preferRelativeResize="0"/>
+      <p:sp>
+        <p:nvSpPr>
+          <p:cNvPr id="6" name="Google Shape;210;p20">
+            <a:extLst>
+              <a:ext uri="{FF2B5EF4-FFF2-40B4-BE49-F238E27FC236}">
+                <a16:creationId xmlns:a16="http://schemas.microsoft.com/office/drawing/2014/main" id="{A5B9CAE6-49DF-5162-5179-B60FF15FB9F4}"/>
+              </a:ext>
+            </a:extLst>
+          </p:cNvPr>
+          <p:cNvSpPr txBox="1"/>
           <p:nvPr/>
-        </p:nvPicPr>
-        <p:blipFill rotWithShape="1">
-          <a:blip r:embed="rId3">
-            <a:alphaModFix/>
-          </a:blip>
-          <a:srcRect/>
-          <a:stretch/>
-        </p:blipFill>
-        <p:spPr>
-          <a:xfrm>
-            <a:off x="5727209" y="2006219"/>
-            <a:ext cx="6183261" cy="4338225"/>
+        </p:nvSpPr>
+        <p:spPr>
+          <a:xfrm>
+            <a:off x="4856996" y="4443364"/>
+            <a:ext cx="3100387" cy="369332"/>
           </a:xfrm>
           <a:prstGeom prst="rect">
             <a:avLst/>
@@ -26988,284 +28634,173 @@
             <a:noFill/>
           </a:ln>
         </p:spPr>
-      </p:pic>
-      <p:sp>
-        <p:nvSpPr>
-          <p:cNvPr id="226" name="Google Shape;226;p21"/>
-          <p:cNvSpPr txBox="1"/>
-          <p:nvPr/>
-        </p:nvSpPr>
-        <p:spPr>
-          <a:xfrm>
-            <a:off x="386305" y="2566580"/>
-            <a:ext cx="5747795" cy="2462854"/>
-          </a:xfrm>
-          <a:prstGeom prst="rect">
-            <a:avLst/>
-          </a:prstGeom>
-          <a:noFill/>
-          <a:ln>
-            <a:noFill/>
-          </a:ln>
-        </p:spPr>
         <p:txBody>
           <a:bodyPr spcFirstLastPara="1" wrap="square" lIns="0" tIns="0" rIns="0" bIns="0" anchor="t" anchorCtr="0">
             <a:spAutoFit/>
           </a:bodyPr>
-          <a:lstStyle/>
-          <a:p>
-            <a:pPr marL="0" marR="0" lvl="0" indent="0" algn="l" rtl="0">
-              <a:spcBef>
-                <a:spcPts val="0"/>
-              </a:spcBef>
-              <a:spcAft>
-                <a:spcPts val="0"/>
-              </a:spcAft>
-              <a:buNone/>
-            </a:pPr>
-            <a:r>
-              <a:rPr lang="en-US" sz="2400" b="1" i="0" u="none" strike="noStrike" cap="none" dirty="0">
-                <a:solidFill>
-                  <a:srgbClr val="000000"/>
-                </a:solidFill>
-                <a:latin typeface="DM Sans"/>
+          <a:lstStyle>
+            <a:defPPr marR="0" lvl="0" algn="l" rtl="0">
+              <a:lnSpc>
+                <a:spcPct val="100000"/>
+              </a:lnSpc>
+              <a:spcBef>
+                <a:spcPts val="0"/>
+              </a:spcBef>
+              <a:spcAft>
+                <a:spcPts val="0"/>
+              </a:spcAft>
+            </a:defPPr>
+            <a:lvl1pPr marL="0" indent="0" algn="ctr">
+              <a:buNone/>
+              <a:defRPr sz="2400" b="1">
+                <a:solidFill>
+                  <a:srgbClr val="002147"/>
+                </a:solidFill>
+                <a:latin typeface="+mj-lt"/>
                 <a:ea typeface="DM Sans"/>
                 <a:cs typeface="DM Sans"/>
+              </a:defRPr>
+            </a:lvl1pPr>
+          </a:lstStyle>
+          <a:p>
+            <a:r>
+              <a:rPr lang="zh-TW" altLang="en-US" dirty="0">
+                <a:solidFill>
+                  <a:srgbClr val="FF0000"/>
+                </a:solidFill>
                 <a:sym typeface="DM Sans"/>
               </a:rPr>
-              <a:t>LSTM </a:t>
-            </a:r>
-            <a:r>
-              <a:rPr lang="en-US" sz="2400" b="1" i="0" u="none" strike="noStrike" cap="none" dirty="0" err="1">
-                <a:solidFill>
-                  <a:srgbClr val="000000"/>
-                </a:solidFill>
-                <a:latin typeface="DM Sans"/>
-                <a:ea typeface="DM Sans"/>
-                <a:cs typeface="DM Sans"/>
-                <a:sym typeface="DM Sans"/>
-              </a:rPr>
-              <a:t>架構特性</a:t>
-            </a:r>
-            <a:endParaRPr lang="en-US" sz="2400" b="1" i="0" u="none" strike="noStrike" cap="none" dirty="0">
+              <a:t>其他模型請參閱教科書</a:t>
+            </a:r>
+            <a:endParaRPr dirty="0">
               <a:solidFill>
-                <a:srgbClr val="000000"/>
+                <a:srgbClr val="FF0000"/>
               </a:solidFill>
-              <a:latin typeface="DM Sans"/>
-              <a:ea typeface="DM Sans"/>
-              <a:cs typeface="DM Sans"/>
-              <a:sym typeface="DM Sans"/>
             </a:endParaRPr>
-          </a:p>
-          <a:p>
-            <a:pPr marL="0" marR="0" lvl="0" indent="0" algn="l" rtl="0">
-              <a:spcBef>
-                <a:spcPts val="0"/>
-              </a:spcBef>
-              <a:spcAft>
-                <a:spcPts val="0"/>
-              </a:spcAft>
-              <a:buNone/>
-            </a:pPr>
-            <a:endParaRPr lang="en-US" sz="1404" b="1" dirty="0">
-              <a:latin typeface="DM Sans"/>
-              <a:sym typeface="DM Sans"/>
-            </a:endParaRPr>
-          </a:p>
-          <a:p>
-            <a:pPr marL="285750" indent="-285750">
-              <a:lnSpc>
-                <a:spcPct val="150000"/>
-              </a:lnSpc>
-              <a:buFont typeface="Arial" panose="020B0604020202020204" pitchFamily="34" charset="0"/>
-              <a:buChar char="•"/>
-            </a:pPr>
-            <a:r>
-              <a:rPr lang="zh-TW" altLang="en-US" sz="1800" dirty="0"/>
-              <a:t>透過遺忘門、輸入門與輸出門控制記憶</a:t>
-            </a:r>
-          </a:p>
-          <a:p>
-            <a:pPr marL="285750" indent="-285750">
-              <a:lnSpc>
-                <a:spcPct val="150000"/>
-              </a:lnSpc>
-              <a:buFont typeface="Arial" panose="020B0604020202020204" pitchFamily="34" charset="0"/>
-              <a:buChar char="•"/>
-            </a:pPr>
-            <a:r>
-              <a:rPr lang="zh-TW" altLang="en-US" sz="1800" dirty="0"/>
-              <a:t>擅長捕捉金融數據中的長短期依賴關係</a:t>
-            </a:r>
-          </a:p>
-          <a:p>
-            <a:pPr marL="285750" indent="-285750">
-              <a:lnSpc>
-                <a:spcPct val="150000"/>
-              </a:lnSpc>
-              <a:buFont typeface="Arial" panose="020B0604020202020204" pitchFamily="34" charset="0"/>
-              <a:buChar char="•"/>
-            </a:pPr>
-            <a:r>
-              <a:rPr lang="zh-TW" altLang="en-US" sz="1800" b="1" dirty="0"/>
-              <a:t>端到端學習：</a:t>
-            </a:r>
-            <a:r>
-              <a:rPr lang="zh-TW" altLang="en-US" sz="1800" dirty="0"/>
-              <a:t> 神經網路自動提取特徵，不需手動 </a:t>
-            </a:r>
-            <a:r>
-              <a:rPr lang="en-US" altLang="zh-TW" sz="1800" dirty="0"/>
-              <a:t>Feature Engineering</a:t>
-            </a:r>
-            <a:r>
-              <a:rPr lang="zh-TW" altLang="en-US" sz="1800" dirty="0"/>
-              <a:t>。</a:t>
-            </a:r>
-          </a:p>
-          <a:p>
-            <a:pPr marL="285750" marR="0" lvl="0" indent="-285750" algn="l" rtl="0">
-              <a:spcBef>
-                <a:spcPts val="0"/>
-              </a:spcBef>
-              <a:spcAft>
-                <a:spcPts val="0"/>
-              </a:spcAft>
-              <a:buFont typeface="Arial" panose="020B0604020202020204" pitchFamily="34" charset="0"/>
-              <a:buChar char="•"/>
-            </a:pPr>
-            <a:endParaRPr dirty="0"/>
           </a:p>
         </p:txBody>
       </p:sp>
-      <p:pic>
-        <p:nvPicPr>
-          <p:cNvPr id="227" name="Google Shape;227;p21" descr="image.png"/>
-          <p:cNvPicPr preferRelativeResize="0"/>
+      <p:cxnSp>
+        <p:nvCxnSpPr>
+          <p:cNvPr id="8" name="直線單箭頭接點 7">
+            <a:extLst>
+              <a:ext uri="{FF2B5EF4-FFF2-40B4-BE49-F238E27FC236}">
+                <a16:creationId xmlns:a16="http://schemas.microsoft.com/office/drawing/2014/main" id="{068AFE73-D5C8-F147-2024-8A7711C5E2DD}"/>
+              </a:ext>
+            </a:extLst>
+          </p:cNvPr>
+          <p:cNvCxnSpPr/>
           <p:nvPr/>
-        </p:nvPicPr>
-        <p:blipFill rotWithShape="1">
-          <a:blip r:embed="rId4">
-            <a:alphaModFix/>
-          </a:blip>
-          <a:srcRect/>
-          <a:stretch/>
-        </p:blipFill>
-        <p:spPr>
-          <a:xfrm>
-            <a:off x="5865348" y="2110994"/>
-            <a:ext cx="5940347" cy="4027530"/>
-          </a:xfrm>
-          <a:prstGeom prst="rect">
-            <a:avLst/>
-          </a:prstGeom>
-          <a:noFill/>
+        </p:nvCxnSpPr>
+        <p:spPr>
+          <a:xfrm flipV="1">
+            <a:off x="6485334" y="3864077"/>
+            <a:ext cx="456240" cy="509838"/>
+          </a:xfrm>
+          <a:prstGeom prst="straightConnector1">
+            <a:avLst/>
+          </a:prstGeom>
           <a:ln>
-            <a:noFill/>
+            <a:tailEnd type="triangle"/>
           </a:ln>
         </p:spPr>
-      </p:pic>
-      <p:sp>
-        <p:nvSpPr>
-          <p:cNvPr id="234" name="Google Shape;234;p21"/>
-          <p:cNvSpPr txBox="1"/>
+        <p:style>
+          <a:lnRef idx="1">
+            <a:schemeClr val="accent1"/>
+          </a:lnRef>
+          <a:fillRef idx="0">
+            <a:schemeClr val="accent1"/>
+          </a:fillRef>
+          <a:effectRef idx="0">
+            <a:schemeClr val="accent1"/>
+          </a:effectRef>
+          <a:fontRef idx="minor">
+            <a:schemeClr val="tx1"/>
+          </a:fontRef>
+        </p:style>
+      </p:cxnSp>
+      <p:cxnSp>
+        <p:nvCxnSpPr>
+          <p:cNvPr id="9" name="直線單箭頭接點 8">
+            <a:extLst>
+              <a:ext uri="{FF2B5EF4-FFF2-40B4-BE49-F238E27FC236}">
+                <a16:creationId xmlns:a16="http://schemas.microsoft.com/office/drawing/2014/main" id="{5EA6B0F1-9337-7CDA-47D8-016B862F581C}"/>
+              </a:ext>
+            </a:extLst>
+          </p:cNvPr>
+          <p:cNvCxnSpPr>
+            <a:cxnSpLocks/>
+          </p:cNvCxnSpPr>
           <p:nvPr/>
-        </p:nvSpPr>
-        <p:spPr>
-          <a:xfrm>
-            <a:off x="809625" y="919311"/>
-            <a:ext cx="11351418" cy="502890"/>
-          </a:xfrm>
-          <a:prstGeom prst="rect">
-            <a:avLst/>
-          </a:prstGeom>
-          <a:noFill/>
+        </p:nvCxnSpPr>
+        <p:spPr>
+          <a:xfrm>
+            <a:off x="6448146" y="4816827"/>
+            <a:ext cx="233353" cy="581025"/>
+          </a:xfrm>
+          <a:prstGeom prst="straightConnector1">
+            <a:avLst/>
+          </a:prstGeom>
           <a:ln>
-            <a:noFill/>
+            <a:tailEnd type="triangle"/>
           </a:ln>
         </p:spPr>
-        <p:txBody>
-          <a:bodyPr spcFirstLastPara="1" wrap="square" lIns="0" tIns="0" rIns="0" bIns="0" anchor="t" anchorCtr="0">
-            <a:spAutoFit/>
-          </a:bodyPr>
-          <a:lstStyle/>
-          <a:p>
-            <a:pPr marL="0" marR="0" lvl="0" indent="0" algn="l" rtl="0">
-              <a:lnSpc>
-                <a:spcPct val="119969"/>
-              </a:lnSpc>
-              <a:spcBef>
-                <a:spcPts val="0"/>
-              </a:spcBef>
-              <a:spcAft>
-                <a:spcPts val="0"/>
-              </a:spcAft>
-              <a:buNone/>
-            </a:pPr>
-            <a:r>
-              <a:rPr lang="en-US" sz="3300" b="1" i="0" u="none" strike="noStrike" cap="none">
-                <a:solidFill>
-                  <a:srgbClr val="002147"/>
-                </a:solidFill>
-                <a:latin typeface="Merriweather"/>
-                <a:ea typeface="Merriweather"/>
-                <a:cs typeface="Merriweather"/>
-                <a:sym typeface="Merriweather"/>
-              </a:rPr>
-              <a:t>深度學習：LSTM 神經網路</a:t>
-            </a:r>
-            <a:endParaRPr/>
-          </a:p>
-        </p:txBody>
-      </p:sp>
-      <p:sp>
-        <p:nvSpPr>
-          <p:cNvPr id="235" name="Google Shape;235;p21"/>
-          <p:cNvSpPr/>
+        <p:style>
+          <a:lnRef idx="1">
+            <a:schemeClr val="accent1"/>
+          </a:lnRef>
+          <a:fillRef idx="0">
+            <a:schemeClr val="accent1"/>
+          </a:fillRef>
+          <a:effectRef idx="0">
+            <a:schemeClr val="accent1"/>
+          </a:effectRef>
+          <a:fontRef idx="minor">
+            <a:schemeClr val="tx1"/>
+          </a:fontRef>
+        </p:style>
+      </p:cxnSp>
+      <p:cxnSp>
+        <p:nvCxnSpPr>
+          <p:cNvPr id="11" name="直線單箭頭接點 10">
+            <a:extLst>
+              <a:ext uri="{FF2B5EF4-FFF2-40B4-BE49-F238E27FC236}">
+                <a16:creationId xmlns:a16="http://schemas.microsoft.com/office/drawing/2014/main" id="{59E6B7A3-FB60-082E-6083-0A114BF22811}"/>
+              </a:ext>
+            </a:extLst>
+          </p:cNvPr>
+          <p:cNvCxnSpPr>
+            <a:cxnSpLocks/>
+          </p:cNvCxnSpPr>
           <p:nvPr/>
-        </p:nvSpPr>
-        <p:spPr>
-          <a:xfrm>
-            <a:off x="571500" y="919311"/>
-            <a:ext cx="76200" cy="502890"/>
-          </a:xfrm>
-          <a:prstGeom prst="rect">
-            <a:avLst/>
-          </a:prstGeom>
-          <a:solidFill>
-            <a:srgbClr val="D4AF37"/>
-          </a:solidFill>
+        </p:nvCxnSpPr>
+        <p:spPr>
+          <a:xfrm flipH="1">
+            <a:off x="4766922" y="4874608"/>
+            <a:ext cx="391259" cy="365986"/>
+          </a:xfrm>
+          <a:prstGeom prst="straightConnector1">
+            <a:avLst/>
+          </a:prstGeom>
           <a:ln>
-            <a:noFill/>
+            <a:tailEnd type="triangle"/>
           </a:ln>
         </p:spPr>
-        <p:txBody>
-          <a:bodyPr spcFirstLastPara="1" wrap="square" lIns="91425" tIns="45700" rIns="91425" bIns="45700" anchor="ctr" anchorCtr="0">
-            <a:noAutofit/>
-          </a:bodyPr>
-          <a:lstStyle/>
-          <a:p>
-            <a:pPr marL="0" marR="0" lvl="0" indent="0" algn="ctr" rtl="0">
-              <a:spcBef>
-                <a:spcPts val="0"/>
-              </a:spcBef>
-              <a:spcAft>
-                <a:spcPts val="0"/>
-              </a:spcAft>
-              <a:buNone/>
-            </a:pPr>
-            <a:endParaRPr sz="1800" b="0" i="0" u="none" strike="noStrike" cap="none">
-              <a:solidFill>
-                <a:schemeClr val="dk1"/>
-              </a:solidFill>
-              <a:latin typeface="Calibri"/>
-              <a:ea typeface="Calibri"/>
-              <a:cs typeface="Calibri"/>
-              <a:sym typeface="Calibri"/>
-            </a:endParaRPr>
-          </a:p>
-        </p:txBody>
-      </p:sp>
+        <p:style>
+          <a:lnRef idx="1">
+            <a:schemeClr val="accent1"/>
+          </a:lnRef>
+          <a:fillRef idx="0">
+            <a:schemeClr val="accent1"/>
+          </a:fillRef>
+          <a:effectRef idx="0">
+            <a:schemeClr val="accent1"/>
+          </a:effectRef>
+          <a:fontRef idx="minor">
+            <a:schemeClr val="tx1"/>
+          </a:fontRef>
+        </p:style>
+      </p:cxnSp>
     </p:spTree>
   </p:cSld>
   <p:clrMapOvr>
